--- a/plots_png/pptx/plots_png.pptx
+++ b/plots_png/pptx/plots_png.pptx
@@ -105,6 +105,11 @@
       </a:defRPr>
     </a:lvl9pPr>
   </p:defaultTextStyle>
+  <p:extLst>
+    <p:ext uri="{EFAFB233-063F-42B5-8137-9DF3F51BA10A}">
+      <p15:sldGuideLst xmlns:p15="http://schemas.microsoft.com/office/powerpoint/2012/main"/>
+    </p:ext>
+  </p:extLst>
 </p:presentation>
 </file>
 
@@ -239,7 +244,7 @@
           <a:p>
             <a:fld id="{83D14EEA-DE26-4810-8E05-A65F0010FADE}" type="datetimeFigureOut">
               <a:rPr lang="de-DE" smtClean="0"/>
-              <a:t>15.10.2025</a:t>
+              <a:t>16.10.2025</a:t>
             </a:fld>
             <a:endParaRPr lang="de-DE"/>
           </a:p>
@@ -409,7 +414,7 @@
           <a:p>
             <a:fld id="{83D14EEA-DE26-4810-8E05-A65F0010FADE}" type="datetimeFigureOut">
               <a:rPr lang="de-DE" smtClean="0"/>
-              <a:t>15.10.2025</a:t>
+              <a:t>16.10.2025</a:t>
             </a:fld>
             <a:endParaRPr lang="de-DE"/>
           </a:p>
@@ -589,7 +594,7 @@
           <a:p>
             <a:fld id="{83D14EEA-DE26-4810-8E05-A65F0010FADE}" type="datetimeFigureOut">
               <a:rPr lang="de-DE" smtClean="0"/>
-              <a:t>15.10.2025</a:t>
+              <a:t>16.10.2025</a:t>
             </a:fld>
             <a:endParaRPr lang="de-DE"/>
           </a:p>
@@ -759,7 +764,7 @@
           <a:p>
             <a:fld id="{83D14EEA-DE26-4810-8E05-A65F0010FADE}" type="datetimeFigureOut">
               <a:rPr lang="de-DE" smtClean="0"/>
-              <a:t>15.10.2025</a:t>
+              <a:t>16.10.2025</a:t>
             </a:fld>
             <a:endParaRPr lang="de-DE"/>
           </a:p>
@@ -1003,7 +1008,7 @@
           <a:p>
             <a:fld id="{83D14EEA-DE26-4810-8E05-A65F0010FADE}" type="datetimeFigureOut">
               <a:rPr lang="de-DE" smtClean="0"/>
-              <a:t>15.10.2025</a:t>
+              <a:t>16.10.2025</a:t>
             </a:fld>
             <a:endParaRPr lang="de-DE"/>
           </a:p>
@@ -1235,7 +1240,7 @@
           <a:p>
             <a:fld id="{83D14EEA-DE26-4810-8E05-A65F0010FADE}" type="datetimeFigureOut">
               <a:rPr lang="de-DE" smtClean="0"/>
-              <a:t>15.10.2025</a:t>
+              <a:t>16.10.2025</a:t>
             </a:fld>
             <a:endParaRPr lang="de-DE"/>
           </a:p>
@@ -1602,7 +1607,7 @@
           <a:p>
             <a:fld id="{83D14EEA-DE26-4810-8E05-A65F0010FADE}" type="datetimeFigureOut">
               <a:rPr lang="de-DE" smtClean="0"/>
-              <a:t>15.10.2025</a:t>
+              <a:t>16.10.2025</a:t>
             </a:fld>
             <a:endParaRPr lang="de-DE"/>
           </a:p>
@@ -1720,7 +1725,7 @@
           <a:p>
             <a:fld id="{83D14EEA-DE26-4810-8E05-A65F0010FADE}" type="datetimeFigureOut">
               <a:rPr lang="de-DE" smtClean="0"/>
-              <a:t>15.10.2025</a:t>
+              <a:t>16.10.2025</a:t>
             </a:fld>
             <a:endParaRPr lang="de-DE"/>
           </a:p>
@@ -1815,7 +1820,7 @@
           <a:p>
             <a:fld id="{83D14EEA-DE26-4810-8E05-A65F0010FADE}" type="datetimeFigureOut">
               <a:rPr lang="de-DE" smtClean="0"/>
-              <a:t>15.10.2025</a:t>
+              <a:t>16.10.2025</a:t>
             </a:fld>
             <a:endParaRPr lang="de-DE"/>
           </a:p>
@@ -2092,7 +2097,7 @@
           <a:p>
             <a:fld id="{83D14EEA-DE26-4810-8E05-A65F0010FADE}" type="datetimeFigureOut">
               <a:rPr lang="de-DE" smtClean="0"/>
-              <a:t>15.10.2025</a:t>
+              <a:t>16.10.2025</a:t>
             </a:fld>
             <a:endParaRPr lang="de-DE"/>
           </a:p>
@@ -2349,7 +2354,7 @@
           <a:p>
             <a:fld id="{83D14EEA-DE26-4810-8E05-A65F0010FADE}" type="datetimeFigureOut">
               <a:rPr lang="de-DE" smtClean="0"/>
-              <a:t>15.10.2025</a:t>
+              <a:t>16.10.2025</a:t>
             </a:fld>
             <a:endParaRPr lang="de-DE"/>
           </a:p>
@@ -2562,7 +2567,7 @@
           <a:p>
             <a:fld id="{83D14EEA-DE26-4810-8E05-A65F0010FADE}" type="datetimeFigureOut">
               <a:rPr lang="de-DE" smtClean="0"/>
-              <a:t>15.10.2025</a:t>
+              <a:t>16.10.2025</a:t>
             </a:fld>
             <a:endParaRPr lang="de-DE"/>
           </a:p>
@@ -4049,8 +4054,8 @@
         </p:nvSpPr>
         <p:spPr>
           <a:xfrm>
-            <a:off x="2318369" y="7448327"/>
-            <a:ext cx="1476961" cy="430887"/>
+            <a:off x="2025389" y="7478810"/>
+            <a:ext cx="2050431" cy="430887"/>
           </a:xfrm>
           <a:prstGeom prst="rect">
             <a:avLst/>
@@ -4070,10 +4075,21 @@
               </a:rPr>
               <a:t>Mentions of Charité Datasets</a:t>
             </a:r>
-            <a:endParaRPr lang="de-DE" sz="1100" dirty="0">
-              <a:latin typeface="Arial" panose="020B0604020202020204" pitchFamily="34" charset="0"/>
-              <a:cs typeface="Arial" panose="020B0604020202020204" pitchFamily="34" charset="0"/>
-            </a:endParaRPr>
+          </a:p>
+          <a:p>
+            <a:pPr algn="ctr"/>
+            <a:r>
+              <a:rPr lang="de-DE" sz="1100" dirty="0">
+                <a:solidFill>
+                  <a:schemeClr val="bg1">
+                    <a:lumMod val="50000"/>
+                  </a:schemeClr>
+                </a:solidFill>
+                <a:latin typeface="Arial" panose="020B0604020202020204" pitchFamily="34" charset="0"/>
+                <a:cs typeface="Arial" panose="020B0604020202020204" pitchFamily="34" charset="0"/>
+              </a:rPr>
+              <a:t>(1393 Reusing Papers)</a:t>
+            </a:r>
           </a:p>
         </p:txBody>
       </p:sp>
@@ -4744,6 +4760,680 @@
           <a:chExt cx="0" cy="0"/>
         </a:xfrm>
       </p:grpSpPr>
+      <p:sp>
+        <p:nvSpPr>
+          <p:cNvPr id="3" name="Rectangle 2">
+            <a:extLst>
+              <a:ext uri="{FF2B5EF4-FFF2-40B4-BE49-F238E27FC236}">
+                <a16:creationId xmlns:a16="http://schemas.microsoft.com/office/drawing/2014/main" id="{FE9FF791-EB9E-4172-8E36-126A1971CBBF}"/>
+              </a:ext>
+            </a:extLst>
+          </p:cNvPr>
+          <p:cNvSpPr/>
+          <p:nvPr/>
+        </p:nvSpPr>
+        <p:spPr>
+          <a:xfrm>
+            <a:off x="4311933" y="3699924"/>
+            <a:ext cx="1557989" cy="430887"/>
+          </a:xfrm>
+          <a:prstGeom prst="rect">
+            <a:avLst/>
+          </a:prstGeom>
+        </p:spPr>
+        <p:txBody>
+          <a:bodyPr wrap="square">
+            <a:spAutoFit/>
+          </a:bodyPr>
+          <a:lstStyle/>
+          <a:p>
+            <a:r>
+              <a:rPr lang="en-US" sz="1100" dirty="0">
+                <a:latin typeface="Arial" panose="020B0604020202020204" pitchFamily="34" charset="0"/>
+                <a:cs typeface="Arial" panose="020B0604020202020204" pitchFamily="34" charset="0"/>
+              </a:rPr>
+              <a:t>Confirmed Citations</a:t>
+            </a:r>
+          </a:p>
+          <a:p>
+            <a:r>
+              <a:rPr lang="de-DE" sz="1050" dirty="0">
+                <a:solidFill>
+                  <a:schemeClr val="bg1">
+                    <a:lumMod val="50000"/>
+                  </a:schemeClr>
+                </a:solidFill>
+                <a:latin typeface="Arial" panose="020B0604020202020204" pitchFamily="34" charset="0"/>
+                <a:cs typeface="Arial" panose="020B0604020202020204" pitchFamily="34" charset="0"/>
+              </a:rPr>
+              <a:t>(113 Reusing Papers)</a:t>
+            </a:r>
+          </a:p>
+        </p:txBody>
+      </p:sp>
+      <p:sp>
+        <p:nvSpPr>
+          <p:cNvPr id="32" name="Rectangle: Rounded Corners 31">
+            <a:extLst>
+              <a:ext uri="{FF2B5EF4-FFF2-40B4-BE49-F238E27FC236}">
+                <a16:creationId xmlns:a16="http://schemas.microsoft.com/office/drawing/2014/main" id="{759DB630-BAD7-4C3C-8ABD-E809EE7D6421}"/>
+              </a:ext>
+            </a:extLst>
+          </p:cNvPr>
+          <p:cNvSpPr/>
+          <p:nvPr/>
+        </p:nvSpPr>
+        <p:spPr>
+          <a:xfrm>
+            <a:off x="3464482" y="3739545"/>
+            <a:ext cx="847452" cy="351647"/>
+          </a:xfrm>
+          <a:prstGeom prst="roundRect">
+            <a:avLst/>
+          </a:prstGeom>
+          <a:gradFill flip="none" rotWithShape="1">
+            <a:gsLst>
+              <a:gs pos="84000">
+                <a:srgbClr val="75D4FF"/>
+              </a:gs>
+              <a:gs pos="68000">
+                <a:srgbClr val="00B0F0"/>
+              </a:gs>
+              <a:gs pos="100000">
+                <a:schemeClr val="bg1">
+                  <a:lumMod val="95000"/>
+                </a:schemeClr>
+              </a:gs>
+            </a:gsLst>
+            <a:lin ang="18900000" scaled="1"/>
+            <a:tileRect/>
+          </a:gradFill>
+          <a:ln>
+            <a:noFill/>
+          </a:ln>
+          <a:effectLst>
+            <a:outerShdw blurRad="50800" dist="38100" dir="8100000" algn="tr" rotWithShape="0">
+              <a:prstClr val="black">
+                <a:alpha val="40000"/>
+              </a:prstClr>
+            </a:outerShdw>
+          </a:effectLst>
+        </p:spPr>
+        <p:style>
+          <a:lnRef idx="2">
+            <a:schemeClr val="accent1">
+              <a:shade val="50000"/>
+            </a:schemeClr>
+          </a:lnRef>
+          <a:fillRef idx="1">
+            <a:schemeClr val="accent1"/>
+          </a:fillRef>
+          <a:effectRef idx="0">
+            <a:schemeClr val="accent1"/>
+          </a:effectRef>
+          <a:fontRef idx="minor">
+            <a:schemeClr val="lt1"/>
+          </a:fontRef>
+        </p:style>
+        <p:txBody>
+          <a:bodyPr rtlCol="0" anchor="ctr"/>
+          <a:lstStyle/>
+          <a:p>
+            <a:pPr algn="ctr"/>
+            <a:r>
+              <a:rPr lang="en-US" sz="1200">
+                <a:solidFill>
+                  <a:schemeClr val="tx1"/>
+                </a:solidFill>
+                <a:latin typeface="Arial" panose="020B0604020202020204" pitchFamily="34" charset="0"/>
+                <a:cs typeface="Arial" panose="020B0604020202020204" pitchFamily="34" charset="0"/>
+              </a:rPr>
+              <a:t>1765</a:t>
+            </a:r>
+            <a:endParaRPr lang="de-DE" sz="1200" dirty="0">
+              <a:solidFill>
+                <a:schemeClr val="tx1"/>
+              </a:solidFill>
+              <a:latin typeface="Arial" panose="020B0604020202020204" pitchFamily="34" charset="0"/>
+              <a:cs typeface="Arial" panose="020B0604020202020204" pitchFamily="34" charset="0"/>
+            </a:endParaRPr>
+          </a:p>
+        </p:txBody>
+      </p:sp>
+      <p:sp>
+        <p:nvSpPr>
+          <p:cNvPr id="33" name="Rectangle: Rounded Corners 32">
+            <a:extLst>
+              <a:ext uri="{FF2B5EF4-FFF2-40B4-BE49-F238E27FC236}">
+                <a16:creationId xmlns:a16="http://schemas.microsoft.com/office/drawing/2014/main" id="{F782143D-917A-4630-A7FB-072612AFAFCB}"/>
+              </a:ext>
+            </a:extLst>
+          </p:cNvPr>
+          <p:cNvSpPr/>
+          <p:nvPr/>
+        </p:nvSpPr>
+        <p:spPr>
+          <a:xfrm>
+            <a:off x="3464482" y="4659776"/>
+            <a:ext cx="847452" cy="351647"/>
+          </a:xfrm>
+          <a:prstGeom prst="roundRect">
+            <a:avLst/>
+          </a:prstGeom>
+          <a:gradFill flip="none" rotWithShape="1">
+            <a:gsLst>
+              <a:gs pos="84000">
+                <a:srgbClr val="75D4FF"/>
+              </a:gs>
+              <a:gs pos="68000">
+                <a:srgbClr val="00B0F0"/>
+              </a:gs>
+              <a:gs pos="100000">
+                <a:schemeClr val="bg1">
+                  <a:lumMod val="95000"/>
+                </a:schemeClr>
+              </a:gs>
+            </a:gsLst>
+            <a:lin ang="18900000" scaled="1"/>
+            <a:tileRect/>
+          </a:gradFill>
+          <a:ln>
+            <a:noFill/>
+          </a:ln>
+          <a:effectLst>
+            <a:outerShdw blurRad="50800" dist="38100" dir="8100000" algn="tr" rotWithShape="0">
+              <a:prstClr val="black">
+                <a:alpha val="40000"/>
+              </a:prstClr>
+            </a:outerShdw>
+          </a:effectLst>
+        </p:spPr>
+        <p:style>
+          <a:lnRef idx="2">
+            <a:schemeClr val="accent1">
+              <a:shade val="50000"/>
+            </a:schemeClr>
+          </a:lnRef>
+          <a:fillRef idx="1">
+            <a:schemeClr val="accent1"/>
+          </a:fillRef>
+          <a:effectRef idx="0">
+            <a:schemeClr val="accent1"/>
+          </a:effectRef>
+          <a:fontRef idx="minor">
+            <a:schemeClr val="lt1"/>
+          </a:fontRef>
+        </p:style>
+        <p:txBody>
+          <a:bodyPr rtlCol="0" anchor="ctr"/>
+          <a:lstStyle/>
+          <a:p>
+            <a:pPr algn="ctr"/>
+            <a:r>
+              <a:rPr lang="en-US" sz="1200" dirty="0">
+                <a:solidFill>
+                  <a:schemeClr val="tx1"/>
+                </a:solidFill>
+                <a:latin typeface="Arial" panose="020B0604020202020204" pitchFamily="34" charset="0"/>
+                <a:cs typeface="Arial" panose="020B0604020202020204" pitchFamily="34" charset="0"/>
+              </a:rPr>
+              <a:t>?</a:t>
+            </a:r>
+            <a:endParaRPr lang="de-DE" sz="1200" dirty="0">
+              <a:solidFill>
+                <a:schemeClr val="tx1"/>
+              </a:solidFill>
+              <a:latin typeface="Arial" panose="020B0604020202020204" pitchFamily="34" charset="0"/>
+              <a:cs typeface="Arial" panose="020B0604020202020204" pitchFamily="34" charset="0"/>
+            </a:endParaRPr>
+          </a:p>
+        </p:txBody>
+      </p:sp>
+      <p:cxnSp>
+        <p:nvCxnSpPr>
+          <p:cNvPr id="34" name="Straight Arrow Connector 33">
+            <a:extLst>
+              <a:ext uri="{FF2B5EF4-FFF2-40B4-BE49-F238E27FC236}">
+                <a16:creationId xmlns:a16="http://schemas.microsoft.com/office/drawing/2014/main" id="{588FEEB8-535C-4F9D-BE06-D60DEC78B11A}"/>
+              </a:ext>
+            </a:extLst>
+          </p:cNvPr>
+          <p:cNvCxnSpPr>
+            <a:cxnSpLocks/>
+            <a:stCxn id="32" idx="2"/>
+            <a:endCxn id="33" idx="0"/>
+          </p:cNvCxnSpPr>
+          <p:nvPr/>
+        </p:nvCxnSpPr>
+        <p:spPr>
+          <a:xfrm>
+            <a:off x="3888208" y="4091192"/>
+            <a:ext cx="0" cy="568585"/>
+          </a:xfrm>
+          <a:prstGeom prst="straightConnector1">
+            <a:avLst/>
+          </a:prstGeom>
+          <a:ln>
+            <a:solidFill>
+              <a:schemeClr val="bg1">
+                <a:lumMod val="65000"/>
+              </a:schemeClr>
+            </a:solidFill>
+            <a:tailEnd type="triangle"/>
+          </a:ln>
+        </p:spPr>
+        <p:style>
+          <a:lnRef idx="1">
+            <a:schemeClr val="accent1"/>
+          </a:lnRef>
+          <a:fillRef idx="0">
+            <a:schemeClr val="accent1"/>
+          </a:fillRef>
+          <a:effectRef idx="0">
+            <a:schemeClr val="accent1"/>
+          </a:effectRef>
+          <a:fontRef idx="minor">
+            <a:schemeClr val="tx1"/>
+          </a:fontRef>
+        </p:style>
+      </p:cxnSp>
+      <p:sp>
+        <p:nvSpPr>
+          <p:cNvPr id="35" name="Rectangle 34">
+            <a:extLst>
+              <a:ext uri="{FF2B5EF4-FFF2-40B4-BE49-F238E27FC236}">
+                <a16:creationId xmlns:a16="http://schemas.microsoft.com/office/drawing/2014/main" id="{F8014AD8-AB9C-478D-A1B4-21E726B7E060}"/>
+              </a:ext>
+            </a:extLst>
+          </p:cNvPr>
+          <p:cNvSpPr/>
+          <p:nvPr/>
+        </p:nvSpPr>
+        <p:spPr>
+          <a:xfrm>
+            <a:off x="4304303" y="4704794"/>
+            <a:ext cx="1558000" cy="261610"/>
+          </a:xfrm>
+          <a:prstGeom prst="rect">
+            <a:avLst/>
+          </a:prstGeom>
+        </p:spPr>
+        <p:txBody>
+          <a:bodyPr wrap="square">
+            <a:spAutoFit/>
+          </a:bodyPr>
+          <a:lstStyle/>
+          <a:p>
+            <a:r>
+              <a:rPr lang="en-US" sz="1100" dirty="0">
+                <a:latin typeface="Arial" panose="020B0604020202020204" pitchFamily="34" charset="0"/>
+                <a:cs typeface="Arial" panose="020B0604020202020204" pitchFamily="34" charset="0"/>
+              </a:rPr>
+              <a:t>Estimated Citations</a:t>
+            </a:r>
+            <a:endParaRPr lang="de-DE" sz="1100" dirty="0">
+              <a:latin typeface="Arial" panose="020B0604020202020204" pitchFamily="34" charset="0"/>
+              <a:cs typeface="Arial" panose="020B0604020202020204" pitchFamily="34" charset="0"/>
+            </a:endParaRPr>
+          </a:p>
+        </p:txBody>
+      </p:sp>
+      <p:sp>
+        <p:nvSpPr>
+          <p:cNvPr id="36" name="Rectangle: Rounded Corners 35">
+            <a:extLst>
+              <a:ext uri="{FF2B5EF4-FFF2-40B4-BE49-F238E27FC236}">
+                <a16:creationId xmlns:a16="http://schemas.microsoft.com/office/drawing/2014/main" id="{A66615DB-D6CA-4E80-B064-CD8973E779A9}"/>
+              </a:ext>
+            </a:extLst>
+          </p:cNvPr>
+          <p:cNvSpPr/>
+          <p:nvPr/>
+        </p:nvSpPr>
+        <p:spPr>
+          <a:xfrm>
+            <a:off x="3464482" y="2805223"/>
+            <a:ext cx="847452" cy="351647"/>
+          </a:xfrm>
+          <a:prstGeom prst="roundRect">
+            <a:avLst/>
+          </a:prstGeom>
+          <a:gradFill flip="none" rotWithShape="1">
+            <a:gsLst>
+              <a:gs pos="84000">
+                <a:srgbClr val="75D4FF"/>
+              </a:gs>
+              <a:gs pos="68000">
+                <a:srgbClr val="00B0F0"/>
+              </a:gs>
+              <a:gs pos="100000">
+                <a:schemeClr val="bg1">
+                  <a:lumMod val="95000"/>
+                </a:schemeClr>
+              </a:gs>
+            </a:gsLst>
+            <a:lin ang="18900000" scaled="1"/>
+            <a:tileRect/>
+          </a:gradFill>
+          <a:ln>
+            <a:noFill/>
+          </a:ln>
+          <a:effectLst>
+            <a:outerShdw blurRad="50800" dist="38100" dir="8100000" algn="tr" rotWithShape="0">
+              <a:prstClr val="black">
+                <a:alpha val="40000"/>
+              </a:prstClr>
+            </a:outerShdw>
+          </a:effectLst>
+        </p:spPr>
+        <p:style>
+          <a:lnRef idx="2">
+            <a:schemeClr val="accent1">
+              <a:shade val="50000"/>
+            </a:schemeClr>
+          </a:lnRef>
+          <a:fillRef idx="1">
+            <a:schemeClr val="accent1"/>
+          </a:fillRef>
+          <a:effectRef idx="0">
+            <a:schemeClr val="accent1"/>
+          </a:effectRef>
+          <a:fontRef idx="minor">
+            <a:schemeClr val="lt1"/>
+          </a:fontRef>
+        </p:style>
+        <p:txBody>
+          <a:bodyPr rtlCol="0" anchor="ctr"/>
+          <a:lstStyle/>
+          <a:p>
+            <a:pPr algn="ctr"/>
+            <a:r>
+              <a:rPr lang="en-US" sz="1200">
+                <a:solidFill>
+                  <a:schemeClr val="tx1"/>
+                </a:solidFill>
+                <a:latin typeface="Arial" panose="020B0604020202020204" pitchFamily="34" charset="0"/>
+                <a:cs typeface="Arial" panose="020B0604020202020204" pitchFamily="34" charset="0"/>
+              </a:rPr>
+              <a:t>35</a:t>
+            </a:r>
+            <a:endParaRPr lang="de-DE" sz="1200" dirty="0">
+              <a:solidFill>
+                <a:schemeClr val="tx1"/>
+              </a:solidFill>
+              <a:latin typeface="Arial" panose="020B0604020202020204" pitchFamily="34" charset="0"/>
+              <a:cs typeface="Arial" panose="020B0604020202020204" pitchFamily="34" charset="0"/>
+            </a:endParaRPr>
+          </a:p>
+        </p:txBody>
+      </p:sp>
+      <p:cxnSp>
+        <p:nvCxnSpPr>
+          <p:cNvPr id="37" name="Straight Arrow Connector 36">
+            <a:extLst>
+              <a:ext uri="{FF2B5EF4-FFF2-40B4-BE49-F238E27FC236}">
+                <a16:creationId xmlns:a16="http://schemas.microsoft.com/office/drawing/2014/main" id="{9CB45425-9B7D-49B1-B7E6-6CE84CD5DD4F}"/>
+              </a:ext>
+            </a:extLst>
+          </p:cNvPr>
+          <p:cNvCxnSpPr>
+            <a:cxnSpLocks/>
+            <a:stCxn id="36" idx="2"/>
+            <a:endCxn id="32" idx="0"/>
+          </p:cNvCxnSpPr>
+          <p:nvPr/>
+        </p:nvCxnSpPr>
+        <p:spPr>
+          <a:xfrm>
+            <a:off x="3888208" y="3156870"/>
+            <a:ext cx="0" cy="582675"/>
+          </a:xfrm>
+          <a:prstGeom prst="straightConnector1">
+            <a:avLst/>
+          </a:prstGeom>
+          <a:ln>
+            <a:solidFill>
+              <a:schemeClr val="bg1">
+                <a:lumMod val="65000"/>
+              </a:schemeClr>
+            </a:solidFill>
+            <a:tailEnd type="triangle"/>
+          </a:ln>
+        </p:spPr>
+        <p:style>
+          <a:lnRef idx="1">
+            <a:schemeClr val="accent1"/>
+          </a:lnRef>
+          <a:fillRef idx="0">
+            <a:schemeClr val="accent1"/>
+          </a:fillRef>
+          <a:effectRef idx="0">
+            <a:schemeClr val="accent1"/>
+          </a:effectRef>
+          <a:fontRef idx="minor">
+            <a:schemeClr val="tx1"/>
+          </a:fontRef>
+        </p:style>
+      </p:cxnSp>
+      <p:sp>
+        <p:nvSpPr>
+          <p:cNvPr id="38" name="Rectangle 37">
+            <a:extLst>
+              <a:ext uri="{FF2B5EF4-FFF2-40B4-BE49-F238E27FC236}">
+                <a16:creationId xmlns:a16="http://schemas.microsoft.com/office/drawing/2014/main" id="{793B5009-2567-4219-828C-A2FC4468E2F5}"/>
+              </a:ext>
+            </a:extLst>
+          </p:cNvPr>
+          <p:cNvSpPr/>
+          <p:nvPr/>
+        </p:nvSpPr>
+        <p:spPr>
+          <a:xfrm>
+            <a:off x="4308118" y="2842546"/>
+            <a:ext cx="1372571" cy="261610"/>
+          </a:xfrm>
+          <a:prstGeom prst="rect">
+            <a:avLst/>
+          </a:prstGeom>
+        </p:spPr>
+        <p:txBody>
+          <a:bodyPr wrap="square">
+            <a:spAutoFit/>
+          </a:bodyPr>
+          <a:lstStyle/>
+          <a:p>
+            <a:r>
+              <a:rPr lang="en-US" sz="1100" dirty="0">
+                <a:latin typeface="Arial" panose="020B0604020202020204" pitchFamily="34" charset="0"/>
+                <a:cs typeface="Arial" panose="020B0604020202020204" pitchFamily="34" charset="0"/>
+              </a:rPr>
+              <a:t>Charité Datasets</a:t>
+            </a:r>
+            <a:endParaRPr lang="de-DE" sz="1100" dirty="0">
+              <a:latin typeface="Arial" panose="020B0604020202020204" pitchFamily="34" charset="0"/>
+              <a:cs typeface="Arial" panose="020B0604020202020204" pitchFamily="34" charset="0"/>
+            </a:endParaRPr>
+          </a:p>
+        </p:txBody>
+      </p:sp>
+      <p:sp>
+        <p:nvSpPr>
+          <p:cNvPr id="39" name="Rectangle: Rounded Corners 38">
+            <a:extLst>
+              <a:ext uri="{FF2B5EF4-FFF2-40B4-BE49-F238E27FC236}">
+                <a16:creationId xmlns:a16="http://schemas.microsoft.com/office/drawing/2014/main" id="{D4DE513D-2FB1-49B7-A2CE-E030FD9CE2A4}"/>
+              </a:ext>
+            </a:extLst>
+          </p:cNvPr>
+          <p:cNvSpPr/>
+          <p:nvPr/>
+        </p:nvSpPr>
+        <p:spPr>
+          <a:xfrm>
+            <a:off x="3460666" y="1868520"/>
+            <a:ext cx="847452" cy="351647"/>
+          </a:xfrm>
+          <a:prstGeom prst="roundRect">
+            <a:avLst/>
+          </a:prstGeom>
+          <a:gradFill flip="none" rotWithShape="1">
+            <a:gsLst>
+              <a:gs pos="84000">
+                <a:srgbClr val="75D4FF"/>
+              </a:gs>
+              <a:gs pos="68000">
+                <a:srgbClr val="00B0F0"/>
+              </a:gs>
+              <a:gs pos="100000">
+                <a:schemeClr val="bg1">
+                  <a:lumMod val="95000"/>
+                </a:schemeClr>
+              </a:gs>
+            </a:gsLst>
+            <a:lin ang="18900000" scaled="1"/>
+            <a:tileRect/>
+          </a:gradFill>
+          <a:ln>
+            <a:noFill/>
+          </a:ln>
+          <a:effectLst>
+            <a:outerShdw blurRad="50800" dist="38100" dir="8100000" algn="tr" rotWithShape="0">
+              <a:prstClr val="black">
+                <a:alpha val="40000"/>
+              </a:prstClr>
+            </a:outerShdw>
+          </a:effectLst>
+        </p:spPr>
+        <p:style>
+          <a:lnRef idx="2">
+            <a:schemeClr val="accent1">
+              <a:shade val="50000"/>
+            </a:schemeClr>
+          </a:lnRef>
+          <a:fillRef idx="1">
+            <a:schemeClr val="accent1"/>
+          </a:fillRef>
+          <a:effectRef idx="0">
+            <a:schemeClr val="accent1"/>
+          </a:effectRef>
+          <a:fontRef idx="minor">
+            <a:schemeClr val="lt1"/>
+          </a:fontRef>
+        </p:style>
+        <p:txBody>
+          <a:bodyPr rtlCol="0" anchor="ctr"/>
+          <a:lstStyle/>
+          <a:p>
+            <a:pPr algn="ctr"/>
+            <a:r>
+              <a:rPr lang="en-US" sz="1200" dirty="0">
+                <a:solidFill>
+                  <a:schemeClr val="tx1"/>
+                </a:solidFill>
+                <a:latin typeface="Arial" panose="020B0604020202020204" pitchFamily="34" charset="0"/>
+                <a:cs typeface="Arial" panose="020B0604020202020204" pitchFamily="34" charset="0"/>
+              </a:rPr>
+              <a:t>28</a:t>
+            </a:r>
+            <a:endParaRPr lang="de-DE" sz="1200" dirty="0">
+              <a:solidFill>
+                <a:schemeClr val="tx1"/>
+              </a:solidFill>
+              <a:latin typeface="Arial" panose="020B0604020202020204" pitchFamily="34" charset="0"/>
+              <a:cs typeface="Arial" panose="020B0604020202020204" pitchFamily="34" charset="0"/>
+            </a:endParaRPr>
+          </a:p>
+        </p:txBody>
+      </p:sp>
+      <p:cxnSp>
+        <p:nvCxnSpPr>
+          <p:cNvPr id="40" name="Straight Arrow Connector 39">
+            <a:extLst>
+              <a:ext uri="{FF2B5EF4-FFF2-40B4-BE49-F238E27FC236}">
+                <a16:creationId xmlns:a16="http://schemas.microsoft.com/office/drawing/2014/main" id="{02B4690F-D349-475B-81BF-F2E80E19C269}"/>
+              </a:ext>
+            </a:extLst>
+          </p:cNvPr>
+          <p:cNvCxnSpPr>
+            <a:cxnSpLocks/>
+            <a:stCxn id="39" idx="2"/>
+            <a:endCxn id="36" idx="0"/>
+          </p:cNvCxnSpPr>
+          <p:nvPr/>
+        </p:nvCxnSpPr>
+        <p:spPr>
+          <a:xfrm>
+            <a:off x="3884392" y="2220167"/>
+            <a:ext cx="3816" cy="585056"/>
+          </a:xfrm>
+          <a:prstGeom prst="straightConnector1">
+            <a:avLst/>
+          </a:prstGeom>
+          <a:ln>
+            <a:solidFill>
+              <a:schemeClr val="bg1">
+                <a:lumMod val="65000"/>
+              </a:schemeClr>
+            </a:solidFill>
+            <a:tailEnd type="triangle"/>
+          </a:ln>
+        </p:spPr>
+        <p:style>
+          <a:lnRef idx="1">
+            <a:schemeClr val="accent1"/>
+          </a:lnRef>
+          <a:fillRef idx="0">
+            <a:schemeClr val="accent1"/>
+          </a:fillRef>
+          <a:effectRef idx="0">
+            <a:schemeClr val="accent1"/>
+          </a:effectRef>
+          <a:fontRef idx="minor">
+            <a:schemeClr val="tx1"/>
+          </a:fontRef>
+        </p:style>
+      </p:cxnSp>
+      <p:sp>
+        <p:nvSpPr>
+          <p:cNvPr id="41" name="Rectangle 40">
+            <a:extLst>
+              <a:ext uri="{FF2B5EF4-FFF2-40B4-BE49-F238E27FC236}">
+                <a16:creationId xmlns:a16="http://schemas.microsoft.com/office/drawing/2014/main" id="{DFB321C3-1C3C-4DCB-87EF-3C35A20F30A0}"/>
+              </a:ext>
+            </a:extLst>
+          </p:cNvPr>
+          <p:cNvSpPr/>
+          <p:nvPr/>
+        </p:nvSpPr>
+        <p:spPr>
+          <a:xfrm>
+            <a:off x="4304302" y="1905843"/>
+            <a:ext cx="1558000" cy="261610"/>
+          </a:xfrm>
+          <a:prstGeom prst="rect">
+            <a:avLst/>
+          </a:prstGeom>
+        </p:spPr>
+        <p:txBody>
+          <a:bodyPr wrap="square">
+            <a:spAutoFit/>
+          </a:bodyPr>
+          <a:lstStyle/>
+          <a:p>
+            <a:r>
+              <a:rPr lang="en-US" sz="1100" dirty="0">
+                <a:latin typeface="Arial" panose="020B0604020202020204" pitchFamily="34" charset="0"/>
+                <a:cs typeface="Arial" panose="020B0604020202020204" pitchFamily="34" charset="0"/>
+              </a:rPr>
+              <a:t>Charité Data Articles</a:t>
+            </a:r>
+            <a:endParaRPr lang="de-DE" sz="1100" dirty="0">
+              <a:latin typeface="Arial" panose="020B0604020202020204" pitchFamily="34" charset="0"/>
+              <a:cs typeface="Arial" panose="020B0604020202020204" pitchFamily="34" charset="0"/>
+            </a:endParaRPr>
+          </a:p>
+        </p:txBody>
+      </p:sp>
     </p:spTree>
     <p:extLst>
       <p:ext uri="{BB962C8B-B14F-4D97-AF65-F5344CB8AC3E}">

--- a/plots_png/pptx/plots_png.pptx
+++ b/plots_png/pptx/plots_png.pptx
@@ -244,7 +244,7 @@
           <a:p>
             <a:fld id="{83D14EEA-DE26-4810-8E05-A65F0010FADE}" type="datetimeFigureOut">
               <a:rPr lang="de-DE" smtClean="0"/>
-              <a:t>16.10.2025</a:t>
+              <a:t>21.10.2025</a:t>
             </a:fld>
             <a:endParaRPr lang="de-DE"/>
           </a:p>
@@ -414,7 +414,7 @@
           <a:p>
             <a:fld id="{83D14EEA-DE26-4810-8E05-A65F0010FADE}" type="datetimeFigureOut">
               <a:rPr lang="de-DE" smtClean="0"/>
-              <a:t>16.10.2025</a:t>
+              <a:t>21.10.2025</a:t>
             </a:fld>
             <a:endParaRPr lang="de-DE"/>
           </a:p>
@@ -594,7 +594,7 @@
           <a:p>
             <a:fld id="{83D14EEA-DE26-4810-8E05-A65F0010FADE}" type="datetimeFigureOut">
               <a:rPr lang="de-DE" smtClean="0"/>
-              <a:t>16.10.2025</a:t>
+              <a:t>21.10.2025</a:t>
             </a:fld>
             <a:endParaRPr lang="de-DE"/>
           </a:p>
@@ -764,7 +764,7 @@
           <a:p>
             <a:fld id="{83D14EEA-DE26-4810-8E05-A65F0010FADE}" type="datetimeFigureOut">
               <a:rPr lang="de-DE" smtClean="0"/>
-              <a:t>16.10.2025</a:t>
+              <a:t>21.10.2025</a:t>
             </a:fld>
             <a:endParaRPr lang="de-DE"/>
           </a:p>
@@ -1008,7 +1008,7 @@
           <a:p>
             <a:fld id="{83D14EEA-DE26-4810-8E05-A65F0010FADE}" type="datetimeFigureOut">
               <a:rPr lang="de-DE" smtClean="0"/>
-              <a:t>16.10.2025</a:t>
+              <a:t>21.10.2025</a:t>
             </a:fld>
             <a:endParaRPr lang="de-DE"/>
           </a:p>
@@ -1240,7 +1240,7 @@
           <a:p>
             <a:fld id="{83D14EEA-DE26-4810-8E05-A65F0010FADE}" type="datetimeFigureOut">
               <a:rPr lang="de-DE" smtClean="0"/>
-              <a:t>16.10.2025</a:t>
+              <a:t>21.10.2025</a:t>
             </a:fld>
             <a:endParaRPr lang="de-DE"/>
           </a:p>
@@ -1607,7 +1607,7 @@
           <a:p>
             <a:fld id="{83D14EEA-DE26-4810-8E05-A65F0010FADE}" type="datetimeFigureOut">
               <a:rPr lang="de-DE" smtClean="0"/>
-              <a:t>16.10.2025</a:t>
+              <a:t>21.10.2025</a:t>
             </a:fld>
             <a:endParaRPr lang="de-DE"/>
           </a:p>
@@ -1725,7 +1725,7 @@
           <a:p>
             <a:fld id="{83D14EEA-DE26-4810-8E05-A65F0010FADE}" type="datetimeFigureOut">
               <a:rPr lang="de-DE" smtClean="0"/>
-              <a:t>16.10.2025</a:t>
+              <a:t>21.10.2025</a:t>
             </a:fld>
             <a:endParaRPr lang="de-DE"/>
           </a:p>
@@ -1820,7 +1820,7 @@
           <a:p>
             <a:fld id="{83D14EEA-DE26-4810-8E05-A65F0010FADE}" type="datetimeFigureOut">
               <a:rPr lang="de-DE" smtClean="0"/>
-              <a:t>16.10.2025</a:t>
+              <a:t>21.10.2025</a:t>
             </a:fld>
             <a:endParaRPr lang="de-DE"/>
           </a:p>
@@ -2097,7 +2097,7 @@
           <a:p>
             <a:fld id="{83D14EEA-DE26-4810-8E05-A65F0010FADE}" type="datetimeFigureOut">
               <a:rPr lang="de-DE" smtClean="0"/>
-              <a:t>16.10.2025</a:t>
+              <a:t>21.10.2025</a:t>
             </a:fld>
             <a:endParaRPr lang="de-DE"/>
           </a:p>
@@ -2354,7 +2354,7 @@
           <a:p>
             <a:fld id="{83D14EEA-DE26-4810-8E05-A65F0010FADE}" type="datetimeFigureOut">
               <a:rPr lang="de-DE" smtClean="0"/>
-              <a:t>16.10.2025</a:t>
+              <a:t>21.10.2025</a:t>
             </a:fld>
             <a:endParaRPr lang="de-DE"/>
           </a:p>
@@ -2567,7 +2567,7 @@
           <a:p>
             <a:fld id="{83D14EEA-DE26-4810-8E05-A65F0010FADE}" type="datetimeFigureOut">
               <a:rPr lang="de-DE" smtClean="0"/>
-              <a:t>16.10.2025</a:t>
+              <a:t>21.10.2025</a:t>
             </a:fld>
             <a:endParaRPr lang="de-DE"/>
           </a:p>
@@ -3052,7 +3052,7 @@
                 <a:latin typeface="Arial" panose="020B0604020202020204" pitchFamily="34" charset="0"/>
                 <a:cs typeface="Arial" panose="020B0604020202020204" pitchFamily="34" charset="0"/>
               </a:rPr>
-              <a:t>1952</a:t>
+              <a:t>1919</a:t>
             </a:r>
             <a:endParaRPr lang="de-DE" sz="1200" dirty="0">
               <a:solidFill>
@@ -3144,7 +3144,7 @@
                 <a:latin typeface="Arial" panose="020B0604020202020204" pitchFamily="34" charset="0"/>
                 <a:cs typeface="Arial" panose="020B0604020202020204" pitchFamily="34" charset="0"/>
               </a:rPr>
-              <a:t>86</a:t>
+              <a:t>118</a:t>
             </a:r>
             <a:endParaRPr lang="de-DE" sz="1200" dirty="0">
               <a:solidFill>
@@ -3236,7 +3236,7 @@
                 <a:latin typeface="Arial" panose="020B0604020202020204" pitchFamily="34" charset="0"/>
                 <a:cs typeface="Arial" panose="020B0604020202020204" pitchFamily="34" charset="0"/>
               </a:rPr>
-              <a:t>673</a:t>
+              <a:t>1032</a:t>
             </a:r>
             <a:endParaRPr lang="de-DE" sz="1200" dirty="0">
               <a:solidFill>
@@ -3400,7 +3400,7 @@
         <p:spPr>
           <a:xfrm>
             <a:off x="4271005" y="4697099"/>
-            <a:ext cx="2126949" cy="261610"/>
+            <a:ext cx="2126949" cy="430887"/>
           </a:xfrm>
           <a:prstGeom prst="rect">
             <a:avLst/>
@@ -3417,12 +3417,17 @@
                 <a:latin typeface="Arial" panose="020B0604020202020204" pitchFamily="34" charset="0"/>
                 <a:cs typeface="Arial" panose="020B0604020202020204" pitchFamily="34" charset="0"/>
               </a:rPr>
-              <a:t>Detected Datasets</a:t>
-            </a:r>
-            <a:endParaRPr lang="de-DE" sz="1100" dirty="0">
-              <a:latin typeface="Arial" panose="020B0604020202020204" pitchFamily="34" charset="0"/>
-              <a:cs typeface="Arial" panose="020B0604020202020204" pitchFamily="34" charset="0"/>
-            </a:endParaRPr>
+              <a:t>Mentioned Datasets</a:t>
+            </a:r>
+          </a:p>
+          <a:p>
+            <a:r>
+              <a:rPr lang="en-US" sz="1100" dirty="0">
+                <a:latin typeface="Arial" panose="020B0604020202020204" pitchFamily="34" charset="0"/>
+                <a:cs typeface="Arial" panose="020B0604020202020204" pitchFamily="34" charset="0"/>
+              </a:rPr>
+              <a:t>(Manually Screened)</a:t>
+            </a:r>
           </a:p>
         </p:txBody>
       </p:sp>
@@ -3441,7 +3446,7 @@
         <p:spPr>
           <a:xfrm>
             <a:off x="4311934" y="6253603"/>
-            <a:ext cx="2126948" cy="261610"/>
+            <a:ext cx="2126948" cy="430887"/>
           </a:xfrm>
           <a:prstGeom prst="rect">
             <a:avLst/>
@@ -3460,10 +3465,15 @@
               </a:rPr>
               <a:t>Mentions of Datasets</a:t>
             </a:r>
-            <a:endParaRPr lang="de-DE" sz="1100" dirty="0">
-              <a:latin typeface="Arial" panose="020B0604020202020204" pitchFamily="34" charset="0"/>
-              <a:cs typeface="Arial" panose="020B0604020202020204" pitchFamily="34" charset="0"/>
-            </a:endParaRPr>
+          </a:p>
+          <a:p>
+            <a:r>
+              <a:rPr lang="en-US" sz="1100" dirty="0">
+                <a:latin typeface="Arial" panose="020B0604020202020204" pitchFamily="34" charset="0"/>
+                <a:cs typeface="Arial" panose="020B0604020202020204" pitchFamily="34" charset="0"/>
+              </a:rPr>
+              <a:t>(Manually Screened)</a:t>
+            </a:r>
           </a:p>
         </p:txBody>
       </p:sp>
@@ -3550,7 +3560,7 @@
                 <a:latin typeface="Arial" panose="020B0604020202020204" pitchFamily="34" charset="0"/>
                 <a:cs typeface="Arial" panose="020B0604020202020204" pitchFamily="34" charset="0"/>
               </a:rPr>
-              <a:t>90</a:t>
+              <a:t>119</a:t>
             </a:r>
             <a:endParaRPr lang="de-DE" sz="1200" dirty="0">
               <a:solidFill>
@@ -3577,7 +3587,7 @@
         <p:spPr>
           <a:xfrm>
             <a:off x="1781863" y="6216280"/>
-            <a:ext cx="815263" cy="351647"/>
+            <a:ext cx="821637" cy="351647"/>
           </a:xfrm>
           <a:prstGeom prst="roundRect">
             <a:avLst/>
@@ -3645,7 +3655,7 @@
                 <a:latin typeface="Arial" panose="020B0604020202020204" pitchFamily="34" charset="0"/>
                 <a:cs typeface="Arial" panose="020B0604020202020204" pitchFamily="34" charset="0"/>
               </a:rPr>
-              <a:t>825</a:t>
+              <a:t>790</a:t>
             </a:r>
             <a:endParaRPr lang="de-DE" sz="1200" dirty="0">
               <a:solidFill>
@@ -3732,7 +3742,7 @@
                 <a:latin typeface="Arial" panose="020B0604020202020204" pitchFamily="34" charset="0"/>
                 <a:cs typeface="Arial" panose="020B0604020202020204" pitchFamily="34" charset="0"/>
               </a:rPr>
-              <a:t>1498</a:t>
+              <a:t>1497</a:t>
             </a:r>
             <a:endParaRPr lang="de-DE" sz="1200" dirty="0">
               <a:solidFill>
@@ -3763,7 +3773,7 @@
         <p:spPr>
           <a:xfrm>
             <a:off x="2189478" y="5011423"/>
-            <a:ext cx="17" cy="1204857"/>
+            <a:ext cx="3204" cy="1204857"/>
           </a:xfrm>
           <a:prstGeom prst="straightConnector1">
             <a:avLst/>
@@ -3810,8 +3820,8 @@
         </p:nvCxnSpPr>
         <p:spPr>
           <a:xfrm>
-            <a:off x="2189495" y="6567927"/>
-            <a:ext cx="841310" cy="528753"/>
+            <a:off x="2192682" y="6567927"/>
+            <a:ext cx="838123" cy="528753"/>
           </a:xfrm>
           <a:prstGeom prst="straightConnector1">
             <a:avLst/>
@@ -3840,54 +3850,6 @@
           </a:fontRef>
         </p:style>
       </p:cxnSp>
-      <p:cxnSp>
-        <p:nvCxnSpPr>
-          <p:cNvPr id="48" name="Straight Arrow Connector 47">
-            <a:extLst>
-              <a:ext uri="{FF2B5EF4-FFF2-40B4-BE49-F238E27FC236}">
-                <a16:creationId xmlns:a16="http://schemas.microsoft.com/office/drawing/2014/main" id="{808F44C1-0995-4A8F-963E-9EB3E96DF2E1}"/>
-              </a:ext>
-            </a:extLst>
-          </p:cNvPr>
-          <p:cNvCxnSpPr>
-            <a:cxnSpLocks/>
-            <a:stCxn id="11" idx="1"/>
-            <a:endCxn id="37" idx="3"/>
-          </p:cNvCxnSpPr>
-          <p:nvPr/>
-        </p:nvCxnSpPr>
-        <p:spPr>
-          <a:xfrm flipH="1">
-            <a:off x="2597109" y="4835600"/>
-            <a:ext cx="867373" cy="0"/>
-          </a:xfrm>
-          <a:prstGeom prst="straightConnector1">
-            <a:avLst/>
-          </a:prstGeom>
-          <a:ln>
-            <a:solidFill>
-              <a:schemeClr val="bg1">
-                <a:lumMod val="65000"/>
-              </a:schemeClr>
-            </a:solidFill>
-            <a:tailEnd type="triangle"/>
-          </a:ln>
-        </p:spPr>
-        <p:style>
-          <a:lnRef idx="1">
-            <a:schemeClr val="accent1"/>
-          </a:lnRef>
-          <a:fillRef idx="0">
-            <a:schemeClr val="accent1"/>
-          </a:fillRef>
-          <a:effectRef idx="0">
-            <a:schemeClr val="accent1"/>
-          </a:effectRef>
-          <a:fontRef idx="minor">
-            <a:schemeClr val="tx1"/>
-          </a:fontRef>
-        </p:style>
-      </p:cxnSp>
       <p:sp>
         <p:nvSpPr>
           <p:cNvPr id="50" name="Rectangle 49">
@@ -3902,8 +3864,8 @@
         </p:nvSpPr>
         <p:spPr>
           <a:xfrm>
-            <a:off x="346206" y="4620156"/>
-            <a:ext cx="1409585" cy="430887"/>
+            <a:off x="229128" y="4620156"/>
+            <a:ext cx="1526663" cy="430887"/>
           </a:xfrm>
           <a:prstGeom prst="rect">
             <a:avLst/>
@@ -3921,7 +3883,7 @@
                 <a:latin typeface="Arial" panose="020B0604020202020204" pitchFamily="34" charset="0"/>
                 <a:cs typeface="Arial" panose="020B0604020202020204" pitchFamily="34" charset="0"/>
               </a:rPr>
-              <a:t>Detected Datasets</a:t>
+              <a:t>Mentioned  Datasets</a:t>
             </a:r>
           </a:p>
           <a:p>
@@ -3931,7 +3893,21 @@
                 <a:latin typeface="Arial" panose="020B0604020202020204" pitchFamily="34" charset="0"/>
                 <a:cs typeface="Arial" panose="020B0604020202020204" pitchFamily="34" charset="0"/>
               </a:rPr>
-              <a:t>(DataStet &amp; Added)</a:t>
+              <a:t>(</a:t>
+            </a:r>
+            <a:r>
+              <a:rPr lang="en-US" sz="1100" dirty="0" err="1">
+                <a:latin typeface="Arial" panose="020B0604020202020204" pitchFamily="34" charset="0"/>
+                <a:cs typeface="Arial" panose="020B0604020202020204" pitchFamily="34" charset="0"/>
+              </a:rPr>
+              <a:t>DataStet</a:t>
+            </a:r>
+            <a:r>
+              <a:rPr lang="en-US" sz="1100" dirty="0">
+                <a:latin typeface="Arial" panose="020B0604020202020204" pitchFamily="34" charset="0"/>
+                <a:cs typeface="Arial" panose="020B0604020202020204" pitchFamily="34" charset="0"/>
+              </a:rPr>
+              <a:t>)</a:t>
             </a:r>
             <a:endParaRPr lang="de-DE" sz="1100" dirty="0">
               <a:latin typeface="Arial" panose="020B0604020202020204" pitchFamily="34" charset="0"/>
@@ -3983,7 +3959,21 @@
                 <a:latin typeface="Arial" panose="020B0604020202020204" pitchFamily="34" charset="0"/>
                 <a:cs typeface="Arial" panose="020B0604020202020204" pitchFamily="34" charset="0"/>
               </a:rPr>
-              <a:t>(DataStet &amp; Added)</a:t>
+              <a:t>(</a:t>
+            </a:r>
+            <a:r>
+              <a:rPr lang="en-US" sz="1100" dirty="0" err="1">
+                <a:latin typeface="Arial" panose="020B0604020202020204" pitchFamily="34" charset="0"/>
+                <a:cs typeface="Arial" panose="020B0604020202020204" pitchFamily="34" charset="0"/>
+              </a:rPr>
+              <a:t>DataStet</a:t>
+            </a:r>
+            <a:r>
+              <a:rPr lang="en-US" sz="1100" dirty="0">
+                <a:latin typeface="Arial" panose="020B0604020202020204" pitchFamily="34" charset="0"/>
+                <a:cs typeface="Arial" panose="020B0604020202020204" pitchFamily="34" charset="0"/>
+              </a:rPr>
+              <a:t>)</a:t>
             </a:r>
             <a:endParaRPr lang="de-DE" sz="1100" dirty="0">
               <a:latin typeface="Arial" panose="020B0604020202020204" pitchFamily="34" charset="0"/>
@@ -4073,7 +4063,7 @@
                 <a:latin typeface="Arial" panose="020B0604020202020204" pitchFamily="34" charset="0"/>
                 <a:cs typeface="Arial" panose="020B0604020202020204" pitchFamily="34" charset="0"/>
               </a:rPr>
-              <a:t>Mentions of Charité Datasets</a:t>
+              <a:t>Mentions of Datasets</a:t>
             </a:r>
           </a:p>
           <a:p>
@@ -4088,17 +4078,65 @@
                 <a:latin typeface="Arial" panose="020B0604020202020204" pitchFamily="34" charset="0"/>
                 <a:cs typeface="Arial" panose="020B0604020202020204" pitchFamily="34" charset="0"/>
               </a:rPr>
-              <a:t>(1393 Reusing Papers)</a:t>
-            </a:r>
-          </a:p>
-        </p:txBody>
-      </p:sp>
-      <p:sp>
-        <p:nvSpPr>
-          <p:cNvPr id="66" name="Rectangle: Rounded Corners 65">
+              <a:t>(1390 Reusing Papers)</a:t>
+            </a:r>
+          </a:p>
+        </p:txBody>
+      </p:sp>
+      <p:cxnSp>
+        <p:nvCxnSpPr>
+          <p:cNvPr id="67" name="Straight Arrow Connector 66">
             <a:extLst>
               <a:ext uri="{FF2B5EF4-FFF2-40B4-BE49-F238E27FC236}">
-                <a16:creationId xmlns:a16="http://schemas.microsoft.com/office/drawing/2014/main" id="{3E768A55-B162-4D7D-A14C-B7D7AA6EA4FB}"/>
+                <a16:creationId xmlns:a16="http://schemas.microsoft.com/office/drawing/2014/main" id="{546E5E13-378B-484F-A381-094CCFBA2949}"/>
+              </a:ext>
+            </a:extLst>
+          </p:cNvPr>
+          <p:cNvCxnSpPr>
+            <a:cxnSpLocks/>
+            <a:stCxn id="89" idx="2"/>
+            <a:endCxn id="9" idx="0"/>
+          </p:cNvCxnSpPr>
+          <p:nvPr/>
+        </p:nvCxnSpPr>
+        <p:spPr>
+          <a:xfrm>
+            <a:off x="3884392" y="3108620"/>
+            <a:ext cx="3816" cy="630925"/>
+          </a:xfrm>
+          <a:prstGeom prst="straightConnector1">
+            <a:avLst/>
+          </a:prstGeom>
+          <a:ln>
+            <a:solidFill>
+              <a:schemeClr val="bg1">
+                <a:lumMod val="65000"/>
+              </a:schemeClr>
+            </a:solidFill>
+            <a:tailEnd type="triangle"/>
+          </a:ln>
+        </p:spPr>
+        <p:style>
+          <a:lnRef idx="1">
+            <a:schemeClr val="accent1"/>
+          </a:lnRef>
+          <a:fillRef idx="0">
+            <a:schemeClr val="accent1"/>
+          </a:fillRef>
+          <a:effectRef idx="0">
+            <a:schemeClr val="accent1"/>
+          </a:effectRef>
+          <a:fontRef idx="minor">
+            <a:schemeClr val="tx1"/>
+          </a:fontRef>
+        </p:style>
+      </p:cxnSp>
+      <p:sp>
+        <p:nvSpPr>
+          <p:cNvPr id="80" name="Rectangle: Rounded Corners 79">
+            <a:extLst>
+              <a:ext uri="{FF2B5EF4-FFF2-40B4-BE49-F238E27FC236}">
+                <a16:creationId xmlns:a16="http://schemas.microsoft.com/office/drawing/2014/main" id="{D114DA72-2DDC-49FF-88D2-5DA57C7BF46C}"/>
               </a:ext>
             </a:extLst>
           </p:cNvPr>
@@ -4107,7 +4145,230 @@
         </p:nvSpPr>
         <p:spPr>
           <a:xfrm>
-            <a:off x="3464482" y="2805223"/>
+            <a:off x="2649219" y="5459906"/>
+            <a:ext cx="815263" cy="351647"/>
+          </a:xfrm>
+          <a:prstGeom prst="roundRect">
+            <a:avLst/>
+          </a:prstGeom>
+          <a:gradFill flip="none" rotWithShape="1">
+            <a:gsLst>
+              <a:gs pos="84000">
+                <a:srgbClr val="D8F6E3"/>
+              </a:gs>
+              <a:gs pos="65000">
+                <a:srgbClr val="93FF81"/>
+              </a:gs>
+              <a:gs pos="100000">
+                <a:srgbClr val="D9FFDD"/>
+              </a:gs>
+            </a:gsLst>
+            <a:lin ang="18900000" scaled="1"/>
+            <a:tileRect/>
+          </a:gradFill>
+          <a:ln>
+            <a:noFill/>
+          </a:ln>
+          <a:effectLst>
+            <a:outerShdw blurRad="50800" dist="38100" dir="8100000" algn="tr" rotWithShape="0">
+              <a:prstClr val="black">
+                <a:alpha val="40000"/>
+              </a:prstClr>
+            </a:outerShdw>
+          </a:effectLst>
+        </p:spPr>
+        <p:style>
+          <a:lnRef idx="2">
+            <a:schemeClr val="accent1">
+              <a:shade val="50000"/>
+            </a:schemeClr>
+          </a:lnRef>
+          <a:fillRef idx="1">
+            <a:schemeClr val="accent1"/>
+          </a:fillRef>
+          <a:effectRef idx="0">
+            <a:schemeClr val="accent1"/>
+          </a:effectRef>
+          <a:fontRef idx="minor">
+            <a:schemeClr val="lt1"/>
+          </a:fontRef>
+        </p:style>
+        <p:txBody>
+          <a:bodyPr rtlCol="0" anchor="ctr"/>
+          <a:lstStyle/>
+          <a:p>
+            <a:pPr algn="ctr"/>
+            <a:r>
+              <a:rPr lang="en-US" sz="1200" dirty="0">
+                <a:solidFill>
+                  <a:schemeClr val="tx1"/>
+                </a:solidFill>
+                <a:latin typeface="Arial" panose="020B0604020202020204" pitchFamily="34" charset="0"/>
+                <a:cs typeface="Arial" panose="020B0604020202020204" pitchFamily="34" charset="0"/>
+              </a:rPr>
+              <a:t>175</a:t>
+            </a:r>
+            <a:endParaRPr lang="de-DE" sz="1200" dirty="0">
+              <a:solidFill>
+                <a:schemeClr val="tx1"/>
+              </a:solidFill>
+              <a:latin typeface="Arial" panose="020B0604020202020204" pitchFamily="34" charset="0"/>
+              <a:cs typeface="Arial" panose="020B0604020202020204" pitchFamily="34" charset="0"/>
+            </a:endParaRPr>
+          </a:p>
+        </p:txBody>
+      </p:sp>
+      <p:cxnSp>
+        <p:nvCxnSpPr>
+          <p:cNvPr id="81" name="Straight Arrow Connector 80">
+            <a:extLst>
+              <a:ext uri="{FF2B5EF4-FFF2-40B4-BE49-F238E27FC236}">
+                <a16:creationId xmlns:a16="http://schemas.microsoft.com/office/drawing/2014/main" id="{DEBAAEA7-28FC-4C4C-85C6-F295E82C619C}"/>
+              </a:ext>
+            </a:extLst>
+          </p:cNvPr>
+          <p:cNvCxnSpPr>
+            <a:cxnSpLocks/>
+            <a:endCxn id="80" idx="0"/>
+          </p:cNvCxnSpPr>
+          <p:nvPr/>
+        </p:nvCxnSpPr>
+        <p:spPr>
+          <a:xfrm>
+            <a:off x="2189495" y="5023080"/>
+            <a:ext cx="867356" cy="436826"/>
+          </a:xfrm>
+          <a:prstGeom prst="straightConnector1">
+            <a:avLst/>
+          </a:prstGeom>
+          <a:ln>
+            <a:solidFill>
+              <a:schemeClr val="bg1">
+                <a:lumMod val="65000"/>
+              </a:schemeClr>
+            </a:solidFill>
+            <a:tailEnd type="triangle"/>
+          </a:ln>
+        </p:spPr>
+        <p:style>
+          <a:lnRef idx="1">
+            <a:schemeClr val="accent1"/>
+          </a:lnRef>
+          <a:fillRef idx="0">
+            <a:schemeClr val="accent1"/>
+          </a:fillRef>
+          <a:effectRef idx="0">
+            <a:schemeClr val="accent1"/>
+          </a:effectRef>
+          <a:fontRef idx="minor">
+            <a:schemeClr val="tx1"/>
+          </a:fontRef>
+        </p:style>
+      </p:cxnSp>
+      <p:cxnSp>
+        <p:nvCxnSpPr>
+          <p:cNvPr id="82" name="Straight Arrow Connector 81">
+            <a:extLst>
+              <a:ext uri="{FF2B5EF4-FFF2-40B4-BE49-F238E27FC236}">
+                <a16:creationId xmlns:a16="http://schemas.microsoft.com/office/drawing/2014/main" id="{BFAE4691-A331-4DBF-B116-0C1888F2171E}"/>
+              </a:ext>
+            </a:extLst>
+          </p:cNvPr>
+          <p:cNvCxnSpPr>
+            <a:cxnSpLocks/>
+            <a:endCxn id="80" idx="0"/>
+          </p:cNvCxnSpPr>
+          <p:nvPr/>
+        </p:nvCxnSpPr>
+        <p:spPr>
+          <a:xfrm flipH="1">
+            <a:off x="3056851" y="5023080"/>
+            <a:ext cx="831374" cy="436826"/>
+          </a:xfrm>
+          <a:prstGeom prst="straightConnector1">
+            <a:avLst/>
+          </a:prstGeom>
+          <a:ln>
+            <a:solidFill>
+              <a:schemeClr val="bg1">
+                <a:lumMod val="65000"/>
+              </a:schemeClr>
+            </a:solidFill>
+            <a:tailEnd type="triangle"/>
+          </a:ln>
+        </p:spPr>
+        <p:style>
+          <a:lnRef idx="1">
+            <a:schemeClr val="accent1"/>
+          </a:lnRef>
+          <a:fillRef idx="0">
+            <a:schemeClr val="accent1"/>
+          </a:fillRef>
+          <a:effectRef idx="0">
+            <a:schemeClr val="accent1"/>
+          </a:effectRef>
+          <a:fontRef idx="minor">
+            <a:schemeClr val="tx1"/>
+          </a:fontRef>
+        </p:style>
+      </p:cxnSp>
+      <p:sp>
+        <p:nvSpPr>
+          <p:cNvPr id="83" name="Rectangle 82">
+            <a:extLst>
+              <a:ext uri="{FF2B5EF4-FFF2-40B4-BE49-F238E27FC236}">
+                <a16:creationId xmlns:a16="http://schemas.microsoft.com/office/drawing/2014/main" id="{B2BD9BD0-063F-41F0-AF7A-83DA5949A806}"/>
+              </a:ext>
+            </a:extLst>
+          </p:cNvPr>
+          <p:cNvSpPr/>
+          <p:nvPr/>
+        </p:nvSpPr>
+        <p:spPr>
+          <a:xfrm>
+            <a:off x="2213049" y="5809625"/>
+            <a:ext cx="1675112" cy="261610"/>
+          </a:xfrm>
+          <a:prstGeom prst="rect">
+            <a:avLst/>
+          </a:prstGeom>
+        </p:spPr>
+        <p:txBody>
+          <a:bodyPr wrap="square">
+            <a:spAutoFit/>
+          </a:bodyPr>
+          <a:lstStyle/>
+          <a:p>
+            <a:pPr algn="ctr"/>
+            <a:r>
+              <a:rPr lang="en-US" sz="1100" dirty="0">
+                <a:latin typeface="Arial" panose="020B0604020202020204" pitchFamily="34" charset="0"/>
+                <a:cs typeface="Arial" panose="020B0604020202020204" pitchFamily="34" charset="0"/>
+              </a:rPr>
+              <a:t>Detected Datasets</a:t>
+            </a:r>
+            <a:endParaRPr lang="de-DE" sz="1100" dirty="0">
+              <a:latin typeface="Arial" panose="020B0604020202020204" pitchFamily="34" charset="0"/>
+              <a:cs typeface="Arial" panose="020B0604020202020204" pitchFamily="34" charset="0"/>
+            </a:endParaRPr>
+          </a:p>
+        </p:txBody>
+      </p:sp>
+      <p:sp>
+        <p:nvSpPr>
+          <p:cNvPr id="89" name="Rectangle: Rounded Corners 88">
+            <a:extLst>
+              <a:ext uri="{FF2B5EF4-FFF2-40B4-BE49-F238E27FC236}">
+                <a16:creationId xmlns:a16="http://schemas.microsoft.com/office/drawing/2014/main" id="{E036A8D5-381A-49F8-A9E1-4091609F5EF9}"/>
+              </a:ext>
+            </a:extLst>
+          </p:cNvPr>
+          <p:cNvSpPr/>
+          <p:nvPr/>
+        </p:nvSpPr>
+        <p:spPr>
+          <a:xfrm>
+            <a:off x="3460666" y="2756973"/>
             <a:ext cx="847452" cy="351647"/>
           </a:xfrm>
           <a:prstGeom prst="roundRect">
@@ -4173,7 +4434,7 @@
                 <a:latin typeface="Arial" panose="020B0604020202020204" pitchFamily="34" charset="0"/>
                 <a:cs typeface="Arial" panose="020B0604020202020204" pitchFamily="34" charset="0"/>
               </a:rPr>
-              <a:t>2075</a:t>
+              <a:t>1583</a:t>
             </a:r>
             <a:endParaRPr lang="de-DE" sz="1200" dirty="0">
               <a:solidFill>
@@ -4185,60 +4446,12 @@
           </a:p>
         </p:txBody>
       </p:sp>
-      <p:cxnSp>
-        <p:nvCxnSpPr>
-          <p:cNvPr id="67" name="Straight Arrow Connector 66">
+      <p:sp>
+        <p:nvSpPr>
+          <p:cNvPr id="91" name="Rectangle 90">
             <a:extLst>
               <a:ext uri="{FF2B5EF4-FFF2-40B4-BE49-F238E27FC236}">
-                <a16:creationId xmlns:a16="http://schemas.microsoft.com/office/drawing/2014/main" id="{546E5E13-378B-484F-A381-094CCFBA2949}"/>
-              </a:ext>
-            </a:extLst>
-          </p:cNvPr>
-          <p:cNvCxnSpPr>
-            <a:cxnSpLocks/>
-            <a:stCxn id="66" idx="2"/>
-            <a:endCxn id="9" idx="0"/>
-          </p:cNvCxnSpPr>
-          <p:nvPr/>
-        </p:nvCxnSpPr>
-        <p:spPr>
-          <a:xfrm>
-            <a:off x="3888208" y="3156870"/>
-            <a:ext cx="0" cy="582675"/>
-          </a:xfrm>
-          <a:prstGeom prst="straightConnector1">
-            <a:avLst/>
-          </a:prstGeom>
-          <a:ln>
-            <a:solidFill>
-              <a:schemeClr val="bg1">
-                <a:lumMod val="65000"/>
-              </a:schemeClr>
-            </a:solidFill>
-            <a:tailEnd type="triangle"/>
-          </a:ln>
-        </p:spPr>
-        <p:style>
-          <a:lnRef idx="1">
-            <a:schemeClr val="accent1"/>
-          </a:lnRef>
-          <a:fillRef idx="0">
-            <a:schemeClr val="accent1"/>
-          </a:fillRef>
-          <a:effectRef idx="0">
-            <a:schemeClr val="accent1"/>
-          </a:effectRef>
-          <a:fontRef idx="minor">
-            <a:schemeClr val="tx1"/>
-          </a:fontRef>
-        </p:style>
-      </p:cxnSp>
-      <p:sp>
-        <p:nvSpPr>
-          <p:cNvPr id="68" name="Rectangle 67">
-            <a:extLst>
-              <a:ext uri="{FF2B5EF4-FFF2-40B4-BE49-F238E27FC236}">
-                <a16:creationId xmlns:a16="http://schemas.microsoft.com/office/drawing/2014/main" id="{93AD1DEF-5289-457F-B458-79BF20D3C8FF}"/>
+                <a16:creationId xmlns:a16="http://schemas.microsoft.com/office/drawing/2014/main" id="{05DFAD21-E790-4E44-A833-74531D5D852B}"/>
               </a:ext>
             </a:extLst>
           </p:cNvPr>
@@ -4247,8 +4460,8 @@
         </p:nvSpPr>
         <p:spPr>
           <a:xfrm>
-            <a:off x="4308118" y="2842546"/>
-            <a:ext cx="1372571" cy="261610"/>
+            <a:off x="4308118" y="2739829"/>
+            <a:ext cx="1665950" cy="430887"/>
           </a:xfrm>
           <a:prstGeom prst="rect">
             <a:avLst/>
@@ -4260,12 +4473,19 @@
           </a:bodyPr>
           <a:lstStyle/>
           <a:p>
+            <a:r>
+              <a:rPr lang="en-US" sz="1100" dirty="0" err="1">
+                <a:latin typeface="Arial" panose="020B0604020202020204" pitchFamily="34" charset="0"/>
+                <a:cs typeface="Arial" panose="020B0604020202020204" pitchFamily="34" charset="0"/>
+              </a:rPr>
+              <a:t>Charité</a:t>
+            </a:r>
             <a:r>
               <a:rPr lang="en-US" sz="1100" dirty="0">
                 <a:latin typeface="Arial" panose="020B0604020202020204" pitchFamily="34" charset="0"/>
                 <a:cs typeface="Arial" panose="020B0604020202020204" pitchFamily="34" charset="0"/>
               </a:rPr>
-              <a:t>Charité Datasets</a:t>
+              <a:t> Papers with Shared Datasets</a:t>
             </a:r>
             <a:endParaRPr lang="de-DE" sz="1100" dirty="0">
               <a:latin typeface="Arial" panose="020B0604020202020204" pitchFamily="34" charset="0"/>
@@ -4276,10 +4496,10 @@
       </p:sp>
       <p:sp>
         <p:nvSpPr>
-          <p:cNvPr id="80" name="Rectangle: Rounded Corners 79">
+          <p:cNvPr id="31" name="Rectangle: Rounded Corners 30">
             <a:extLst>
               <a:ext uri="{FF2B5EF4-FFF2-40B4-BE49-F238E27FC236}">
-                <a16:creationId xmlns:a16="http://schemas.microsoft.com/office/drawing/2014/main" id="{D114DA72-2DDC-49FF-88D2-5DA57C7BF46C}"/>
+                <a16:creationId xmlns:a16="http://schemas.microsoft.com/office/drawing/2014/main" id="{9F56F1E4-3546-4BA0-88CD-F399B7C26180}"/>
               </a:ext>
             </a:extLst>
           </p:cNvPr>
@@ -4288,282 +4508,7 @@
         </p:nvSpPr>
         <p:spPr>
           <a:xfrm>
-            <a:off x="2649219" y="5459906"/>
-            <a:ext cx="815263" cy="351647"/>
-          </a:xfrm>
-          <a:prstGeom prst="roundRect">
-            <a:avLst/>
-          </a:prstGeom>
-          <a:gradFill flip="none" rotWithShape="1">
-            <a:gsLst>
-              <a:gs pos="84000">
-                <a:srgbClr val="D8F6E3"/>
-              </a:gs>
-              <a:gs pos="65000">
-                <a:srgbClr val="93FF81"/>
-              </a:gs>
-              <a:gs pos="100000">
-                <a:srgbClr val="D9FFDD"/>
-              </a:gs>
-            </a:gsLst>
-            <a:lin ang="18900000" scaled="1"/>
-            <a:tileRect/>
-          </a:gradFill>
-          <a:ln>
-            <a:noFill/>
-          </a:ln>
-          <a:effectLst>
-            <a:outerShdw blurRad="50800" dist="38100" dir="8100000" algn="tr" rotWithShape="0">
-              <a:prstClr val="black">
-                <a:alpha val="40000"/>
-              </a:prstClr>
-            </a:outerShdw>
-          </a:effectLst>
-        </p:spPr>
-        <p:style>
-          <a:lnRef idx="2">
-            <a:schemeClr val="accent1">
-              <a:shade val="50000"/>
-            </a:schemeClr>
-          </a:lnRef>
-          <a:fillRef idx="1">
-            <a:schemeClr val="accent1"/>
-          </a:fillRef>
-          <a:effectRef idx="0">
-            <a:schemeClr val="accent1"/>
-          </a:effectRef>
-          <a:fontRef idx="minor">
-            <a:schemeClr val="lt1"/>
-          </a:fontRef>
-        </p:style>
-        <p:txBody>
-          <a:bodyPr rtlCol="0" anchor="ctr"/>
-          <a:lstStyle/>
-          <a:p>
-            <a:pPr algn="ctr"/>
-            <a:r>
-              <a:rPr lang="en-US" sz="1200" dirty="0">
-                <a:solidFill>
-                  <a:schemeClr val="tx1"/>
-                </a:solidFill>
-                <a:latin typeface="Arial" panose="020B0604020202020204" pitchFamily="34" charset="0"/>
-                <a:cs typeface="Arial" panose="020B0604020202020204" pitchFamily="34" charset="0"/>
-              </a:rPr>
-              <a:t>176</a:t>
-            </a:r>
-            <a:endParaRPr lang="de-DE" sz="1200" dirty="0">
-              <a:solidFill>
-                <a:schemeClr val="tx1"/>
-              </a:solidFill>
-              <a:latin typeface="Arial" panose="020B0604020202020204" pitchFamily="34" charset="0"/>
-              <a:cs typeface="Arial" panose="020B0604020202020204" pitchFamily="34" charset="0"/>
-            </a:endParaRPr>
-          </a:p>
-        </p:txBody>
-      </p:sp>
-      <p:cxnSp>
-        <p:nvCxnSpPr>
-          <p:cNvPr id="81" name="Straight Arrow Connector 80">
-            <a:extLst>
-              <a:ext uri="{FF2B5EF4-FFF2-40B4-BE49-F238E27FC236}">
-                <a16:creationId xmlns:a16="http://schemas.microsoft.com/office/drawing/2014/main" id="{DEBAAEA7-28FC-4C4C-85C6-F295E82C619C}"/>
-              </a:ext>
-            </a:extLst>
-          </p:cNvPr>
-          <p:cNvCxnSpPr>
-            <a:cxnSpLocks/>
-            <a:endCxn id="80" idx="0"/>
-          </p:cNvCxnSpPr>
-          <p:nvPr/>
-        </p:nvCxnSpPr>
-        <p:spPr>
-          <a:xfrm>
-            <a:off x="2189495" y="5023080"/>
-            <a:ext cx="867356" cy="436826"/>
-          </a:xfrm>
-          <a:prstGeom prst="straightConnector1">
-            <a:avLst/>
-          </a:prstGeom>
-          <a:ln>
-            <a:solidFill>
-              <a:schemeClr val="bg1">
-                <a:lumMod val="65000"/>
-              </a:schemeClr>
-            </a:solidFill>
-            <a:tailEnd type="triangle"/>
-          </a:ln>
-        </p:spPr>
-        <p:style>
-          <a:lnRef idx="1">
-            <a:schemeClr val="accent1"/>
-          </a:lnRef>
-          <a:fillRef idx="0">
-            <a:schemeClr val="accent1"/>
-          </a:fillRef>
-          <a:effectRef idx="0">
-            <a:schemeClr val="accent1"/>
-          </a:effectRef>
-          <a:fontRef idx="minor">
-            <a:schemeClr val="tx1"/>
-          </a:fontRef>
-        </p:style>
-      </p:cxnSp>
-      <p:cxnSp>
-        <p:nvCxnSpPr>
-          <p:cNvPr id="82" name="Straight Arrow Connector 81">
-            <a:extLst>
-              <a:ext uri="{FF2B5EF4-FFF2-40B4-BE49-F238E27FC236}">
-                <a16:creationId xmlns:a16="http://schemas.microsoft.com/office/drawing/2014/main" id="{BFAE4691-A331-4DBF-B116-0C1888F2171E}"/>
-              </a:ext>
-            </a:extLst>
-          </p:cNvPr>
-          <p:cNvCxnSpPr>
-            <a:cxnSpLocks/>
-            <a:endCxn id="80" idx="0"/>
-          </p:cNvCxnSpPr>
-          <p:nvPr/>
-        </p:nvCxnSpPr>
-        <p:spPr>
-          <a:xfrm flipH="1">
-            <a:off x="3056851" y="5023080"/>
-            <a:ext cx="831374" cy="436826"/>
-          </a:xfrm>
-          <a:prstGeom prst="straightConnector1">
-            <a:avLst/>
-          </a:prstGeom>
-          <a:ln>
-            <a:solidFill>
-              <a:schemeClr val="bg1">
-                <a:lumMod val="65000"/>
-              </a:schemeClr>
-            </a:solidFill>
-            <a:tailEnd type="triangle"/>
-          </a:ln>
-        </p:spPr>
-        <p:style>
-          <a:lnRef idx="1">
-            <a:schemeClr val="accent1"/>
-          </a:lnRef>
-          <a:fillRef idx="0">
-            <a:schemeClr val="accent1"/>
-          </a:fillRef>
-          <a:effectRef idx="0">
-            <a:schemeClr val="accent1"/>
-          </a:effectRef>
-          <a:fontRef idx="minor">
-            <a:schemeClr val="tx1"/>
-          </a:fontRef>
-        </p:style>
-      </p:cxnSp>
-      <p:sp>
-        <p:nvSpPr>
-          <p:cNvPr id="83" name="Rectangle 82">
-            <a:extLst>
-              <a:ext uri="{FF2B5EF4-FFF2-40B4-BE49-F238E27FC236}">
-                <a16:creationId xmlns:a16="http://schemas.microsoft.com/office/drawing/2014/main" id="{B2BD9BD0-063F-41F0-AF7A-83DA5949A806}"/>
-              </a:ext>
-            </a:extLst>
-          </p:cNvPr>
-          <p:cNvSpPr/>
-          <p:nvPr/>
-        </p:nvSpPr>
-        <p:spPr>
-          <a:xfrm>
-            <a:off x="2213049" y="5809625"/>
-            <a:ext cx="1675112" cy="430887"/>
-          </a:xfrm>
-          <a:prstGeom prst="rect">
-            <a:avLst/>
-          </a:prstGeom>
-        </p:spPr>
-        <p:txBody>
-          <a:bodyPr wrap="square">
-            <a:spAutoFit/>
-          </a:bodyPr>
-          <a:lstStyle/>
-          <a:p>
-            <a:pPr algn="ctr"/>
-            <a:r>
-              <a:rPr lang="en-US" sz="1100" dirty="0">
-                <a:latin typeface="Arial" panose="020B0604020202020204" pitchFamily="34" charset="0"/>
-                <a:cs typeface="Arial" panose="020B0604020202020204" pitchFamily="34" charset="0"/>
-              </a:rPr>
-              <a:t>Detected Charité Datasets</a:t>
-            </a:r>
-            <a:endParaRPr lang="de-DE" sz="1100" dirty="0">
-              <a:latin typeface="Arial" panose="020B0604020202020204" pitchFamily="34" charset="0"/>
-              <a:cs typeface="Arial" panose="020B0604020202020204" pitchFamily="34" charset="0"/>
-            </a:endParaRPr>
-          </a:p>
-        </p:txBody>
-      </p:sp>
-      <p:sp>
-        <p:nvSpPr>
-          <p:cNvPr id="84" name="Rectangle 83">
-            <a:extLst>
-              <a:ext uri="{FF2B5EF4-FFF2-40B4-BE49-F238E27FC236}">
-                <a16:creationId xmlns:a16="http://schemas.microsoft.com/office/drawing/2014/main" id="{A02124E0-F757-48A6-A940-07EAF3578E3C}"/>
-              </a:ext>
-            </a:extLst>
-          </p:cNvPr>
-          <p:cNvSpPr/>
-          <p:nvPr/>
-        </p:nvSpPr>
-        <p:spPr>
-          <a:xfrm>
-            <a:off x="2799386" y="4642761"/>
-            <a:ext cx="462817" cy="246221"/>
-          </a:xfrm>
-          <a:prstGeom prst="rect">
-            <a:avLst/>
-          </a:prstGeom>
-        </p:spPr>
-        <p:txBody>
-          <a:bodyPr wrap="square">
-            <a:spAutoFit/>
-          </a:bodyPr>
-          <a:lstStyle/>
-          <a:p>
-            <a:pPr algn="ctr"/>
-            <a:r>
-              <a:rPr lang="en-US" sz="1000" dirty="0">
-                <a:solidFill>
-                  <a:schemeClr val="bg1">
-                    <a:lumMod val="50000"/>
-                  </a:schemeClr>
-                </a:solidFill>
-                <a:latin typeface="Arial" panose="020B0604020202020204" pitchFamily="34" charset="0"/>
-                <a:cs typeface="Arial" panose="020B0604020202020204" pitchFamily="34" charset="0"/>
-              </a:rPr>
-              <a:t>(62)</a:t>
-            </a:r>
-            <a:endParaRPr lang="de-DE" sz="1000" dirty="0">
-              <a:solidFill>
-                <a:schemeClr val="bg1">
-                  <a:lumMod val="50000"/>
-                </a:schemeClr>
-              </a:solidFill>
-              <a:latin typeface="Arial" panose="020B0604020202020204" pitchFamily="34" charset="0"/>
-              <a:cs typeface="Arial" panose="020B0604020202020204" pitchFamily="34" charset="0"/>
-            </a:endParaRPr>
-          </a:p>
-        </p:txBody>
-      </p:sp>
-      <p:sp>
-        <p:nvSpPr>
-          <p:cNvPr id="89" name="Rectangle: Rounded Corners 88">
-            <a:extLst>
-              <a:ext uri="{FF2B5EF4-FFF2-40B4-BE49-F238E27FC236}">
-                <a16:creationId xmlns:a16="http://schemas.microsoft.com/office/drawing/2014/main" id="{E036A8D5-381A-49F8-A9E1-4091609F5EF9}"/>
-              </a:ext>
-            </a:extLst>
-          </p:cNvPr>
-          <p:cNvSpPr/>
-          <p:nvPr/>
-        </p:nvSpPr>
-        <p:spPr>
-          <a:xfrm>
-            <a:off x="3460666" y="1868520"/>
+            <a:off x="2649219" y="1571077"/>
             <a:ext cx="847452" cy="351647"/>
           </a:xfrm>
           <a:prstGeom prst="roundRect">
@@ -4629,7 +4574,7 @@
                 <a:latin typeface="Arial" panose="020B0604020202020204" pitchFamily="34" charset="0"/>
                 <a:cs typeface="Arial" panose="020B0604020202020204" pitchFamily="34" charset="0"/>
               </a:rPr>
-              <a:t>1589</a:t>
+              <a:t>?</a:t>
             </a:r>
             <a:endParaRPr lang="de-DE" sz="1200" dirty="0">
               <a:solidFill>
@@ -4641,26 +4586,73 @@
           </a:p>
         </p:txBody>
       </p:sp>
+      <p:sp>
+        <p:nvSpPr>
+          <p:cNvPr id="32" name="Rectangle 31">
+            <a:extLst>
+              <a:ext uri="{FF2B5EF4-FFF2-40B4-BE49-F238E27FC236}">
+                <a16:creationId xmlns:a16="http://schemas.microsoft.com/office/drawing/2014/main" id="{7A54B268-A57D-466C-96B2-2B4869C1802D}"/>
+              </a:ext>
+            </a:extLst>
+          </p:cNvPr>
+          <p:cNvSpPr/>
+          <p:nvPr/>
+        </p:nvSpPr>
+        <p:spPr>
+          <a:xfrm>
+            <a:off x="3587268" y="1610108"/>
+            <a:ext cx="1665950" cy="261610"/>
+          </a:xfrm>
+          <a:prstGeom prst="rect">
+            <a:avLst/>
+          </a:prstGeom>
+        </p:spPr>
+        <p:txBody>
+          <a:bodyPr wrap="square">
+            <a:spAutoFit/>
+          </a:bodyPr>
+          <a:lstStyle/>
+          <a:p>
+            <a:r>
+              <a:rPr lang="en-US" sz="1100" dirty="0" err="1">
+                <a:latin typeface="Arial" panose="020B0604020202020204" pitchFamily="34" charset="0"/>
+                <a:cs typeface="Arial" panose="020B0604020202020204" pitchFamily="34" charset="0"/>
+              </a:rPr>
+              <a:t>Charité</a:t>
+            </a:r>
+            <a:r>
+              <a:rPr lang="en-US" sz="1100" dirty="0">
+                <a:latin typeface="Arial" panose="020B0604020202020204" pitchFamily="34" charset="0"/>
+                <a:cs typeface="Arial" panose="020B0604020202020204" pitchFamily="34" charset="0"/>
+              </a:rPr>
+              <a:t> Papers</a:t>
+            </a:r>
+            <a:endParaRPr lang="de-DE" sz="1100" dirty="0">
+              <a:latin typeface="Arial" panose="020B0604020202020204" pitchFamily="34" charset="0"/>
+              <a:cs typeface="Arial" panose="020B0604020202020204" pitchFamily="34" charset="0"/>
+            </a:endParaRPr>
+          </a:p>
+        </p:txBody>
+      </p:sp>
       <p:cxnSp>
         <p:nvCxnSpPr>
-          <p:cNvPr id="90" name="Straight Arrow Connector 89">
+          <p:cNvPr id="4" name="Straight Arrow Connector 3">
             <a:extLst>
               <a:ext uri="{FF2B5EF4-FFF2-40B4-BE49-F238E27FC236}">
-                <a16:creationId xmlns:a16="http://schemas.microsoft.com/office/drawing/2014/main" id="{C4022197-50F9-4E7D-93EC-E8857B9CE880}"/>
+                <a16:creationId xmlns:a16="http://schemas.microsoft.com/office/drawing/2014/main" id="{AC44CFEE-44A3-463A-B397-18E4801C7FA1}"/>
               </a:ext>
             </a:extLst>
           </p:cNvPr>
           <p:cNvCxnSpPr>
-            <a:cxnSpLocks/>
-            <a:stCxn id="89" idx="2"/>
-            <a:endCxn id="66" idx="0"/>
+            <a:stCxn id="37" idx="3"/>
+            <a:endCxn id="11" idx="1"/>
           </p:cNvCxnSpPr>
           <p:nvPr/>
         </p:nvCxnSpPr>
         <p:spPr>
           <a:xfrm>
-            <a:off x="3884392" y="2220167"/>
-            <a:ext cx="3816" cy="585056"/>
+            <a:off x="2597109" y="4835600"/>
+            <a:ext cx="867373" cy="0"/>
           </a:xfrm>
           <a:prstGeom prst="straightConnector1">
             <a:avLst/>
@@ -4671,6 +4663,7 @@
                 <a:lumMod val="65000"/>
               </a:schemeClr>
             </a:solidFill>
+            <a:headEnd type="triangle"/>
             <a:tailEnd type="triangle"/>
           </a:ln>
         </p:spPr>
@@ -4689,12 +4682,61 @@
           </a:fontRef>
         </p:style>
       </p:cxnSp>
-      <p:sp>
-        <p:nvSpPr>
-          <p:cNvPr id="91" name="Rectangle 90">
+      <p:cxnSp>
+        <p:nvCxnSpPr>
+          <p:cNvPr id="40" name="Straight Arrow Connector 39">
             <a:extLst>
               <a:ext uri="{FF2B5EF4-FFF2-40B4-BE49-F238E27FC236}">
-                <a16:creationId xmlns:a16="http://schemas.microsoft.com/office/drawing/2014/main" id="{05DFAD21-E790-4E44-A833-74531D5D852B}"/>
+                <a16:creationId xmlns:a16="http://schemas.microsoft.com/office/drawing/2014/main" id="{0C5BEB27-C360-4D58-8AE3-C08092988058}"/>
+              </a:ext>
+            </a:extLst>
+          </p:cNvPr>
+          <p:cNvCxnSpPr>
+            <a:cxnSpLocks/>
+            <a:stCxn id="38" idx="3"/>
+            <a:endCxn id="13" idx="1"/>
+          </p:cNvCxnSpPr>
+          <p:nvPr/>
+        </p:nvCxnSpPr>
+        <p:spPr>
+          <a:xfrm>
+            <a:off x="2603500" y="6392104"/>
+            <a:ext cx="860999" cy="0"/>
+          </a:xfrm>
+          <a:prstGeom prst="straightConnector1">
+            <a:avLst/>
+          </a:prstGeom>
+          <a:ln>
+            <a:solidFill>
+              <a:schemeClr val="bg1">
+                <a:lumMod val="65000"/>
+              </a:schemeClr>
+            </a:solidFill>
+            <a:headEnd type="triangle"/>
+            <a:tailEnd type="triangle"/>
+          </a:ln>
+        </p:spPr>
+        <p:style>
+          <a:lnRef idx="1">
+            <a:schemeClr val="accent1"/>
+          </a:lnRef>
+          <a:fillRef idx="0">
+            <a:schemeClr val="accent1"/>
+          </a:fillRef>
+          <a:effectRef idx="0">
+            <a:schemeClr val="accent1"/>
+          </a:effectRef>
+          <a:fontRef idx="minor">
+            <a:schemeClr val="tx1"/>
+          </a:fontRef>
+        </p:style>
+      </p:cxnSp>
+      <p:sp>
+        <p:nvSpPr>
+          <p:cNvPr id="43" name="Rectangle 42">
+            <a:extLst>
+              <a:ext uri="{FF2B5EF4-FFF2-40B4-BE49-F238E27FC236}">
+                <a16:creationId xmlns:a16="http://schemas.microsoft.com/office/drawing/2014/main" id="{EED85551-9A16-4CFB-B3E1-92401FDE4558}"/>
               </a:ext>
             </a:extLst>
           </p:cNvPr>
@@ -4703,8 +4745,8 @@
         </p:nvSpPr>
         <p:spPr>
           <a:xfrm>
-            <a:off x="4304302" y="1905843"/>
-            <a:ext cx="1372571" cy="261610"/>
+            <a:off x="2744936" y="4620156"/>
+            <a:ext cx="571718" cy="230832"/>
           </a:xfrm>
           <a:prstGeom prst="rect">
             <a:avLst/>
@@ -4716,14 +4758,77 @@
           </a:bodyPr>
           <a:lstStyle/>
           <a:p>
-            <a:r>
-              <a:rPr lang="en-US" sz="1100" dirty="0">
+            <a:pPr algn="ctr"/>
+            <a:r>
+              <a:rPr lang="en-US" sz="900" dirty="0">
+                <a:solidFill>
+                  <a:schemeClr val="bg1">
+                    <a:lumMod val="65000"/>
+                  </a:schemeClr>
+                </a:solidFill>
                 <a:latin typeface="Arial" panose="020B0604020202020204" pitchFamily="34" charset="0"/>
                 <a:cs typeface="Arial" panose="020B0604020202020204" pitchFamily="34" charset="0"/>
               </a:rPr>
-              <a:t>Charité Papers</a:t>
-            </a:r>
-            <a:endParaRPr lang="de-DE" sz="1100" dirty="0">
+              <a:t>(62)</a:t>
+            </a:r>
+            <a:endParaRPr lang="de-DE" sz="900" dirty="0">
+              <a:solidFill>
+                <a:schemeClr val="bg1">
+                  <a:lumMod val="65000"/>
+                </a:schemeClr>
+              </a:solidFill>
+              <a:latin typeface="Arial" panose="020B0604020202020204" pitchFamily="34" charset="0"/>
+              <a:cs typeface="Arial" panose="020B0604020202020204" pitchFamily="34" charset="0"/>
+            </a:endParaRPr>
+          </a:p>
+        </p:txBody>
+      </p:sp>
+      <p:sp>
+        <p:nvSpPr>
+          <p:cNvPr id="44" name="Rectangle 43">
+            <a:extLst>
+              <a:ext uri="{FF2B5EF4-FFF2-40B4-BE49-F238E27FC236}">
+                <a16:creationId xmlns:a16="http://schemas.microsoft.com/office/drawing/2014/main" id="{53CC2D1C-CC06-4BB5-A6EA-12AC3E06A1F1}"/>
+              </a:ext>
+            </a:extLst>
+          </p:cNvPr>
+          <p:cNvSpPr/>
+          <p:nvPr/>
+        </p:nvSpPr>
+        <p:spPr>
+          <a:xfrm>
+            <a:off x="2751328" y="6190122"/>
+            <a:ext cx="571718" cy="230832"/>
+          </a:xfrm>
+          <a:prstGeom prst="rect">
+            <a:avLst/>
+          </a:prstGeom>
+        </p:spPr>
+        <p:txBody>
+          <a:bodyPr wrap="square">
+            <a:spAutoFit/>
+          </a:bodyPr>
+          <a:lstStyle/>
+          <a:p>
+            <a:pPr algn="ctr"/>
+            <a:r>
+              <a:rPr lang="en-US" sz="900" dirty="0">
+                <a:solidFill>
+                  <a:schemeClr val="bg1">
+                    <a:lumMod val="65000"/>
+                  </a:schemeClr>
+                </a:solidFill>
+                <a:latin typeface="Arial" panose="020B0604020202020204" pitchFamily="34" charset="0"/>
+                <a:cs typeface="Arial" panose="020B0604020202020204" pitchFamily="34" charset="0"/>
+              </a:rPr>
+              <a:t>(325)</a:t>
+            </a:r>
+            <a:endParaRPr lang="de-DE" sz="900" dirty="0">
+              <a:solidFill>
+                <a:schemeClr val="bg1">
+                  <a:lumMod val="65000"/>
+                </a:schemeClr>
+              </a:solidFill>
               <a:latin typeface="Arial" panose="020B0604020202020204" pitchFamily="34" charset="0"/>
               <a:cs typeface="Arial" panose="020B0604020202020204" pitchFamily="34" charset="0"/>
             </a:endParaRPr>
@@ -5148,14 +5253,14 @@
           <a:p>
             <a:pPr algn="ctr"/>
             <a:r>
-              <a:rPr lang="en-US" sz="1200">
+              <a:rPr lang="en-US" sz="1200" dirty="0">
                 <a:solidFill>
                   <a:schemeClr val="tx1"/>
                 </a:solidFill>
                 <a:latin typeface="Arial" panose="020B0604020202020204" pitchFamily="34" charset="0"/>
                 <a:cs typeface="Arial" panose="020B0604020202020204" pitchFamily="34" charset="0"/>
               </a:rPr>
-              <a:t>35</a:t>
+              <a:t>34</a:t>
             </a:r>
             <a:endParaRPr lang="de-DE" sz="1200" dirty="0">
               <a:solidFill>

--- a/plots_png/pptx/plots_png.pptx
+++ b/plots_png/pptx/plots_png.pptx
@@ -244,7 +244,7 @@
           <a:p>
             <a:fld id="{83D14EEA-DE26-4810-8E05-A65F0010FADE}" type="datetimeFigureOut">
               <a:rPr lang="de-DE" smtClean="0"/>
-              <a:t>21.10.2025</a:t>
+              <a:t>22.10.2025</a:t>
             </a:fld>
             <a:endParaRPr lang="de-DE"/>
           </a:p>
@@ -414,7 +414,7 @@
           <a:p>
             <a:fld id="{83D14EEA-DE26-4810-8E05-A65F0010FADE}" type="datetimeFigureOut">
               <a:rPr lang="de-DE" smtClean="0"/>
-              <a:t>21.10.2025</a:t>
+              <a:t>22.10.2025</a:t>
             </a:fld>
             <a:endParaRPr lang="de-DE"/>
           </a:p>
@@ -594,7 +594,7 @@
           <a:p>
             <a:fld id="{83D14EEA-DE26-4810-8E05-A65F0010FADE}" type="datetimeFigureOut">
               <a:rPr lang="de-DE" smtClean="0"/>
-              <a:t>21.10.2025</a:t>
+              <a:t>22.10.2025</a:t>
             </a:fld>
             <a:endParaRPr lang="de-DE"/>
           </a:p>
@@ -764,7 +764,7 @@
           <a:p>
             <a:fld id="{83D14EEA-DE26-4810-8E05-A65F0010FADE}" type="datetimeFigureOut">
               <a:rPr lang="de-DE" smtClean="0"/>
-              <a:t>21.10.2025</a:t>
+              <a:t>22.10.2025</a:t>
             </a:fld>
             <a:endParaRPr lang="de-DE"/>
           </a:p>
@@ -1008,7 +1008,7 @@
           <a:p>
             <a:fld id="{83D14EEA-DE26-4810-8E05-A65F0010FADE}" type="datetimeFigureOut">
               <a:rPr lang="de-DE" smtClean="0"/>
-              <a:t>21.10.2025</a:t>
+              <a:t>22.10.2025</a:t>
             </a:fld>
             <a:endParaRPr lang="de-DE"/>
           </a:p>
@@ -1240,7 +1240,7 @@
           <a:p>
             <a:fld id="{83D14EEA-DE26-4810-8E05-A65F0010FADE}" type="datetimeFigureOut">
               <a:rPr lang="de-DE" smtClean="0"/>
-              <a:t>21.10.2025</a:t>
+              <a:t>22.10.2025</a:t>
             </a:fld>
             <a:endParaRPr lang="de-DE"/>
           </a:p>
@@ -1607,7 +1607,7 @@
           <a:p>
             <a:fld id="{83D14EEA-DE26-4810-8E05-A65F0010FADE}" type="datetimeFigureOut">
               <a:rPr lang="de-DE" smtClean="0"/>
-              <a:t>21.10.2025</a:t>
+              <a:t>22.10.2025</a:t>
             </a:fld>
             <a:endParaRPr lang="de-DE"/>
           </a:p>
@@ -1725,7 +1725,7 @@
           <a:p>
             <a:fld id="{83D14EEA-DE26-4810-8E05-A65F0010FADE}" type="datetimeFigureOut">
               <a:rPr lang="de-DE" smtClean="0"/>
-              <a:t>21.10.2025</a:t>
+              <a:t>22.10.2025</a:t>
             </a:fld>
             <a:endParaRPr lang="de-DE"/>
           </a:p>
@@ -1820,7 +1820,7 @@
           <a:p>
             <a:fld id="{83D14EEA-DE26-4810-8E05-A65F0010FADE}" type="datetimeFigureOut">
               <a:rPr lang="de-DE" smtClean="0"/>
-              <a:t>21.10.2025</a:t>
+              <a:t>22.10.2025</a:t>
             </a:fld>
             <a:endParaRPr lang="de-DE"/>
           </a:p>
@@ -2097,7 +2097,7 @@
           <a:p>
             <a:fld id="{83D14EEA-DE26-4810-8E05-A65F0010FADE}" type="datetimeFigureOut">
               <a:rPr lang="de-DE" smtClean="0"/>
-              <a:t>21.10.2025</a:t>
+              <a:t>22.10.2025</a:t>
             </a:fld>
             <a:endParaRPr lang="de-DE"/>
           </a:p>
@@ -2354,7 +2354,7 @@
           <a:p>
             <a:fld id="{83D14EEA-DE26-4810-8E05-A65F0010FADE}" type="datetimeFigureOut">
               <a:rPr lang="de-DE" smtClean="0"/>
-              <a:t>21.10.2025</a:t>
+              <a:t>22.10.2025</a:t>
             </a:fld>
             <a:endParaRPr lang="de-DE"/>
           </a:p>
@@ -2567,7 +2567,7 @@
           <a:p>
             <a:fld id="{83D14EEA-DE26-4810-8E05-A65F0010FADE}" type="datetimeFigureOut">
               <a:rPr lang="de-DE" smtClean="0"/>
-              <a:t>21.10.2025</a:t>
+              <a:t>22.10.2025</a:t>
             </a:fld>
             <a:endParaRPr lang="de-DE"/>
           </a:p>
@@ -3052,7 +3052,7 @@
                 <a:latin typeface="Arial" panose="020B0604020202020204" pitchFamily="34" charset="0"/>
                 <a:cs typeface="Arial" panose="020B0604020202020204" pitchFamily="34" charset="0"/>
               </a:rPr>
-              <a:t>1919</a:t>
+              <a:t>2385</a:t>
             </a:r>
             <a:endParaRPr lang="de-DE" sz="1200" dirty="0">
               <a:solidFill>
@@ -3399,7 +3399,7 @@
         </p:nvSpPr>
         <p:spPr>
           <a:xfrm>
-            <a:off x="4271005" y="4697099"/>
+            <a:off x="4271005" y="4634156"/>
             <a:ext cx="2126949" cy="430887"/>
           </a:xfrm>
           <a:prstGeom prst="rect">
@@ -3445,7 +3445,7 @@
         </p:nvSpPr>
         <p:spPr>
           <a:xfrm>
-            <a:off x="4311934" y="6253603"/>
+            <a:off x="4303434" y="6176659"/>
             <a:ext cx="2126948" cy="430887"/>
           </a:xfrm>
           <a:prstGeom prst="rect">
@@ -3883,7 +3883,7 @@
                 <a:latin typeface="Arial" panose="020B0604020202020204" pitchFamily="34" charset="0"/>
                 <a:cs typeface="Arial" panose="020B0604020202020204" pitchFamily="34" charset="0"/>
               </a:rPr>
-              <a:t>Mentioned  Datasets</a:t>
+              <a:t>Mentioned Datasets</a:t>
             </a:r>
           </a:p>
           <a:p>
@@ -3893,21 +3893,7 @@
                 <a:latin typeface="Arial" panose="020B0604020202020204" pitchFamily="34" charset="0"/>
                 <a:cs typeface="Arial" panose="020B0604020202020204" pitchFamily="34" charset="0"/>
               </a:rPr>
-              <a:t>(</a:t>
-            </a:r>
-            <a:r>
-              <a:rPr lang="en-US" sz="1100" dirty="0" err="1">
-                <a:latin typeface="Arial" panose="020B0604020202020204" pitchFamily="34" charset="0"/>
-                <a:cs typeface="Arial" panose="020B0604020202020204" pitchFamily="34" charset="0"/>
-              </a:rPr>
-              <a:t>DataStet</a:t>
-            </a:r>
-            <a:r>
-              <a:rPr lang="en-US" sz="1100" dirty="0">
-                <a:latin typeface="Arial" panose="020B0604020202020204" pitchFamily="34" charset="0"/>
-                <a:cs typeface="Arial" panose="020B0604020202020204" pitchFamily="34" charset="0"/>
-              </a:rPr>
-              <a:t>)</a:t>
+              <a:t>(DataStet)</a:t>
             </a:r>
             <a:endParaRPr lang="de-DE" sz="1100" dirty="0">
               <a:latin typeface="Arial" panose="020B0604020202020204" pitchFamily="34" charset="0"/>
@@ -3959,21 +3945,7 @@
                 <a:latin typeface="Arial" panose="020B0604020202020204" pitchFamily="34" charset="0"/>
                 <a:cs typeface="Arial" panose="020B0604020202020204" pitchFamily="34" charset="0"/>
               </a:rPr>
-              <a:t>(</a:t>
-            </a:r>
-            <a:r>
-              <a:rPr lang="en-US" sz="1100" dirty="0" err="1">
-                <a:latin typeface="Arial" panose="020B0604020202020204" pitchFamily="34" charset="0"/>
-                <a:cs typeface="Arial" panose="020B0604020202020204" pitchFamily="34" charset="0"/>
-              </a:rPr>
-              <a:t>DataStet</a:t>
-            </a:r>
-            <a:r>
-              <a:rPr lang="en-US" sz="1100" dirty="0">
-                <a:latin typeface="Arial" panose="020B0604020202020204" pitchFamily="34" charset="0"/>
-                <a:cs typeface="Arial" panose="020B0604020202020204" pitchFamily="34" charset="0"/>
-              </a:rPr>
-              <a:t>)</a:t>
+              <a:t>(DataStet)</a:t>
             </a:r>
             <a:endParaRPr lang="de-DE" sz="1100" dirty="0">
               <a:latin typeface="Arial" panose="020B0604020202020204" pitchFamily="34" charset="0"/>
@@ -4044,8 +4016,8 @@
         </p:nvSpPr>
         <p:spPr>
           <a:xfrm>
-            <a:off x="2025389" y="7478810"/>
-            <a:ext cx="2050431" cy="430887"/>
+            <a:off x="1927797" y="7483280"/>
+            <a:ext cx="2245616" cy="822726"/>
           </a:xfrm>
           <a:prstGeom prst="rect">
             <a:avLst/>
@@ -4057,7 +4029,11 @@
           </a:bodyPr>
           <a:lstStyle/>
           <a:p>
-            <a:pPr algn="ctr"/>
+            <a:pPr algn="ctr">
+              <a:lnSpc>
+                <a:spcPct val="150000"/>
+              </a:lnSpc>
+            </a:pPr>
             <a:r>
               <a:rPr lang="en-US" sz="1100" dirty="0">
                 <a:latin typeface="Arial" panose="020B0604020202020204" pitchFamily="34" charset="0"/>
@@ -4067,7 +4043,39 @@
             </a:r>
           </a:p>
           <a:p>
-            <a:pPr algn="ctr"/>
+            <a:pPr algn="ctr">
+              <a:lnSpc>
+                <a:spcPct val="150000"/>
+              </a:lnSpc>
+            </a:pPr>
+            <a:r>
+              <a:rPr lang="en-US" sz="1100" dirty="0">
+                <a:solidFill>
+                  <a:schemeClr val="bg1">
+                    <a:lumMod val="50000"/>
+                  </a:schemeClr>
+                </a:solidFill>
+                <a:latin typeface="Arial" panose="020B0604020202020204" pitchFamily="34" charset="0"/>
+                <a:cs typeface="Arial" panose="020B0604020202020204" pitchFamily="34" charset="0"/>
+              </a:rPr>
+              <a:t>Published in 134 Charité Papers</a:t>
+            </a:r>
+            <a:endParaRPr lang="de-DE" sz="1100" dirty="0">
+              <a:solidFill>
+                <a:schemeClr val="bg1">
+                  <a:lumMod val="50000"/>
+                </a:schemeClr>
+              </a:solidFill>
+              <a:latin typeface="Arial" panose="020B0604020202020204" pitchFamily="34" charset="0"/>
+              <a:cs typeface="Arial" panose="020B0604020202020204" pitchFamily="34" charset="0"/>
+            </a:endParaRPr>
+          </a:p>
+          <a:p>
+            <a:pPr algn="ctr">
+              <a:lnSpc>
+                <a:spcPct val="150000"/>
+              </a:lnSpc>
+            </a:pPr>
             <a:r>
               <a:rPr lang="de-DE" sz="1100" dirty="0">
                 <a:solidFill>
@@ -4078,7 +4086,7 @@
                 <a:latin typeface="Arial" panose="020B0604020202020204" pitchFamily="34" charset="0"/>
                 <a:cs typeface="Arial" panose="020B0604020202020204" pitchFamily="34" charset="0"/>
               </a:rPr>
-              <a:t>(1390 Reusing Papers)</a:t>
+              <a:t>Reused by 1390 Papers</a:t>
             </a:r>
           </a:p>
         </p:txBody>
@@ -4326,7 +4334,7 @@
         </p:nvSpPr>
         <p:spPr>
           <a:xfrm>
-            <a:off x="2213049" y="5809625"/>
+            <a:off x="2199631" y="5840218"/>
             <a:ext cx="1675112" cy="261610"/>
           </a:xfrm>
           <a:prstGeom prst="rect">
@@ -4474,18 +4482,11 @@
           <a:lstStyle/>
           <a:p>
             <a:r>
-              <a:rPr lang="en-US" sz="1100" dirty="0" err="1">
-                <a:latin typeface="Arial" panose="020B0604020202020204" pitchFamily="34" charset="0"/>
-                <a:cs typeface="Arial" panose="020B0604020202020204" pitchFamily="34" charset="0"/>
-              </a:rPr>
-              <a:t>Charité</a:t>
-            </a:r>
-            <a:r>
               <a:rPr lang="en-US" sz="1100" dirty="0">
                 <a:latin typeface="Arial" panose="020B0604020202020204" pitchFamily="34" charset="0"/>
                 <a:cs typeface="Arial" panose="020B0604020202020204" pitchFamily="34" charset="0"/>
               </a:rPr>
-              <a:t> Papers with Shared Datasets</a:t>
+              <a:t>Charité Papers with Shared Datasets</a:t>
             </a:r>
             <a:endParaRPr lang="de-DE" sz="1100" dirty="0">
               <a:latin typeface="Arial" panose="020B0604020202020204" pitchFamily="34" charset="0"/>
@@ -4508,22 +4509,22 @@
         </p:nvSpPr>
         <p:spPr>
           <a:xfrm>
-            <a:off x="2649219" y="1571077"/>
-            <a:ext cx="847452" cy="351647"/>
+            <a:off x="2110235" y="1836272"/>
+            <a:ext cx="1880740" cy="351647"/>
           </a:xfrm>
           <a:prstGeom prst="roundRect">
             <a:avLst/>
           </a:prstGeom>
           <a:gradFill flip="none" rotWithShape="1">
             <a:gsLst>
-              <a:gs pos="84000">
-                <a:srgbClr val="FCE5D6"/>
+              <a:gs pos="69000">
+                <a:schemeClr val="accent2">
+                  <a:lumMod val="60000"/>
+                  <a:lumOff val="40000"/>
+                </a:schemeClr>
               </a:gs>
-              <a:gs pos="68000">
-                <a:schemeClr val="accent2">
-                  <a:lumMod val="40000"/>
-                  <a:lumOff val="60000"/>
-                </a:schemeClr>
+              <a:gs pos="0">
+                <a:schemeClr val="accent2"/>
               </a:gs>
               <a:gs pos="100000">
                 <a:schemeClr val="bg1">
@@ -4574,60 +4575,12 @@
                 <a:latin typeface="Arial" panose="020B0604020202020204" pitchFamily="34" charset="0"/>
                 <a:cs typeface="Arial" panose="020B0604020202020204" pitchFamily="34" charset="0"/>
               </a:rPr>
-              <a:t>?</a:t>
+              <a:t>15748 Charité Papers</a:t>
             </a:r>
             <a:endParaRPr lang="de-DE" sz="1200" dirty="0">
               <a:solidFill>
                 <a:schemeClr val="tx1"/>
               </a:solidFill>
-              <a:latin typeface="Arial" panose="020B0604020202020204" pitchFamily="34" charset="0"/>
-              <a:cs typeface="Arial" panose="020B0604020202020204" pitchFamily="34" charset="0"/>
-            </a:endParaRPr>
-          </a:p>
-        </p:txBody>
-      </p:sp>
-      <p:sp>
-        <p:nvSpPr>
-          <p:cNvPr id="32" name="Rectangle 31">
-            <a:extLst>
-              <a:ext uri="{FF2B5EF4-FFF2-40B4-BE49-F238E27FC236}">
-                <a16:creationId xmlns:a16="http://schemas.microsoft.com/office/drawing/2014/main" id="{7A54B268-A57D-466C-96B2-2B4869C1802D}"/>
-              </a:ext>
-            </a:extLst>
-          </p:cNvPr>
-          <p:cNvSpPr/>
-          <p:nvPr/>
-        </p:nvSpPr>
-        <p:spPr>
-          <a:xfrm>
-            <a:off x="3587268" y="1610108"/>
-            <a:ext cx="1665950" cy="261610"/>
-          </a:xfrm>
-          <a:prstGeom prst="rect">
-            <a:avLst/>
-          </a:prstGeom>
-        </p:spPr>
-        <p:txBody>
-          <a:bodyPr wrap="square">
-            <a:spAutoFit/>
-          </a:bodyPr>
-          <a:lstStyle/>
-          <a:p>
-            <a:r>
-              <a:rPr lang="en-US" sz="1100" dirty="0" err="1">
-                <a:latin typeface="Arial" panose="020B0604020202020204" pitchFamily="34" charset="0"/>
-                <a:cs typeface="Arial" panose="020B0604020202020204" pitchFamily="34" charset="0"/>
-              </a:rPr>
-              <a:t>Charité</a:t>
-            </a:r>
-            <a:r>
-              <a:rPr lang="en-US" sz="1100" dirty="0">
-                <a:latin typeface="Arial" panose="020B0604020202020204" pitchFamily="34" charset="0"/>
-                <a:cs typeface="Arial" panose="020B0604020202020204" pitchFamily="34" charset="0"/>
-              </a:rPr>
-              <a:t> Papers</a:t>
-            </a:r>
-            <a:endParaRPr lang="de-DE" sz="1100" dirty="0">
               <a:latin typeface="Arial" panose="020B0604020202020204" pitchFamily="34" charset="0"/>
               <a:cs typeface="Arial" panose="020B0604020202020204" pitchFamily="34" charset="0"/>
             </a:endParaRPr>

--- a/plots_png/pptx/plots_png.pptx
+++ b/plots_png/pptx/plots_png.pptx
@@ -2,13 +2,14 @@
 <file path=ppt/presentation.xml><?xml version="1.0" encoding="utf-8"?>
 <p:presentation xmlns:a="http://schemas.openxmlformats.org/drawingml/2006/main" xmlns:r="http://schemas.openxmlformats.org/officeDocument/2006/relationships" xmlns:p="http://schemas.openxmlformats.org/presentationml/2006/main" saveSubsetFonts="1">
   <p:sldMasterIdLst>
-    <p:sldMasterId id="2147483660" r:id="rId1"/>
+    <p:sldMasterId id="2147483672" r:id="rId1"/>
   </p:sldMasterIdLst>
   <p:sldIdLst>
     <p:sldId id="260" r:id="rId2"/>
     <p:sldId id="256" r:id="rId3"/>
+    <p:sldId id="261" r:id="rId4"/>
   </p:sldIdLst>
-  <p:sldSz cx="6858000" cy="12192000"/>
+  <p:sldSz cx="8047038" cy="12192000"/>
   <p:notesSz cx="6858000" cy="9144000"/>
   <p:defaultTextStyle>
     <a:defPPr>
@@ -107,7 +108,18 @@
   </p:defaultTextStyle>
   <p:extLst>
     <p:ext uri="{EFAFB233-063F-42B5-8137-9DF3F51BA10A}">
-      <p15:sldGuideLst xmlns:p15="http://schemas.microsoft.com/office/powerpoint/2012/main"/>
+      <p15:sldGuideLst xmlns:p15="http://schemas.microsoft.com/office/powerpoint/2012/main">
+        <p15:guide id="1" orient="horz" pos="3840" userDrawn="1">
+          <p15:clr>
+            <a:srgbClr val="A4A3A4"/>
+          </p15:clr>
+        </p15:guide>
+        <p15:guide id="2" pos="2534" userDrawn="1">
+          <p15:clr>
+            <a:srgbClr val="A4A3A4"/>
+          </p15:clr>
+        </p15:guide>
+      </p15:sldGuideLst>
     </p:ext>
   </p:extLst>
 </p:presentation>
@@ -142,15 +154,15 @@
         </p:nvSpPr>
         <p:spPr>
           <a:xfrm>
-            <a:off x="514350" y="1995312"/>
-            <a:ext cx="5829300" cy="4244622"/>
+            <a:off x="603528" y="1995312"/>
+            <a:ext cx="6839982" cy="4244622"/>
           </a:xfrm>
         </p:spPr>
         <p:txBody>
           <a:bodyPr anchor="b"/>
           <a:lstStyle>
             <a:lvl1pPr algn="ctr">
-              <a:defRPr sz="4500"/>
+              <a:defRPr sz="5280"/>
             </a:lvl1pPr>
           </a:lstStyle>
           <a:p>
@@ -174,8 +186,8 @@
         </p:nvSpPr>
         <p:spPr>
           <a:xfrm>
-            <a:off x="857250" y="6403623"/>
-            <a:ext cx="5143500" cy="2943577"/>
+            <a:off x="1005881" y="6403625"/>
+            <a:ext cx="6035279" cy="2943577"/>
           </a:xfrm>
         </p:spPr>
         <p:txBody>
@@ -183,39 +195,39 @@
           <a:lstStyle>
             <a:lvl1pPr marL="0" indent="0" algn="ctr">
               <a:buNone/>
-              <a:defRPr sz="1800"/>
+              <a:defRPr sz="2112"/>
             </a:lvl1pPr>
-            <a:lvl2pPr marL="342900" indent="0" algn="ctr">
+            <a:lvl2pPr marL="402360" indent="0" algn="ctr">
               <a:buNone/>
-              <a:defRPr sz="1500"/>
+              <a:defRPr sz="1760"/>
             </a:lvl2pPr>
-            <a:lvl3pPr marL="685800" indent="0" algn="ctr">
+            <a:lvl3pPr marL="804720" indent="0" algn="ctr">
               <a:buNone/>
-              <a:defRPr sz="1350"/>
+              <a:defRPr sz="1584"/>
             </a:lvl3pPr>
-            <a:lvl4pPr marL="1028700" indent="0" algn="ctr">
+            <a:lvl4pPr marL="1207080" indent="0" algn="ctr">
               <a:buNone/>
-              <a:defRPr sz="1200"/>
+              <a:defRPr sz="1408"/>
             </a:lvl4pPr>
-            <a:lvl5pPr marL="1371600" indent="0" algn="ctr">
+            <a:lvl5pPr marL="1609440" indent="0" algn="ctr">
               <a:buNone/>
-              <a:defRPr sz="1200"/>
+              <a:defRPr sz="1408"/>
             </a:lvl5pPr>
-            <a:lvl6pPr marL="1714500" indent="0" algn="ctr">
+            <a:lvl6pPr marL="2011800" indent="0" algn="ctr">
               <a:buNone/>
-              <a:defRPr sz="1200"/>
+              <a:defRPr sz="1408"/>
             </a:lvl6pPr>
-            <a:lvl7pPr marL="2057400" indent="0" algn="ctr">
+            <a:lvl7pPr marL="2414160" indent="0" algn="ctr">
               <a:buNone/>
-              <a:defRPr sz="1200"/>
+              <a:defRPr sz="1408"/>
             </a:lvl7pPr>
-            <a:lvl8pPr marL="2400300" indent="0" algn="ctr">
+            <a:lvl8pPr marL="2816519" indent="0" algn="ctr">
               <a:buNone/>
-              <a:defRPr sz="1200"/>
+              <a:defRPr sz="1408"/>
             </a:lvl8pPr>
-            <a:lvl9pPr marL="2743200" indent="0" algn="ctr">
+            <a:lvl9pPr marL="3218879" indent="0" algn="ctr">
               <a:buNone/>
-              <a:defRPr sz="1200"/>
+              <a:defRPr sz="1408"/>
             </a:lvl9pPr>
           </a:lstStyle>
           <a:p>
@@ -244,7 +256,7 @@
           <a:p>
             <a:fld id="{83D14EEA-DE26-4810-8E05-A65F0010FADE}" type="datetimeFigureOut">
               <a:rPr lang="de-DE" smtClean="0"/>
-              <a:t>22.10.2025</a:t>
+              <a:t>23.10.2025</a:t>
             </a:fld>
             <a:endParaRPr lang="de-DE"/>
           </a:p>
@@ -295,7 +307,7 @@
     </p:spTree>
     <p:extLst>
       <p:ext uri="{BB962C8B-B14F-4D97-AF65-F5344CB8AC3E}">
-        <p14:creationId xmlns:p14="http://schemas.microsoft.com/office/powerpoint/2010/main" val="3703697225"/>
+        <p14:creationId xmlns:p14="http://schemas.microsoft.com/office/powerpoint/2010/main" val="35493441"/>
       </p:ext>
     </p:extLst>
   </p:cSld>
@@ -414,7 +426,7 @@
           <a:p>
             <a:fld id="{83D14EEA-DE26-4810-8E05-A65F0010FADE}" type="datetimeFigureOut">
               <a:rPr lang="de-DE" smtClean="0"/>
-              <a:t>22.10.2025</a:t>
+              <a:t>23.10.2025</a:t>
             </a:fld>
             <a:endParaRPr lang="de-DE"/>
           </a:p>
@@ -465,7 +477,7 @@
     </p:spTree>
     <p:extLst>
       <p:ext uri="{BB962C8B-B14F-4D97-AF65-F5344CB8AC3E}">
-        <p14:creationId xmlns:p14="http://schemas.microsoft.com/office/powerpoint/2010/main" val="3316822775"/>
+        <p14:creationId xmlns:p14="http://schemas.microsoft.com/office/powerpoint/2010/main" val="4096226600"/>
       </p:ext>
     </p:extLst>
   </p:cSld>
@@ -504,8 +516,8 @@
         </p:nvSpPr>
         <p:spPr>
           <a:xfrm>
-            <a:off x="4907757" y="649111"/>
-            <a:ext cx="1478756" cy="10332156"/>
+            <a:off x="5758663" y="649111"/>
+            <a:ext cx="1735143" cy="10332156"/>
           </a:xfrm>
         </p:spPr>
         <p:txBody>
@@ -532,8 +544,8 @@
         </p:nvSpPr>
         <p:spPr>
           <a:xfrm>
-            <a:off x="471488" y="649111"/>
-            <a:ext cx="4350544" cy="10332156"/>
+            <a:off x="553234" y="649111"/>
+            <a:ext cx="5104840" cy="10332156"/>
           </a:xfrm>
         </p:spPr>
         <p:txBody>
@@ -594,7 +606,7 @@
           <a:p>
             <a:fld id="{83D14EEA-DE26-4810-8E05-A65F0010FADE}" type="datetimeFigureOut">
               <a:rPr lang="de-DE" smtClean="0"/>
-              <a:t>22.10.2025</a:t>
+              <a:t>23.10.2025</a:t>
             </a:fld>
             <a:endParaRPr lang="de-DE"/>
           </a:p>
@@ -645,7 +657,7 @@
     </p:spTree>
     <p:extLst>
       <p:ext uri="{BB962C8B-B14F-4D97-AF65-F5344CB8AC3E}">
-        <p14:creationId xmlns:p14="http://schemas.microsoft.com/office/powerpoint/2010/main" val="2297925626"/>
+        <p14:creationId xmlns:p14="http://schemas.microsoft.com/office/powerpoint/2010/main" val="4058646796"/>
       </p:ext>
     </p:extLst>
   </p:cSld>
@@ -764,7 +776,7 @@
           <a:p>
             <a:fld id="{83D14EEA-DE26-4810-8E05-A65F0010FADE}" type="datetimeFigureOut">
               <a:rPr lang="de-DE" smtClean="0"/>
-              <a:t>22.10.2025</a:t>
+              <a:t>23.10.2025</a:t>
             </a:fld>
             <a:endParaRPr lang="de-DE"/>
           </a:p>
@@ -815,7 +827,7 @@
     </p:spTree>
     <p:extLst>
       <p:ext uri="{BB962C8B-B14F-4D97-AF65-F5344CB8AC3E}">
-        <p14:creationId xmlns:p14="http://schemas.microsoft.com/office/powerpoint/2010/main" val="785892562"/>
+        <p14:creationId xmlns:p14="http://schemas.microsoft.com/office/powerpoint/2010/main" val="3202912804"/>
       </p:ext>
     </p:extLst>
   </p:cSld>
@@ -854,15 +866,15 @@
         </p:nvSpPr>
         <p:spPr>
           <a:xfrm>
-            <a:off x="467916" y="3039537"/>
-            <a:ext cx="5915025" cy="5071532"/>
+            <a:off x="549043" y="3039537"/>
+            <a:ext cx="6940570" cy="5071532"/>
           </a:xfrm>
         </p:spPr>
         <p:txBody>
           <a:bodyPr anchor="b"/>
           <a:lstStyle>
             <a:lvl1pPr>
-              <a:defRPr sz="4500"/>
+              <a:defRPr sz="5280"/>
             </a:lvl1pPr>
           </a:lstStyle>
           <a:p>
@@ -886,8 +898,8 @@
         </p:nvSpPr>
         <p:spPr>
           <a:xfrm>
-            <a:off x="467916" y="8159048"/>
-            <a:ext cx="5915025" cy="2666999"/>
+            <a:off x="549043" y="8159050"/>
+            <a:ext cx="6940570" cy="2666999"/>
           </a:xfrm>
         </p:spPr>
         <p:txBody>
@@ -895,15 +907,15 @@
           <a:lstStyle>
             <a:lvl1pPr marL="0" indent="0">
               <a:buNone/>
-              <a:defRPr sz="1800">
+              <a:defRPr sz="2112">
                 <a:solidFill>
                   <a:schemeClr val="tx1"/>
                 </a:solidFill>
               </a:defRPr>
             </a:lvl1pPr>
-            <a:lvl2pPr marL="342900" indent="0">
+            <a:lvl2pPr marL="402360" indent="0">
               <a:buNone/>
-              <a:defRPr sz="1500">
+              <a:defRPr sz="1760">
                 <a:solidFill>
                   <a:schemeClr val="tx1">
                     <a:tint val="75000"/>
@@ -911,9 +923,9 @@
                 </a:solidFill>
               </a:defRPr>
             </a:lvl2pPr>
-            <a:lvl3pPr marL="685800" indent="0">
+            <a:lvl3pPr marL="804720" indent="0">
               <a:buNone/>
-              <a:defRPr sz="1350">
+              <a:defRPr sz="1584">
                 <a:solidFill>
                   <a:schemeClr val="tx1">
                     <a:tint val="75000"/>
@@ -921,9 +933,9 @@
                 </a:solidFill>
               </a:defRPr>
             </a:lvl3pPr>
-            <a:lvl4pPr marL="1028700" indent="0">
+            <a:lvl4pPr marL="1207080" indent="0">
               <a:buNone/>
-              <a:defRPr sz="1200">
+              <a:defRPr sz="1408">
                 <a:solidFill>
                   <a:schemeClr val="tx1">
                     <a:tint val="75000"/>
@@ -931,9 +943,9 @@
                 </a:solidFill>
               </a:defRPr>
             </a:lvl4pPr>
-            <a:lvl5pPr marL="1371600" indent="0">
+            <a:lvl5pPr marL="1609440" indent="0">
               <a:buNone/>
-              <a:defRPr sz="1200">
+              <a:defRPr sz="1408">
                 <a:solidFill>
                   <a:schemeClr val="tx1">
                     <a:tint val="75000"/>
@@ -941,9 +953,9 @@
                 </a:solidFill>
               </a:defRPr>
             </a:lvl5pPr>
-            <a:lvl6pPr marL="1714500" indent="0">
+            <a:lvl6pPr marL="2011800" indent="0">
               <a:buNone/>
-              <a:defRPr sz="1200">
+              <a:defRPr sz="1408">
                 <a:solidFill>
                   <a:schemeClr val="tx1">
                     <a:tint val="75000"/>
@@ -951,9 +963,9 @@
                 </a:solidFill>
               </a:defRPr>
             </a:lvl6pPr>
-            <a:lvl7pPr marL="2057400" indent="0">
+            <a:lvl7pPr marL="2414160" indent="0">
               <a:buNone/>
-              <a:defRPr sz="1200">
+              <a:defRPr sz="1408">
                 <a:solidFill>
                   <a:schemeClr val="tx1">
                     <a:tint val="75000"/>
@@ -961,9 +973,9 @@
                 </a:solidFill>
               </a:defRPr>
             </a:lvl7pPr>
-            <a:lvl8pPr marL="2400300" indent="0">
+            <a:lvl8pPr marL="2816519" indent="0">
               <a:buNone/>
-              <a:defRPr sz="1200">
+              <a:defRPr sz="1408">
                 <a:solidFill>
                   <a:schemeClr val="tx1">
                     <a:tint val="75000"/>
@@ -971,9 +983,9 @@
                 </a:solidFill>
               </a:defRPr>
             </a:lvl8pPr>
-            <a:lvl9pPr marL="2743200" indent="0">
+            <a:lvl9pPr marL="3218879" indent="0">
               <a:buNone/>
-              <a:defRPr sz="1200">
+              <a:defRPr sz="1408">
                 <a:solidFill>
                   <a:schemeClr val="tx1">
                     <a:tint val="75000"/>
@@ -1008,7 +1020,7 @@
           <a:p>
             <a:fld id="{83D14EEA-DE26-4810-8E05-A65F0010FADE}" type="datetimeFigureOut">
               <a:rPr lang="de-DE" smtClean="0"/>
-              <a:t>22.10.2025</a:t>
+              <a:t>23.10.2025</a:t>
             </a:fld>
             <a:endParaRPr lang="de-DE"/>
           </a:p>
@@ -1059,7 +1071,7 @@
     </p:spTree>
     <p:extLst>
       <p:ext uri="{BB962C8B-B14F-4D97-AF65-F5344CB8AC3E}">
-        <p14:creationId xmlns:p14="http://schemas.microsoft.com/office/powerpoint/2010/main" val="1017564766"/>
+        <p14:creationId xmlns:p14="http://schemas.microsoft.com/office/powerpoint/2010/main" val="641222210"/>
       </p:ext>
     </p:extLst>
   </p:cSld>
@@ -1121,8 +1133,8 @@
         </p:nvSpPr>
         <p:spPr>
           <a:xfrm>
-            <a:off x="471488" y="3245556"/>
-            <a:ext cx="2914650" cy="7735712"/>
+            <a:off x="553235" y="3245556"/>
+            <a:ext cx="3419991" cy="7735712"/>
           </a:xfrm>
         </p:spPr>
         <p:txBody>
@@ -1178,8 +1190,8 @@
         </p:nvSpPr>
         <p:spPr>
           <a:xfrm>
-            <a:off x="3471863" y="3245556"/>
-            <a:ext cx="2914650" cy="7735712"/>
+            <a:off x="4073814" y="3245556"/>
+            <a:ext cx="3419991" cy="7735712"/>
           </a:xfrm>
         </p:spPr>
         <p:txBody>
@@ -1240,7 +1252,7 @@
           <a:p>
             <a:fld id="{83D14EEA-DE26-4810-8E05-A65F0010FADE}" type="datetimeFigureOut">
               <a:rPr lang="de-DE" smtClean="0"/>
-              <a:t>22.10.2025</a:t>
+              <a:t>23.10.2025</a:t>
             </a:fld>
             <a:endParaRPr lang="de-DE"/>
           </a:p>
@@ -1291,7 +1303,7 @@
     </p:spTree>
     <p:extLst>
       <p:ext uri="{BB962C8B-B14F-4D97-AF65-F5344CB8AC3E}">
-        <p14:creationId xmlns:p14="http://schemas.microsoft.com/office/powerpoint/2010/main" val="96888430"/>
+        <p14:creationId xmlns:p14="http://schemas.microsoft.com/office/powerpoint/2010/main" val="1304642626"/>
       </p:ext>
     </p:extLst>
   </p:cSld>
@@ -1330,8 +1342,8 @@
         </p:nvSpPr>
         <p:spPr>
           <a:xfrm>
-            <a:off x="472381" y="649114"/>
-            <a:ext cx="5915025" cy="2356556"/>
+            <a:off x="554282" y="649114"/>
+            <a:ext cx="6940570" cy="2356556"/>
           </a:xfrm>
         </p:spPr>
         <p:txBody>
@@ -1358,8 +1370,8 @@
         </p:nvSpPr>
         <p:spPr>
           <a:xfrm>
-            <a:off x="472381" y="2988734"/>
-            <a:ext cx="2901255" cy="1464732"/>
+            <a:off x="554283" y="2988734"/>
+            <a:ext cx="3404274" cy="1464732"/>
           </a:xfrm>
         </p:spPr>
         <p:txBody>
@@ -1367,39 +1379,39 @@
           <a:lstStyle>
             <a:lvl1pPr marL="0" indent="0">
               <a:buNone/>
-              <a:defRPr sz="1800" b="1"/>
+              <a:defRPr sz="2112" b="1"/>
             </a:lvl1pPr>
-            <a:lvl2pPr marL="342900" indent="0">
+            <a:lvl2pPr marL="402360" indent="0">
               <a:buNone/>
-              <a:defRPr sz="1500" b="1"/>
+              <a:defRPr sz="1760" b="1"/>
             </a:lvl2pPr>
-            <a:lvl3pPr marL="685800" indent="0">
+            <a:lvl3pPr marL="804720" indent="0">
               <a:buNone/>
-              <a:defRPr sz="1350" b="1"/>
+              <a:defRPr sz="1584" b="1"/>
             </a:lvl3pPr>
-            <a:lvl4pPr marL="1028700" indent="0">
+            <a:lvl4pPr marL="1207080" indent="0">
               <a:buNone/>
-              <a:defRPr sz="1200" b="1"/>
+              <a:defRPr sz="1408" b="1"/>
             </a:lvl4pPr>
-            <a:lvl5pPr marL="1371600" indent="0">
+            <a:lvl5pPr marL="1609440" indent="0">
               <a:buNone/>
-              <a:defRPr sz="1200" b="1"/>
+              <a:defRPr sz="1408" b="1"/>
             </a:lvl5pPr>
-            <a:lvl6pPr marL="1714500" indent="0">
+            <a:lvl6pPr marL="2011800" indent="0">
               <a:buNone/>
-              <a:defRPr sz="1200" b="1"/>
+              <a:defRPr sz="1408" b="1"/>
             </a:lvl6pPr>
-            <a:lvl7pPr marL="2057400" indent="0">
+            <a:lvl7pPr marL="2414160" indent="0">
               <a:buNone/>
-              <a:defRPr sz="1200" b="1"/>
+              <a:defRPr sz="1408" b="1"/>
             </a:lvl7pPr>
-            <a:lvl8pPr marL="2400300" indent="0">
+            <a:lvl8pPr marL="2816519" indent="0">
               <a:buNone/>
-              <a:defRPr sz="1200" b="1"/>
+              <a:defRPr sz="1408" b="1"/>
             </a:lvl8pPr>
-            <a:lvl9pPr marL="2743200" indent="0">
+            <a:lvl9pPr marL="3218879" indent="0">
               <a:buNone/>
-              <a:defRPr sz="1200" b="1"/>
+              <a:defRPr sz="1408" b="1"/>
             </a:lvl9pPr>
           </a:lstStyle>
           <a:p>
@@ -1423,8 +1435,8 @@
         </p:nvSpPr>
         <p:spPr>
           <a:xfrm>
-            <a:off x="472381" y="4453467"/>
-            <a:ext cx="2901255" cy="6550379"/>
+            <a:off x="554283" y="4453469"/>
+            <a:ext cx="3404274" cy="6550379"/>
           </a:xfrm>
         </p:spPr>
         <p:txBody>
@@ -1480,8 +1492,8 @@
         </p:nvSpPr>
         <p:spPr>
           <a:xfrm>
-            <a:off x="3471863" y="2988734"/>
-            <a:ext cx="2915543" cy="1464732"/>
+            <a:off x="4073815" y="2988734"/>
+            <a:ext cx="3421039" cy="1464732"/>
           </a:xfrm>
         </p:spPr>
         <p:txBody>
@@ -1489,39 +1501,39 @@
           <a:lstStyle>
             <a:lvl1pPr marL="0" indent="0">
               <a:buNone/>
-              <a:defRPr sz="1800" b="1"/>
+              <a:defRPr sz="2112" b="1"/>
             </a:lvl1pPr>
-            <a:lvl2pPr marL="342900" indent="0">
+            <a:lvl2pPr marL="402360" indent="0">
               <a:buNone/>
-              <a:defRPr sz="1500" b="1"/>
+              <a:defRPr sz="1760" b="1"/>
             </a:lvl2pPr>
-            <a:lvl3pPr marL="685800" indent="0">
+            <a:lvl3pPr marL="804720" indent="0">
               <a:buNone/>
-              <a:defRPr sz="1350" b="1"/>
+              <a:defRPr sz="1584" b="1"/>
             </a:lvl3pPr>
-            <a:lvl4pPr marL="1028700" indent="0">
+            <a:lvl4pPr marL="1207080" indent="0">
               <a:buNone/>
-              <a:defRPr sz="1200" b="1"/>
+              <a:defRPr sz="1408" b="1"/>
             </a:lvl4pPr>
-            <a:lvl5pPr marL="1371600" indent="0">
+            <a:lvl5pPr marL="1609440" indent="0">
               <a:buNone/>
-              <a:defRPr sz="1200" b="1"/>
+              <a:defRPr sz="1408" b="1"/>
             </a:lvl5pPr>
-            <a:lvl6pPr marL="1714500" indent="0">
+            <a:lvl6pPr marL="2011800" indent="0">
               <a:buNone/>
-              <a:defRPr sz="1200" b="1"/>
+              <a:defRPr sz="1408" b="1"/>
             </a:lvl6pPr>
-            <a:lvl7pPr marL="2057400" indent="0">
+            <a:lvl7pPr marL="2414160" indent="0">
               <a:buNone/>
-              <a:defRPr sz="1200" b="1"/>
+              <a:defRPr sz="1408" b="1"/>
             </a:lvl7pPr>
-            <a:lvl8pPr marL="2400300" indent="0">
+            <a:lvl8pPr marL="2816519" indent="0">
               <a:buNone/>
-              <a:defRPr sz="1200" b="1"/>
+              <a:defRPr sz="1408" b="1"/>
             </a:lvl8pPr>
-            <a:lvl9pPr marL="2743200" indent="0">
+            <a:lvl9pPr marL="3218879" indent="0">
               <a:buNone/>
-              <a:defRPr sz="1200" b="1"/>
+              <a:defRPr sz="1408" b="1"/>
             </a:lvl9pPr>
           </a:lstStyle>
           <a:p>
@@ -1545,8 +1557,8 @@
         </p:nvSpPr>
         <p:spPr>
           <a:xfrm>
-            <a:off x="3471863" y="4453467"/>
-            <a:ext cx="2915543" cy="6550379"/>
+            <a:off x="4073815" y="4453469"/>
+            <a:ext cx="3421039" cy="6550379"/>
           </a:xfrm>
         </p:spPr>
         <p:txBody>
@@ -1607,7 +1619,7 @@
           <a:p>
             <a:fld id="{83D14EEA-DE26-4810-8E05-A65F0010FADE}" type="datetimeFigureOut">
               <a:rPr lang="de-DE" smtClean="0"/>
-              <a:t>22.10.2025</a:t>
+              <a:t>23.10.2025</a:t>
             </a:fld>
             <a:endParaRPr lang="de-DE"/>
           </a:p>
@@ -1658,7 +1670,7 @@
     </p:spTree>
     <p:extLst>
       <p:ext uri="{BB962C8B-B14F-4D97-AF65-F5344CB8AC3E}">
-        <p14:creationId xmlns:p14="http://schemas.microsoft.com/office/powerpoint/2010/main" val="3828072767"/>
+        <p14:creationId xmlns:p14="http://schemas.microsoft.com/office/powerpoint/2010/main" val="4164898104"/>
       </p:ext>
     </p:extLst>
   </p:cSld>
@@ -1725,7 +1737,7 @@
           <a:p>
             <a:fld id="{83D14EEA-DE26-4810-8E05-A65F0010FADE}" type="datetimeFigureOut">
               <a:rPr lang="de-DE" smtClean="0"/>
-              <a:t>22.10.2025</a:t>
+              <a:t>23.10.2025</a:t>
             </a:fld>
             <a:endParaRPr lang="de-DE"/>
           </a:p>
@@ -1776,7 +1788,7 @@
     </p:spTree>
     <p:extLst>
       <p:ext uri="{BB962C8B-B14F-4D97-AF65-F5344CB8AC3E}">
-        <p14:creationId xmlns:p14="http://schemas.microsoft.com/office/powerpoint/2010/main" val="3114181314"/>
+        <p14:creationId xmlns:p14="http://schemas.microsoft.com/office/powerpoint/2010/main" val="3069738833"/>
       </p:ext>
     </p:extLst>
   </p:cSld>
@@ -1820,7 +1832,7 @@
           <a:p>
             <a:fld id="{83D14EEA-DE26-4810-8E05-A65F0010FADE}" type="datetimeFigureOut">
               <a:rPr lang="de-DE" smtClean="0"/>
-              <a:t>22.10.2025</a:t>
+              <a:t>23.10.2025</a:t>
             </a:fld>
             <a:endParaRPr lang="de-DE"/>
           </a:p>
@@ -1871,7 +1883,7 @@
     </p:spTree>
     <p:extLst>
       <p:ext uri="{BB962C8B-B14F-4D97-AF65-F5344CB8AC3E}">
-        <p14:creationId xmlns:p14="http://schemas.microsoft.com/office/powerpoint/2010/main" val="2232556460"/>
+        <p14:creationId xmlns:p14="http://schemas.microsoft.com/office/powerpoint/2010/main" val="1351086057"/>
       </p:ext>
     </p:extLst>
   </p:cSld>
@@ -1910,15 +1922,15 @@
         </p:nvSpPr>
         <p:spPr>
           <a:xfrm>
-            <a:off x="472381" y="812800"/>
-            <a:ext cx="2211884" cy="2844800"/>
+            <a:off x="554283" y="812800"/>
+            <a:ext cx="2595379" cy="2844800"/>
           </a:xfrm>
         </p:spPr>
         <p:txBody>
           <a:bodyPr anchor="b"/>
           <a:lstStyle>
             <a:lvl1pPr>
-              <a:defRPr sz="2400"/>
+              <a:defRPr sz="2816"/>
             </a:lvl1pPr>
           </a:lstStyle>
           <a:p>
@@ -1942,39 +1954,39 @@
         </p:nvSpPr>
         <p:spPr>
           <a:xfrm>
-            <a:off x="2915543" y="1755425"/>
-            <a:ext cx="3471863" cy="8664222"/>
+            <a:off x="3421040" y="1755425"/>
+            <a:ext cx="4073813" cy="8664222"/>
           </a:xfrm>
         </p:spPr>
         <p:txBody>
           <a:bodyPr/>
           <a:lstStyle>
             <a:lvl1pPr>
-              <a:defRPr sz="2400"/>
+              <a:defRPr sz="2816"/>
             </a:lvl1pPr>
             <a:lvl2pPr>
-              <a:defRPr sz="2100"/>
+              <a:defRPr sz="2464"/>
             </a:lvl2pPr>
             <a:lvl3pPr>
-              <a:defRPr sz="1800"/>
+              <a:defRPr sz="2112"/>
             </a:lvl3pPr>
             <a:lvl4pPr>
-              <a:defRPr sz="1500"/>
+              <a:defRPr sz="1760"/>
             </a:lvl4pPr>
             <a:lvl5pPr>
-              <a:defRPr sz="1500"/>
+              <a:defRPr sz="1760"/>
             </a:lvl5pPr>
             <a:lvl6pPr>
-              <a:defRPr sz="1500"/>
+              <a:defRPr sz="1760"/>
             </a:lvl6pPr>
             <a:lvl7pPr>
-              <a:defRPr sz="1500"/>
+              <a:defRPr sz="1760"/>
             </a:lvl7pPr>
             <a:lvl8pPr>
-              <a:defRPr sz="1500"/>
+              <a:defRPr sz="1760"/>
             </a:lvl8pPr>
             <a:lvl9pPr>
-              <a:defRPr sz="1500"/>
+              <a:defRPr sz="1760"/>
             </a:lvl9pPr>
           </a:lstStyle>
           <a:p>
@@ -2027,8 +2039,8 @@
         </p:nvSpPr>
         <p:spPr>
           <a:xfrm>
-            <a:off x="472381" y="3657600"/>
-            <a:ext cx="2211884" cy="6776156"/>
+            <a:off x="554283" y="3657600"/>
+            <a:ext cx="2595379" cy="6776156"/>
           </a:xfrm>
         </p:spPr>
         <p:txBody>
@@ -2036,39 +2048,39 @@
           <a:lstStyle>
             <a:lvl1pPr marL="0" indent="0">
               <a:buNone/>
-              <a:defRPr sz="1200"/>
+              <a:defRPr sz="1408"/>
             </a:lvl1pPr>
-            <a:lvl2pPr marL="342900" indent="0">
+            <a:lvl2pPr marL="402360" indent="0">
               <a:buNone/>
-              <a:defRPr sz="1050"/>
+              <a:defRPr sz="1232"/>
             </a:lvl2pPr>
-            <a:lvl3pPr marL="685800" indent="0">
+            <a:lvl3pPr marL="804720" indent="0">
               <a:buNone/>
-              <a:defRPr sz="900"/>
+              <a:defRPr sz="1056"/>
             </a:lvl3pPr>
-            <a:lvl4pPr marL="1028700" indent="0">
+            <a:lvl4pPr marL="1207080" indent="0">
               <a:buNone/>
-              <a:defRPr sz="750"/>
+              <a:defRPr sz="880"/>
             </a:lvl4pPr>
-            <a:lvl5pPr marL="1371600" indent="0">
+            <a:lvl5pPr marL="1609440" indent="0">
               <a:buNone/>
-              <a:defRPr sz="750"/>
+              <a:defRPr sz="880"/>
             </a:lvl5pPr>
-            <a:lvl6pPr marL="1714500" indent="0">
+            <a:lvl6pPr marL="2011800" indent="0">
               <a:buNone/>
-              <a:defRPr sz="750"/>
+              <a:defRPr sz="880"/>
             </a:lvl6pPr>
-            <a:lvl7pPr marL="2057400" indent="0">
+            <a:lvl7pPr marL="2414160" indent="0">
               <a:buNone/>
-              <a:defRPr sz="750"/>
+              <a:defRPr sz="880"/>
             </a:lvl7pPr>
-            <a:lvl8pPr marL="2400300" indent="0">
+            <a:lvl8pPr marL="2816519" indent="0">
               <a:buNone/>
-              <a:defRPr sz="750"/>
+              <a:defRPr sz="880"/>
             </a:lvl8pPr>
-            <a:lvl9pPr marL="2743200" indent="0">
+            <a:lvl9pPr marL="3218879" indent="0">
               <a:buNone/>
-              <a:defRPr sz="750"/>
+              <a:defRPr sz="880"/>
             </a:lvl9pPr>
           </a:lstStyle>
           <a:p>
@@ -2097,7 +2109,7 @@
           <a:p>
             <a:fld id="{83D14EEA-DE26-4810-8E05-A65F0010FADE}" type="datetimeFigureOut">
               <a:rPr lang="de-DE" smtClean="0"/>
-              <a:t>22.10.2025</a:t>
+              <a:t>23.10.2025</a:t>
             </a:fld>
             <a:endParaRPr lang="de-DE"/>
           </a:p>
@@ -2148,7 +2160,7 @@
     </p:spTree>
     <p:extLst>
       <p:ext uri="{BB962C8B-B14F-4D97-AF65-F5344CB8AC3E}">
-        <p14:creationId xmlns:p14="http://schemas.microsoft.com/office/powerpoint/2010/main" val="3826129784"/>
+        <p14:creationId xmlns:p14="http://schemas.microsoft.com/office/powerpoint/2010/main" val="4218502842"/>
       </p:ext>
     </p:extLst>
   </p:cSld>
@@ -2187,15 +2199,15 @@
         </p:nvSpPr>
         <p:spPr>
           <a:xfrm>
-            <a:off x="472381" y="812800"/>
-            <a:ext cx="2211884" cy="2844800"/>
+            <a:off x="554283" y="812800"/>
+            <a:ext cx="2595379" cy="2844800"/>
           </a:xfrm>
         </p:spPr>
         <p:txBody>
           <a:bodyPr anchor="b"/>
           <a:lstStyle>
             <a:lvl1pPr>
-              <a:defRPr sz="2400"/>
+              <a:defRPr sz="2816"/>
             </a:lvl1pPr>
           </a:lstStyle>
           <a:p>
@@ -2219,8 +2231,8 @@
         </p:nvSpPr>
         <p:spPr>
           <a:xfrm>
-            <a:off x="2915543" y="1755425"/>
-            <a:ext cx="3471863" cy="8664222"/>
+            <a:off x="3421040" y="1755425"/>
+            <a:ext cx="4073813" cy="8664222"/>
           </a:xfrm>
         </p:spPr>
         <p:txBody>
@@ -2228,39 +2240,39 @@
           <a:lstStyle>
             <a:lvl1pPr marL="0" indent="0">
               <a:buNone/>
-              <a:defRPr sz="2400"/>
+              <a:defRPr sz="2816"/>
             </a:lvl1pPr>
-            <a:lvl2pPr marL="342900" indent="0">
+            <a:lvl2pPr marL="402360" indent="0">
               <a:buNone/>
-              <a:defRPr sz="2100"/>
+              <a:defRPr sz="2464"/>
             </a:lvl2pPr>
-            <a:lvl3pPr marL="685800" indent="0">
+            <a:lvl3pPr marL="804720" indent="0">
               <a:buNone/>
-              <a:defRPr sz="1800"/>
+              <a:defRPr sz="2112"/>
             </a:lvl3pPr>
-            <a:lvl4pPr marL="1028700" indent="0">
+            <a:lvl4pPr marL="1207080" indent="0">
               <a:buNone/>
-              <a:defRPr sz="1500"/>
+              <a:defRPr sz="1760"/>
             </a:lvl4pPr>
-            <a:lvl5pPr marL="1371600" indent="0">
+            <a:lvl5pPr marL="1609440" indent="0">
               <a:buNone/>
-              <a:defRPr sz="1500"/>
+              <a:defRPr sz="1760"/>
             </a:lvl5pPr>
-            <a:lvl6pPr marL="1714500" indent="0">
+            <a:lvl6pPr marL="2011800" indent="0">
               <a:buNone/>
-              <a:defRPr sz="1500"/>
+              <a:defRPr sz="1760"/>
             </a:lvl6pPr>
-            <a:lvl7pPr marL="2057400" indent="0">
+            <a:lvl7pPr marL="2414160" indent="0">
               <a:buNone/>
-              <a:defRPr sz="1500"/>
+              <a:defRPr sz="1760"/>
             </a:lvl7pPr>
-            <a:lvl8pPr marL="2400300" indent="0">
+            <a:lvl8pPr marL="2816519" indent="0">
               <a:buNone/>
-              <a:defRPr sz="1500"/>
+              <a:defRPr sz="1760"/>
             </a:lvl8pPr>
-            <a:lvl9pPr marL="2743200" indent="0">
+            <a:lvl9pPr marL="3218879" indent="0">
               <a:buNone/>
-              <a:defRPr sz="1500"/>
+              <a:defRPr sz="1760"/>
             </a:lvl9pPr>
           </a:lstStyle>
           <a:p>
@@ -2284,8 +2296,8 @@
         </p:nvSpPr>
         <p:spPr>
           <a:xfrm>
-            <a:off x="472381" y="3657600"/>
-            <a:ext cx="2211884" cy="6776156"/>
+            <a:off x="554283" y="3657600"/>
+            <a:ext cx="2595379" cy="6776156"/>
           </a:xfrm>
         </p:spPr>
         <p:txBody>
@@ -2293,39 +2305,39 @@
           <a:lstStyle>
             <a:lvl1pPr marL="0" indent="0">
               <a:buNone/>
-              <a:defRPr sz="1200"/>
+              <a:defRPr sz="1408"/>
             </a:lvl1pPr>
-            <a:lvl2pPr marL="342900" indent="0">
+            <a:lvl2pPr marL="402360" indent="0">
               <a:buNone/>
-              <a:defRPr sz="1050"/>
+              <a:defRPr sz="1232"/>
             </a:lvl2pPr>
-            <a:lvl3pPr marL="685800" indent="0">
+            <a:lvl3pPr marL="804720" indent="0">
               <a:buNone/>
-              <a:defRPr sz="900"/>
+              <a:defRPr sz="1056"/>
             </a:lvl3pPr>
-            <a:lvl4pPr marL="1028700" indent="0">
+            <a:lvl4pPr marL="1207080" indent="0">
               <a:buNone/>
-              <a:defRPr sz="750"/>
+              <a:defRPr sz="880"/>
             </a:lvl4pPr>
-            <a:lvl5pPr marL="1371600" indent="0">
+            <a:lvl5pPr marL="1609440" indent="0">
               <a:buNone/>
-              <a:defRPr sz="750"/>
+              <a:defRPr sz="880"/>
             </a:lvl5pPr>
-            <a:lvl6pPr marL="1714500" indent="0">
+            <a:lvl6pPr marL="2011800" indent="0">
               <a:buNone/>
-              <a:defRPr sz="750"/>
+              <a:defRPr sz="880"/>
             </a:lvl6pPr>
-            <a:lvl7pPr marL="2057400" indent="0">
+            <a:lvl7pPr marL="2414160" indent="0">
               <a:buNone/>
-              <a:defRPr sz="750"/>
+              <a:defRPr sz="880"/>
             </a:lvl7pPr>
-            <a:lvl8pPr marL="2400300" indent="0">
+            <a:lvl8pPr marL="2816519" indent="0">
               <a:buNone/>
-              <a:defRPr sz="750"/>
+              <a:defRPr sz="880"/>
             </a:lvl8pPr>
-            <a:lvl9pPr marL="2743200" indent="0">
+            <a:lvl9pPr marL="3218879" indent="0">
               <a:buNone/>
-              <a:defRPr sz="750"/>
+              <a:defRPr sz="880"/>
             </a:lvl9pPr>
           </a:lstStyle>
           <a:p>
@@ -2354,7 +2366,7 @@
           <a:p>
             <a:fld id="{83D14EEA-DE26-4810-8E05-A65F0010FADE}" type="datetimeFigureOut">
               <a:rPr lang="de-DE" smtClean="0"/>
-              <a:t>22.10.2025</a:t>
+              <a:t>23.10.2025</a:t>
             </a:fld>
             <a:endParaRPr lang="de-DE"/>
           </a:p>
@@ -2405,7 +2417,7 @@
     </p:spTree>
     <p:extLst>
       <p:ext uri="{BB962C8B-B14F-4D97-AF65-F5344CB8AC3E}">
-        <p14:creationId xmlns:p14="http://schemas.microsoft.com/office/powerpoint/2010/main" val="1732109770"/>
+        <p14:creationId xmlns:p14="http://schemas.microsoft.com/office/powerpoint/2010/main" val="1584432041"/>
       </p:ext>
     </p:extLst>
   </p:cSld>
@@ -2449,8 +2461,8 @@
         </p:nvSpPr>
         <p:spPr>
           <a:xfrm>
-            <a:off x="471488" y="649114"/>
-            <a:ext cx="5915025" cy="2356556"/>
+            <a:off x="553234" y="649114"/>
+            <a:ext cx="6940570" cy="2356556"/>
           </a:xfrm>
           <a:prstGeom prst="rect">
             <a:avLst/>
@@ -2482,8 +2494,8 @@
         </p:nvSpPr>
         <p:spPr>
           <a:xfrm>
-            <a:off x="471488" y="3245556"/>
-            <a:ext cx="5915025" cy="7735712"/>
+            <a:off x="553234" y="3245556"/>
+            <a:ext cx="6940570" cy="7735712"/>
           </a:xfrm>
           <a:prstGeom prst="rect">
             <a:avLst/>
@@ -2544,8 +2556,8 @@
         </p:nvSpPr>
         <p:spPr>
           <a:xfrm>
-            <a:off x="471488" y="11300181"/>
-            <a:ext cx="1543050" cy="649111"/>
+            <a:off x="553234" y="11300183"/>
+            <a:ext cx="1810584" cy="649111"/>
           </a:xfrm>
           <a:prstGeom prst="rect">
             <a:avLst/>
@@ -2555,7 +2567,7 @@
           <a:bodyPr vert="horz" lIns="91440" tIns="45720" rIns="91440" bIns="45720" rtlCol="0" anchor="ctr"/>
           <a:lstStyle>
             <a:lvl1pPr algn="l">
-              <a:defRPr sz="900">
+              <a:defRPr sz="1056">
                 <a:solidFill>
                   <a:schemeClr val="tx1">
                     <a:tint val="75000"/>
@@ -2567,7 +2579,7 @@
           <a:p>
             <a:fld id="{83D14EEA-DE26-4810-8E05-A65F0010FADE}" type="datetimeFigureOut">
               <a:rPr lang="de-DE" smtClean="0"/>
-              <a:t>22.10.2025</a:t>
+              <a:t>23.10.2025</a:t>
             </a:fld>
             <a:endParaRPr lang="de-DE"/>
           </a:p>
@@ -2585,8 +2597,8 @@
         </p:nvSpPr>
         <p:spPr>
           <a:xfrm>
-            <a:off x="2271713" y="11300181"/>
-            <a:ext cx="2314575" cy="649111"/>
+            <a:off x="2665583" y="11300183"/>
+            <a:ext cx="2715875" cy="649111"/>
           </a:xfrm>
           <a:prstGeom prst="rect">
             <a:avLst/>
@@ -2596,7 +2608,7 @@
           <a:bodyPr vert="horz" lIns="91440" tIns="45720" rIns="91440" bIns="45720" rtlCol="0" anchor="ctr"/>
           <a:lstStyle>
             <a:lvl1pPr algn="ctr">
-              <a:defRPr sz="900">
+              <a:defRPr sz="1056">
                 <a:solidFill>
                   <a:schemeClr val="tx1">
                     <a:tint val="75000"/>
@@ -2622,8 +2634,8 @@
         </p:nvSpPr>
         <p:spPr>
           <a:xfrm>
-            <a:off x="4843463" y="11300181"/>
-            <a:ext cx="1543050" cy="649111"/>
+            <a:off x="5683220" y="11300183"/>
+            <a:ext cx="1810584" cy="649111"/>
           </a:xfrm>
           <a:prstGeom prst="rect">
             <a:avLst/>
@@ -2633,7 +2645,7 @@
           <a:bodyPr vert="horz" lIns="91440" tIns="45720" rIns="91440" bIns="45720" rtlCol="0" anchor="ctr"/>
           <a:lstStyle>
             <a:lvl1pPr algn="r">
-              <a:defRPr sz="900">
+              <a:defRPr sz="1056">
                 <a:solidFill>
                   <a:schemeClr val="tx1">
                     <a:tint val="75000"/>
@@ -2654,27 +2666,27 @@
     </p:spTree>
     <p:extLst>
       <p:ext uri="{BB962C8B-B14F-4D97-AF65-F5344CB8AC3E}">
-        <p14:creationId xmlns:p14="http://schemas.microsoft.com/office/powerpoint/2010/main" val="3339960699"/>
+        <p14:creationId xmlns:p14="http://schemas.microsoft.com/office/powerpoint/2010/main" val="788964536"/>
       </p:ext>
     </p:extLst>
   </p:cSld>
   <p:clrMap bg1="lt1" tx1="dk1" bg2="lt2" tx2="dk2" accent1="accent1" accent2="accent2" accent3="accent3" accent4="accent4" accent5="accent5" accent6="accent6" hlink="hlink" folHlink="folHlink"/>
   <p:sldLayoutIdLst>
-    <p:sldLayoutId id="2147483661" r:id="rId1"/>
-    <p:sldLayoutId id="2147483662" r:id="rId2"/>
-    <p:sldLayoutId id="2147483663" r:id="rId3"/>
-    <p:sldLayoutId id="2147483664" r:id="rId4"/>
-    <p:sldLayoutId id="2147483665" r:id="rId5"/>
-    <p:sldLayoutId id="2147483666" r:id="rId6"/>
-    <p:sldLayoutId id="2147483667" r:id="rId7"/>
-    <p:sldLayoutId id="2147483668" r:id="rId8"/>
-    <p:sldLayoutId id="2147483669" r:id="rId9"/>
-    <p:sldLayoutId id="2147483670" r:id="rId10"/>
-    <p:sldLayoutId id="2147483671" r:id="rId11"/>
+    <p:sldLayoutId id="2147483673" r:id="rId1"/>
+    <p:sldLayoutId id="2147483674" r:id="rId2"/>
+    <p:sldLayoutId id="2147483675" r:id="rId3"/>
+    <p:sldLayoutId id="2147483676" r:id="rId4"/>
+    <p:sldLayoutId id="2147483677" r:id="rId5"/>
+    <p:sldLayoutId id="2147483678" r:id="rId6"/>
+    <p:sldLayoutId id="2147483679" r:id="rId7"/>
+    <p:sldLayoutId id="2147483680" r:id="rId8"/>
+    <p:sldLayoutId id="2147483681" r:id="rId9"/>
+    <p:sldLayoutId id="2147483682" r:id="rId10"/>
+    <p:sldLayoutId id="2147483683" r:id="rId11"/>
   </p:sldLayoutIdLst>
   <p:txStyles>
     <p:titleStyle>
-      <a:lvl1pPr algn="l" defTabSz="685800" rtl="0" eaLnBrk="1" latinLnBrk="0" hangingPunct="1">
+      <a:lvl1pPr algn="l" defTabSz="804720" rtl="0" eaLnBrk="1" latinLnBrk="0" hangingPunct="1">
         <a:lnSpc>
           <a:spcPct val="90000"/>
         </a:lnSpc>
@@ -2682,7 +2694,7 @@
           <a:spcPct val="0"/>
         </a:spcBef>
         <a:buNone/>
-        <a:defRPr sz="3300" kern="1200">
+        <a:defRPr sz="3872" kern="1200">
           <a:solidFill>
             <a:schemeClr val="tx1"/>
           </a:solidFill>
@@ -2693,16 +2705,16 @@
       </a:lvl1pPr>
     </p:titleStyle>
     <p:bodyStyle>
-      <a:lvl1pPr marL="171450" indent="-171450" algn="l" defTabSz="685800" rtl="0" eaLnBrk="1" latinLnBrk="0" hangingPunct="1">
+      <a:lvl1pPr marL="201180" indent="-201180" algn="l" defTabSz="804720" rtl="0" eaLnBrk="1" latinLnBrk="0" hangingPunct="1">
         <a:lnSpc>
           <a:spcPct val="90000"/>
         </a:lnSpc>
         <a:spcBef>
-          <a:spcPts val="750"/>
+          <a:spcPts val="880"/>
         </a:spcBef>
         <a:buFont typeface="Arial" panose="020B0604020202020204" pitchFamily="34" charset="0"/>
         <a:buChar char="•"/>
-        <a:defRPr sz="2100" kern="1200">
+        <a:defRPr sz="2464" kern="1200">
           <a:solidFill>
             <a:schemeClr val="tx1"/>
           </a:solidFill>
@@ -2711,16 +2723,16 @@
           <a:cs typeface="+mn-cs"/>
         </a:defRPr>
       </a:lvl1pPr>
-      <a:lvl2pPr marL="514350" indent="-171450" algn="l" defTabSz="685800" rtl="0" eaLnBrk="1" latinLnBrk="0" hangingPunct="1">
+      <a:lvl2pPr marL="603540" indent="-201180" algn="l" defTabSz="804720" rtl="0" eaLnBrk="1" latinLnBrk="0" hangingPunct="1">
         <a:lnSpc>
           <a:spcPct val="90000"/>
         </a:lnSpc>
         <a:spcBef>
-          <a:spcPts val="375"/>
+          <a:spcPts val="440"/>
         </a:spcBef>
         <a:buFont typeface="Arial" panose="020B0604020202020204" pitchFamily="34" charset="0"/>
         <a:buChar char="•"/>
-        <a:defRPr sz="1800" kern="1200">
+        <a:defRPr sz="2112" kern="1200">
           <a:solidFill>
             <a:schemeClr val="tx1"/>
           </a:solidFill>
@@ -2729,16 +2741,16 @@
           <a:cs typeface="+mn-cs"/>
         </a:defRPr>
       </a:lvl2pPr>
-      <a:lvl3pPr marL="857250" indent="-171450" algn="l" defTabSz="685800" rtl="0" eaLnBrk="1" latinLnBrk="0" hangingPunct="1">
+      <a:lvl3pPr marL="1005900" indent="-201180" algn="l" defTabSz="804720" rtl="0" eaLnBrk="1" latinLnBrk="0" hangingPunct="1">
         <a:lnSpc>
           <a:spcPct val="90000"/>
         </a:lnSpc>
         <a:spcBef>
-          <a:spcPts val="375"/>
+          <a:spcPts val="440"/>
         </a:spcBef>
         <a:buFont typeface="Arial" panose="020B0604020202020204" pitchFamily="34" charset="0"/>
         <a:buChar char="•"/>
-        <a:defRPr sz="1500" kern="1200">
+        <a:defRPr sz="1760" kern="1200">
           <a:solidFill>
             <a:schemeClr val="tx1"/>
           </a:solidFill>
@@ -2747,16 +2759,16 @@
           <a:cs typeface="+mn-cs"/>
         </a:defRPr>
       </a:lvl3pPr>
-      <a:lvl4pPr marL="1200150" indent="-171450" algn="l" defTabSz="685800" rtl="0" eaLnBrk="1" latinLnBrk="0" hangingPunct="1">
+      <a:lvl4pPr marL="1408260" indent="-201180" algn="l" defTabSz="804720" rtl="0" eaLnBrk="1" latinLnBrk="0" hangingPunct="1">
         <a:lnSpc>
           <a:spcPct val="90000"/>
         </a:lnSpc>
         <a:spcBef>
-          <a:spcPts val="375"/>
+          <a:spcPts val="440"/>
         </a:spcBef>
         <a:buFont typeface="Arial" panose="020B0604020202020204" pitchFamily="34" charset="0"/>
         <a:buChar char="•"/>
-        <a:defRPr sz="1350" kern="1200">
+        <a:defRPr sz="1584" kern="1200">
           <a:solidFill>
             <a:schemeClr val="tx1"/>
           </a:solidFill>
@@ -2765,16 +2777,16 @@
           <a:cs typeface="+mn-cs"/>
         </a:defRPr>
       </a:lvl4pPr>
-      <a:lvl5pPr marL="1543050" indent="-171450" algn="l" defTabSz="685800" rtl="0" eaLnBrk="1" latinLnBrk="0" hangingPunct="1">
+      <a:lvl5pPr marL="1810620" indent="-201180" algn="l" defTabSz="804720" rtl="0" eaLnBrk="1" latinLnBrk="0" hangingPunct="1">
         <a:lnSpc>
           <a:spcPct val="90000"/>
         </a:lnSpc>
         <a:spcBef>
-          <a:spcPts val="375"/>
+          <a:spcPts val="440"/>
         </a:spcBef>
         <a:buFont typeface="Arial" panose="020B0604020202020204" pitchFamily="34" charset="0"/>
         <a:buChar char="•"/>
-        <a:defRPr sz="1350" kern="1200">
+        <a:defRPr sz="1584" kern="1200">
           <a:solidFill>
             <a:schemeClr val="tx1"/>
           </a:solidFill>
@@ -2783,16 +2795,16 @@
           <a:cs typeface="+mn-cs"/>
         </a:defRPr>
       </a:lvl5pPr>
-      <a:lvl6pPr marL="1885950" indent="-171450" algn="l" defTabSz="685800" rtl="0" eaLnBrk="1" latinLnBrk="0" hangingPunct="1">
+      <a:lvl6pPr marL="2212980" indent="-201180" algn="l" defTabSz="804720" rtl="0" eaLnBrk="1" latinLnBrk="0" hangingPunct="1">
         <a:lnSpc>
           <a:spcPct val="90000"/>
         </a:lnSpc>
         <a:spcBef>
-          <a:spcPts val="375"/>
+          <a:spcPts val="440"/>
         </a:spcBef>
         <a:buFont typeface="Arial" panose="020B0604020202020204" pitchFamily="34" charset="0"/>
         <a:buChar char="•"/>
-        <a:defRPr sz="1350" kern="1200">
+        <a:defRPr sz="1584" kern="1200">
           <a:solidFill>
             <a:schemeClr val="tx1"/>
           </a:solidFill>
@@ -2801,16 +2813,16 @@
           <a:cs typeface="+mn-cs"/>
         </a:defRPr>
       </a:lvl6pPr>
-      <a:lvl7pPr marL="2228850" indent="-171450" algn="l" defTabSz="685800" rtl="0" eaLnBrk="1" latinLnBrk="0" hangingPunct="1">
+      <a:lvl7pPr marL="2615340" indent="-201180" algn="l" defTabSz="804720" rtl="0" eaLnBrk="1" latinLnBrk="0" hangingPunct="1">
         <a:lnSpc>
           <a:spcPct val="90000"/>
         </a:lnSpc>
         <a:spcBef>
-          <a:spcPts val="375"/>
+          <a:spcPts val="440"/>
         </a:spcBef>
         <a:buFont typeface="Arial" panose="020B0604020202020204" pitchFamily="34" charset="0"/>
         <a:buChar char="•"/>
-        <a:defRPr sz="1350" kern="1200">
+        <a:defRPr sz="1584" kern="1200">
           <a:solidFill>
             <a:schemeClr val="tx1"/>
           </a:solidFill>
@@ -2819,16 +2831,16 @@
           <a:cs typeface="+mn-cs"/>
         </a:defRPr>
       </a:lvl7pPr>
-      <a:lvl8pPr marL="2571750" indent="-171450" algn="l" defTabSz="685800" rtl="0" eaLnBrk="1" latinLnBrk="0" hangingPunct="1">
+      <a:lvl8pPr marL="3017699" indent="-201180" algn="l" defTabSz="804720" rtl="0" eaLnBrk="1" latinLnBrk="0" hangingPunct="1">
         <a:lnSpc>
           <a:spcPct val="90000"/>
         </a:lnSpc>
         <a:spcBef>
-          <a:spcPts val="375"/>
+          <a:spcPts val="440"/>
         </a:spcBef>
         <a:buFont typeface="Arial" panose="020B0604020202020204" pitchFamily="34" charset="0"/>
         <a:buChar char="•"/>
-        <a:defRPr sz="1350" kern="1200">
+        <a:defRPr sz="1584" kern="1200">
           <a:solidFill>
             <a:schemeClr val="tx1"/>
           </a:solidFill>
@@ -2837,16 +2849,16 @@
           <a:cs typeface="+mn-cs"/>
         </a:defRPr>
       </a:lvl8pPr>
-      <a:lvl9pPr marL="2914650" indent="-171450" algn="l" defTabSz="685800" rtl="0" eaLnBrk="1" latinLnBrk="0" hangingPunct="1">
+      <a:lvl9pPr marL="3420059" indent="-201180" algn="l" defTabSz="804720" rtl="0" eaLnBrk="1" latinLnBrk="0" hangingPunct="1">
         <a:lnSpc>
           <a:spcPct val="90000"/>
         </a:lnSpc>
         <a:spcBef>
-          <a:spcPts val="375"/>
+          <a:spcPts val="440"/>
         </a:spcBef>
         <a:buFont typeface="Arial" panose="020B0604020202020204" pitchFamily="34" charset="0"/>
         <a:buChar char="•"/>
-        <a:defRPr sz="1350" kern="1200">
+        <a:defRPr sz="1584" kern="1200">
           <a:solidFill>
             <a:schemeClr val="tx1"/>
           </a:solidFill>
@@ -2860,8 +2872,8 @@
       <a:defPPr>
         <a:defRPr lang="en-US"/>
       </a:defPPr>
-      <a:lvl1pPr marL="0" algn="l" defTabSz="685800" rtl="0" eaLnBrk="1" latinLnBrk="0" hangingPunct="1">
-        <a:defRPr sz="1350" kern="1200">
+      <a:lvl1pPr marL="0" algn="l" defTabSz="804720" rtl="0" eaLnBrk="1" latinLnBrk="0" hangingPunct="1">
+        <a:defRPr sz="1584" kern="1200">
           <a:solidFill>
             <a:schemeClr val="tx1"/>
           </a:solidFill>
@@ -2870,8 +2882,8 @@
           <a:cs typeface="+mn-cs"/>
         </a:defRPr>
       </a:lvl1pPr>
-      <a:lvl2pPr marL="342900" algn="l" defTabSz="685800" rtl="0" eaLnBrk="1" latinLnBrk="0" hangingPunct="1">
-        <a:defRPr sz="1350" kern="1200">
+      <a:lvl2pPr marL="402360" algn="l" defTabSz="804720" rtl="0" eaLnBrk="1" latinLnBrk="0" hangingPunct="1">
+        <a:defRPr sz="1584" kern="1200">
           <a:solidFill>
             <a:schemeClr val="tx1"/>
           </a:solidFill>
@@ -2880,8 +2892,8 @@
           <a:cs typeface="+mn-cs"/>
         </a:defRPr>
       </a:lvl2pPr>
-      <a:lvl3pPr marL="685800" algn="l" defTabSz="685800" rtl="0" eaLnBrk="1" latinLnBrk="0" hangingPunct="1">
-        <a:defRPr sz="1350" kern="1200">
+      <a:lvl3pPr marL="804720" algn="l" defTabSz="804720" rtl="0" eaLnBrk="1" latinLnBrk="0" hangingPunct="1">
+        <a:defRPr sz="1584" kern="1200">
           <a:solidFill>
             <a:schemeClr val="tx1"/>
           </a:solidFill>
@@ -2890,8 +2902,8 @@
           <a:cs typeface="+mn-cs"/>
         </a:defRPr>
       </a:lvl3pPr>
-      <a:lvl4pPr marL="1028700" algn="l" defTabSz="685800" rtl="0" eaLnBrk="1" latinLnBrk="0" hangingPunct="1">
-        <a:defRPr sz="1350" kern="1200">
+      <a:lvl4pPr marL="1207080" algn="l" defTabSz="804720" rtl="0" eaLnBrk="1" latinLnBrk="0" hangingPunct="1">
+        <a:defRPr sz="1584" kern="1200">
           <a:solidFill>
             <a:schemeClr val="tx1"/>
           </a:solidFill>
@@ -2900,8 +2912,8 @@
           <a:cs typeface="+mn-cs"/>
         </a:defRPr>
       </a:lvl4pPr>
-      <a:lvl5pPr marL="1371600" algn="l" defTabSz="685800" rtl="0" eaLnBrk="1" latinLnBrk="0" hangingPunct="1">
-        <a:defRPr sz="1350" kern="1200">
+      <a:lvl5pPr marL="1609440" algn="l" defTabSz="804720" rtl="0" eaLnBrk="1" latinLnBrk="0" hangingPunct="1">
+        <a:defRPr sz="1584" kern="1200">
           <a:solidFill>
             <a:schemeClr val="tx1"/>
           </a:solidFill>
@@ -2910,8 +2922,8 @@
           <a:cs typeface="+mn-cs"/>
         </a:defRPr>
       </a:lvl5pPr>
-      <a:lvl6pPr marL="1714500" algn="l" defTabSz="685800" rtl="0" eaLnBrk="1" latinLnBrk="0" hangingPunct="1">
-        <a:defRPr sz="1350" kern="1200">
+      <a:lvl6pPr marL="2011800" algn="l" defTabSz="804720" rtl="0" eaLnBrk="1" latinLnBrk="0" hangingPunct="1">
+        <a:defRPr sz="1584" kern="1200">
           <a:solidFill>
             <a:schemeClr val="tx1"/>
           </a:solidFill>
@@ -2920,8 +2932,8 @@
           <a:cs typeface="+mn-cs"/>
         </a:defRPr>
       </a:lvl6pPr>
-      <a:lvl7pPr marL="2057400" algn="l" defTabSz="685800" rtl="0" eaLnBrk="1" latinLnBrk="0" hangingPunct="1">
-        <a:defRPr sz="1350" kern="1200">
+      <a:lvl7pPr marL="2414160" algn="l" defTabSz="804720" rtl="0" eaLnBrk="1" latinLnBrk="0" hangingPunct="1">
+        <a:defRPr sz="1584" kern="1200">
           <a:solidFill>
             <a:schemeClr val="tx1"/>
           </a:solidFill>
@@ -2930,8 +2942,8 @@
           <a:cs typeface="+mn-cs"/>
         </a:defRPr>
       </a:lvl7pPr>
-      <a:lvl8pPr marL="2400300" algn="l" defTabSz="685800" rtl="0" eaLnBrk="1" latinLnBrk="0" hangingPunct="1">
-        <a:defRPr sz="1350" kern="1200">
+      <a:lvl8pPr marL="2816519" algn="l" defTabSz="804720" rtl="0" eaLnBrk="1" latinLnBrk="0" hangingPunct="1">
+        <a:defRPr sz="1584" kern="1200">
           <a:solidFill>
             <a:schemeClr val="tx1"/>
           </a:solidFill>
@@ -2940,8 +2952,8 @@
           <a:cs typeface="+mn-cs"/>
         </a:defRPr>
       </a:lvl8pPr>
-      <a:lvl9pPr marL="2743200" algn="l" defTabSz="685800" rtl="0" eaLnBrk="1" latinLnBrk="0" hangingPunct="1">
-        <a:defRPr sz="1350" kern="1200">
+      <a:lvl9pPr marL="3218879" algn="l" defTabSz="804720" rtl="0" eaLnBrk="1" latinLnBrk="0" hangingPunct="1">
+        <a:defRPr sz="1584" kern="1200">
           <a:solidFill>
             <a:schemeClr val="tx1"/>
           </a:solidFill>
@@ -2986,8 +2998,8 @@
         </p:nvSpPr>
         <p:spPr>
           <a:xfrm>
-            <a:off x="3464482" y="3739545"/>
-            <a:ext cx="847452" cy="351647"/>
+            <a:off x="4065153" y="4009166"/>
+            <a:ext cx="994383" cy="412615"/>
           </a:xfrm>
           <a:prstGeom prst="roundRect">
             <a:avLst/>
@@ -3045,7 +3057,7 @@
           <a:p>
             <a:pPr algn="ctr"/>
             <a:r>
-              <a:rPr lang="en-US" sz="1200" dirty="0">
+              <a:rPr lang="en-US" sz="1408" dirty="0">
                 <a:solidFill>
                   <a:schemeClr val="tx1"/>
                 </a:solidFill>
@@ -3054,7 +3066,7 @@
               </a:rPr>
               <a:t>2385</a:t>
             </a:r>
-            <a:endParaRPr lang="de-DE" sz="1200" dirty="0">
+            <a:endParaRPr lang="de-DE" sz="1408" dirty="0">
               <a:solidFill>
                 <a:schemeClr val="tx1"/>
               </a:solidFill>
@@ -3078,8 +3090,8 @@
         </p:nvSpPr>
         <p:spPr>
           <a:xfrm>
-            <a:off x="3464482" y="4659776"/>
-            <a:ext cx="847452" cy="351647"/>
+            <a:off x="4065153" y="5088945"/>
+            <a:ext cx="994383" cy="412615"/>
           </a:xfrm>
           <a:prstGeom prst="roundRect">
             <a:avLst/>
@@ -3137,7 +3149,7 @@
           <a:p>
             <a:pPr algn="ctr"/>
             <a:r>
-              <a:rPr lang="en-US" sz="1200" dirty="0">
+              <a:rPr lang="en-US" sz="1408" dirty="0">
                 <a:solidFill>
                   <a:schemeClr val="tx1"/>
                 </a:solidFill>
@@ -3146,7 +3158,7 @@
               </a:rPr>
               <a:t>118</a:t>
             </a:r>
-            <a:endParaRPr lang="de-DE" sz="1200" dirty="0">
+            <a:endParaRPr lang="de-DE" sz="1408" dirty="0">
               <a:solidFill>
                 <a:schemeClr val="tx1"/>
               </a:solidFill>
@@ -3170,8 +3182,8 @@
         </p:nvSpPr>
         <p:spPr>
           <a:xfrm>
-            <a:off x="3464499" y="6216280"/>
-            <a:ext cx="847452" cy="351647"/>
+            <a:off x="4065173" y="7103997"/>
+            <a:ext cx="994383" cy="412615"/>
           </a:xfrm>
           <a:prstGeom prst="roundRect">
             <a:avLst/>
@@ -3229,7 +3241,7 @@
           <a:p>
             <a:pPr algn="ctr"/>
             <a:r>
-              <a:rPr lang="en-US" sz="1200" dirty="0">
+              <a:rPr lang="en-US" sz="1408" dirty="0">
                 <a:solidFill>
                   <a:schemeClr val="tx1"/>
                 </a:solidFill>
@@ -3238,7 +3250,7 @@
               </a:rPr>
               <a:t>1032</a:t>
             </a:r>
-            <a:endParaRPr lang="de-DE" sz="1200" dirty="0">
+            <a:endParaRPr lang="de-DE" sz="1408" dirty="0">
               <a:solidFill>
                 <a:schemeClr val="tx1"/>
               </a:solidFill>
@@ -3266,8 +3278,8 @@
         </p:nvCxnSpPr>
         <p:spPr>
           <a:xfrm>
-            <a:off x="3888208" y="4091192"/>
-            <a:ext cx="0" cy="568585"/>
+            <a:off x="4562344" y="4421780"/>
+            <a:ext cx="0" cy="667166"/>
           </a:xfrm>
           <a:prstGeom prst="straightConnector1">
             <a:avLst/>
@@ -3314,8 +3326,8 @@
         </p:nvCxnSpPr>
         <p:spPr>
           <a:xfrm>
-            <a:off x="3888208" y="5011423"/>
-            <a:ext cx="17" cy="1204857"/>
+            <a:off x="4562345" y="5501561"/>
+            <a:ext cx="20" cy="1602437"/>
           </a:xfrm>
           <a:prstGeom prst="straightConnector1">
             <a:avLst/>
@@ -3358,8 +3370,8 @@
         </p:nvSpPr>
         <p:spPr>
           <a:xfrm>
-            <a:off x="4308118" y="3776868"/>
-            <a:ext cx="2486654" cy="261610"/>
+            <a:off x="5040651" y="3976290"/>
+            <a:ext cx="1841042" cy="489621"/>
           </a:xfrm>
           <a:prstGeom prst="rect">
             <a:avLst/>
@@ -3372,13 +3384,22 @@
           <a:lstStyle/>
           <a:p>
             <a:r>
-              <a:rPr lang="en-US" sz="1100" dirty="0">
+              <a:rPr lang="en-US" sz="1291" dirty="0">
                 <a:latin typeface="Arial" panose="020B0604020202020204" pitchFamily="34" charset="0"/>
                 <a:cs typeface="Arial" panose="020B0604020202020204" pitchFamily="34" charset="0"/>
               </a:rPr>
-              <a:t>Restricted / Full-Access Datasets</a:t>
-            </a:r>
-            <a:endParaRPr lang="de-DE" sz="1100" dirty="0">
+              <a:t>Restricted-Access</a:t>
+            </a:r>
+          </a:p>
+          <a:p>
+            <a:r>
+              <a:rPr lang="en-US" sz="1291" dirty="0">
+                <a:latin typeface="Arial" panose="020B0604020202020204" pitchFamily="34" charset="0"/>
+                <a:cs typeface="Arial" panose="020B0604020202020204" pitchFamily="34" charset="0"/>
+              </a:rPr>
+              <a:t>and Open Datasets</a:t>
+            </a:r>
+            <a:endParaRPr lang="de-DE" sz="1291" dirty="0">
               <a:latin typeface="Arial" panose="020B0604020202020204" pitchFamily="34" charset="0"/>
               <a:cs typeface="Arial" panose="020B0604020202020204" pitchFamily="34" charset="0"/>
             </a:endParaRPr>
@@ -3399,8 +3420,8 @@
         </p:nvSpPr>
         <p:spPr>
           <a:xfrm>
-            <a:off x="4271005" y="4634156"/>
-            <a:ext cx="2126949" cy="430887"/>
+            <a:off x="5063715" y="5042446"/>
+            <a:ext cx="994363" cy="489621"/>
           </a:xfrm>
           <a:prstGeom prst="rect">
             <a:avLst/>
@@ -3413,20 +3434,20 @@
           <a:lstStyle/>
           <a:p>
             <a:r>
-              <a:rPr lang="en-US" sz="1100" dirty="0">
+              <a:rPr lang="en-US" sz="1291" dirty="0">
                 <a:latin typeface="Arial" panose="020B0604020202020204" pitchFamily="34" charset="0"/>
                 <a:cs typeface="Arial" panose="020B0604020202020204" pitchFamily="34" charset="0"/>
               </a:rPr>
-              <a:t>Mentioned Datasets</a:t>
-            </a:r>
-          </a:p>
-          <a:p>
-            <a:r>
-              <a:rPr lang="en-US" sz="1100" dirty="0">
+              <a:t>Mentioned</a:t>
+            </a:r>
+          </a:p>
+          <a:p>
+            <a:r>
+              <a:rPr lang="en-US" sz="1291" dirty="0">
                 <a:latin typeface="Arial" panose="020B0604020202020204" pitchFamily="34" charset="0"/>
                 <a:cs typeface="Arial" panose="020B0604020202020204" pitchFamily="34" charset="0"/>
               </a:rPr>
-              <a:t>(Manually Screened)</a:t>
+              <a:t>Datasets</a:t>
             </a:r>
           </a:p>
         </p:txBody>
@@ -3445,8 +3466,8 @@
         </p:nvSpPr>
         <p:spPr>
           <a:xfrm>
-            <a:off x="4303434" y="6176659"/>
-            <a:ext cx="2126948" cy="430887"/>
+            <a:off x="5063715" y="7051395"/>
+            <a:ext cx="1105044" cy="489621"/>
           </a:xfrm>
           <a:prstGeom prst="rect">
             <a:avLst/>
@@ -3459,20 +3480,20 @@
           <a:lstStyle/>
           <a:p>
             <a:r>
-              <a:rPr lang="en-US" sz="1100" dirty="0">
+              <a:rPr lang="en-US" sz="1291" dirty="0">
                 <a:latin typeface="Arial" panose="020B0604020202020204" pitchFamily="34" charset="0"/>
                 <a:cs typeface="Arial" panose="020B0604020202020204" pitchFamily="34" charset="0"/>
               </a:rPr>
-              <a:t>Mentions of Datasets</a:t>
-            </a:r>
-          </a:p>
-          <a:p>
-            <a:r>
-              <a:rPr lang="en-US" sz="1100" dirty="0">
+              <a:t>Mentions</a:t>
+            </a:r>
+          </a:p>
+          <a:p>
+            <a:r>
+              <a:rPr lang="en-US" sz="1291" dirty="0">
                 <a:latin typeface="Arial" panose="020B0604020202020204" pitchFamily="34" charset="0"/>
                 <a:cs typeface="Arial" panose="020B0604020202020204" pitchFamily="34" charset="0"/>
               </a:rPr>
-              <a:t>(Manually Screened)</a:t>
+              <a:t>of Datasets</a:t>
             </a:r>
           </a:p>
         </p:txBody>
@@ -3491,8 +3512,8 @@
         </p:nvSpPr>
         <p:spPr>
           <a:xfrm>
-            <a:off x="1781846" y="4659776"/>
-            <a:ext cx="815263" cy="351647"/>
+            <a:off x="1793604" y="5088945"/>
+            <a:ext cx="956613" cy="412615"/>
           </a:xfrm>
           <a:prstGeom prst="roundRect">
             <a:avLst/>
@@ -3553,7 +3574,7 @@
           <a:p>
             <a:pPr algn="ctr"/>
             <a:r>
-              <a:rPr lang="en-US" sz="1200" dirty="0">
+              <a:rPr lang="en-US" sz="1408" dirty="0">
                 <a:solidFill>
                   <a:schemeClr val="tx1"/>
                 </a:solidFill>
@@ -3562,7 +3583,7 @@
               </a:rPr>
               <a:t>119</a:t>
             </a:r>
-            <a:endParaRPr lang="de-DE" sz="1200" dirty="0">
+            <a:endParaRPr lang="de-DE" sz="1408" dirty="0">
               <a:solidFill>
                 <a:schemeClr val="tx1"/>
               </a:solidFill>
@@ -3586,8 +3607,8 @@
         </p:nvSpPr>
         <p:spPr>
           <a:xfrm>
-            <a:off x="1781863" y="6216280"/>
-            <a:ext cx="821637" cy="351647"/>
+            <a:off x="1793623" y="7103997"/>
+            <a:ext cx="964092" cy="412615"/>
           </a:xfrm>
           <a:prstGeom prst="roundRect">
             <a:avLst/>
@@ -3648,7 +3669,7 @@
           <a:p>
             <a:pPr algn="ctr"/>
             <a:r>
-              <a:rPr lang="en-US" sz="1200" dirty="0">
+              <a:rPr lang="en-US" sz="1408" dirty="0">
                 <a:solidFill>
                   <a:schemeClr val="tx1"/>
                 </a:solidFill>
@@ -3657,7 +3678,7 @@
               </a:rPr>
               <a:t>790</a:t>
             </a:r>
-            <a:endParaRPr lang="de-DE" sz="1200" dirty="0">
+            <a:endParaRPr lang="de-DE" sz="1408" dirty="0">
               <a:solidFill>
                 <a:schemeClr val="tx1"/>
               </a:solidFill>
@@ -3681,8 +3702,8 @@
         </p:nvSpPr>
         <p:spPr>
           <a:xfrm>
-            <a:off x="2623173" y="7096680"/>
-            <a:ext cx="815263" cy="351647"/>
+            <a:off x="2933200" y="8137041"/>
+            <a:ext cx="956613" cy="412615"/>
           </a:xfrm>
           <a:prstGeom prst="roundRect">
             <a:avLst/>
@@ -3735,7 +3756,7 @@
           <a:p>
             <a:pPr algn="ctr"/>
             <a:r>
-              <a:rPr lang="en-US" sz="1200" dirty="0">
+              <a:rPr lang="en-US" sz="1408" dirty="0">
                 <a:solidFill>
                   <a:schemeClr val="tx1"/>
                 </a:solidFill>
@@ -3744,7 +3765,7 @@
               </a:rPr>
               <a:t>1497</a:t>
             </a:r>
-            <a:endParaRPr lang="de-DE" sz="1200" dirty="0">
+            <a:endParaRPr lang="de-DE" sz="1408" dirty="0">
               <a:solidFill>
                 <a:schemeClr val="tx1"/>
               </a:solidFill>
@@ -3765,15 +3786,14 @@
           </p:cNvPr>
           <p:cNvCxnSpPr>
             <a:cxnSpLocks/>
-            <a:stCxn id="37" idx="2"/>
             <a:endCxn id="38" idx="0"/>
           </p:cNvCxnSpPr>
           <p:nvPr/>
         </p:nvCxnSpPr>
         <p:spPr>
           <a:xfrm>
-            <a:off x="2189478" y="5011423"/>
-            <a:ext cx="3204" cy="1204857"/>
+            <a:off x="2271909" y="5501561"/>
+            <a:ext cx="3760" cy="1602437"/>
           </a:xfrm>
           <a:prstGeom prst="straightConnector1">
             <a:avLst/>
@@ -3820,8 +3840,8 @@
         </p:nvCxnSpPr>
         <p:spPr>
           <a:xfrm>
-            <a:off x="2192682" y="6567927"/>
-            <a:ext cx="838123" cy="528753"/>
+            <a:off x="2275670" y="7516612"/>
+            <a:ext cx="1135837" cy="620428"/>
           </a:xfrm>
           <a:prstGeom prst="straightConnector1">
             <a:avLst/>
@@ -3864,8 +3884,8 @@
         </p:nvSpPr>
         <p:spPr>
           <a:xfrm>
-            <a:off x="229128" y="4620156"/>
-            <a:ext cx="1526663" cy="430887"/>
+            <a:off x="683797" y="5042446"/>
+            <a:ext cx="1066474" cy="489621"/>
           </a:xfrm>
           <a:prstGeom prst="rect">
             <a:avLst/>
@@ -3879,26 +3899,22 @@
           <a:p>
             <a:pPr algn="r"/>
             <a:r>
-              <a:rPr lang="en-US" sz="1100" dirty="0">
+              <a:rPr lang="en-US" sz="1291" dirty="0">
                 <a:latin typeface="Arial" panose="020B0604020202020204" pitchFamily="34" charset="0"/>
                 <a:cs typeface="Arial" panose="020B0604020202020204" pitchFamily="34" charset="0"/>
               </a:rPr>
-              <a:t>Mentioned Datasets</a:t>
+              <a:t>Mentioned</a:t>
             </a:r>
           </a:p>
           <a:p>
             <a:pPr algn="r"/>
             <a:r>
-              <a:rPr lang="en-US" sz="1100" dirty="0">
+              <a:rPr lang="en-US" sz="1291" dirty="0">
                 <a:latin typeface="Arial" panose="020B0604020202020204" pitchFamily="34" charset="0"/>
                 <a:cs typeface="Arial" panose="020B0604020202020204" pitchFamily="34" charset="0"/>
               </a:rPr>
-              <a:t>(DataStet)</a:t>
-            </a:r>
-            <a:endParaRPr lang="de-DE" sz="1100" dirty="0">
-              <a:latin typeface="Arial" panose="020B0604020202020204" pitchFamily="34" charset="0"/>
-              <a:cs typeface="Arial" panose="020B0604020202020204" pitchFamily="34" charset="0"/>
-            </a:endParaRPr>
+              <a:t>Datasets</a:t>
+            </a:r>
           </a:p>
         </p:txBody>
       </p:sp>
@@ -3916,8 +3932,8 @@
         </p:nvSpPr>
         <p:spPr>
           <a:xfrm>
-            <a:off x="229128" y="6168964"/>
-            <a:ext cx="1526663" cy="430887"/>
+            <a:off x="685201" y="7051393"/>
+            <a:ext cx="1066474" cy="489621"/>
           </a:xfrm>
           <a:prstGeom prst="rect">
             <a:avLst/>
@@ -3931,23 +3947,23 @@
           <a:p>
             <a:pPr algn="r"/>
             <a:r>
-              <a:rPr lang="en-US" sz="1100" dirty="0">
+              <a:rPr lang="en-US" sz="1291" dirty="0">
                 <a:latin typeface="Arial" panose="020B0604020202020204" pitchFamily="34" charset="0"/>
                 <a:cs typeface="Arial" panose="020B0604020202020204" pitchFamily="34" charset="0"/>
               </a:rPr>
-              <a:t>Mentions of Datasets</a:t>
+              <a:t>Mentions</a:t>
             </a:r>
           </a:p>
           <a:p>
             <a:pPr algn="r"/>
             <a:r>
-              <a:rPr lang="en-US" sz="1100" dirty="0">
+              <a:rPr lang="en-US" sz="1291" dirty="0">
                 <a:latin typeface="Arial" panose="020B0604020202020204" pitchFamily="34" charset="0"/>
                 <a:cs typeface="Arial" panose="020B0604020202020204" pitchFamily="34" charset="0"/>
               </a:rPr>
-              <a:t>(DataStet)</a:t>
-            </a:r>
-            <a:endParaRPr lang="de-DE" sz="1100" dirty="0">
+              <a:t>of Datasets</a:t>
+            </a:r>
+            <a:endParaRPr lang="de-DE" sz="1291" dirty="0">
               <a:latin typeface="Arial" panose="020B0604020202020204" pitchFamily="34" charset="0"/>
               <a:cs typeface="Arial" panose="020B0604020202020204" pitchFamily="34" charset="0"/>
             </a:endParaRPr>
@@ -3972,8 +3988,8 @@
         </p:nvCxnSpPr>
         <p:spPr>
           <a:xfrm flipH="1">
-            <a:off x="3030805" y="6567927"/>
-            <a:ext cx="857420" cy="528753"/>
+            <a:off x="3411507" y="7516612"/>
+            <a:ext cx="1150859" cy="620428"/>
           </a:xfrm>
           <a:prstGeom prst="straightConnector1">
             <a:avLst/>
@@ -4016,8 +4032,8 @@
         </p:nvSpPr>
         <p:spPr>
           <a:xfrm>
-            <a:off x="1927797" y="7483280"/>
-            <a:ext cx="2245616" cy="822726"/>
+            <a:off x="2117258" y="8590668"/>
+            <a:ext cx="2634960" cy="949491"/>
           </a:xfrm>
           <a:prstGeom prst="rect">
             <a:avLst/>
@@ -4035,7 +4051,7 @@
               </a:lnSpc>
             </a:pPr>
             <a:r>
-              <a:rPr lang="en-US" sz="1100" dirty="0">
+              <a:rPr lang="en-US" sz="1291" dirty="0">
                 <a:latin typeface="Arial" panose="020B0604020202020204" pitchFamily="34" charset="0"/>
                 <a:cs typeface="Arial" panose="020B0604020202020204" pitchFamily="34" charset="0"/>
               </a:rPr>
@@ -4049,7 +4065,7 @@
               </a:lnSpc>
             </a:pPr>
             <a:r>
-              <a:rPr lang="en-US" sz="1100" dirty="0">
+              <a:rPr lang="en-US" sz="1291" dirty="0">
                 <a:solidFill>
                   <a:schemeClr val="bg1">
                     <a:lumMod val="50000"/>
@@ -4060,7 +4076,7 @@
               </a:rPr>
               <a:t>Published in 134 Charité Papers</a:t>
             </a:r>
-            <a:endParaRPr lang="de-DE" sz="1100" dirty="0">
+            <a:endParaRPr lang="de-DE" sz="1291" dirty="0">
               <a:solidFill>
                 <a:schemeClr val="bg1">
                   <a:lumMod val="50000"/>
@@ -4077,7 +4093,7 @@
               </a:lnSpc>
             </a:pPr>
             <a:r>
-              <a:rPr lang="de-DE" sz="1100" dirty="0">
+              <a:rPr lang="de-DE" sz="1291" dirty="0">
                 <a:solidFill>
                   <a:schemeClr val="bg1">
                     <a:lumMod val="50000"/>
@@ -4109,8 +4125,8 @@
         </p:nvCxnSpPr>
         <p:spPr>
           <a:xfrm>
-            <a:off x="3884392" y="3108620"/>
-            <a:ext cx="3816" cy="630925"/>
+            <a:off x="4557867" y="3268850"/>
+            <a:ext cx="4478" cy="740315"/>
           </a:xfrm>
           <a:prstGeom prst="straightConnector1">
             <a:avLst/>
@@ -4153,8 +4169,8 @@
         </p:nvSpPr>
         <p:spPr>
           <a:xfrm>
-            <a:off x="2649219" y="5459906"/>
-            <a:ext cx="815263" cy="351647"/>
+            <a:off x="2963761" y="6027801"/>
+            <a:ext cx="956613" cy="412615"/>
           </a:xfrm>
           <a:prstGeom prst="roundRect">
             <a:avLst/>
@@ -4207,7 +4223,7 @@
           <a:p>
             <a:pPr algn="ctr"/>
             <a:r>
-              <a:rPr lang="en-US" sz="1200" dirty="0">
+              <a:rPr lang="en-US" sz="1408" dirty="0">
                 <a:solidFill>
                   <a:schemeClr val="tx1"/>
                 </a:solidFill>
@@ -4216,7 +4232,7 @@
               </a:rPr>
               <a:t>175</a:t>
             </a:r>
-            <a:endParaRPr lang="de-DE" sz="1200" dirty="0">
+            <a:endParaRPr lang="de-DE" sz="1408" dirty="0">
               <a:solidFill>
                 <a:schemeClr val="tx1"/>
               </a:solidFill>
@@ -4243,8 +4259,8 @@
         </p:nvCxnSpPr>
         <p:spPr>
           <a:xfrm>
-            <a:off x="2189495" y="5023080"/>
-            <a:ext cx="867356" cy="436826"/>
+            <a:off x="2424329" y="5515238"/>
+            <a:ext cx="1017738" cy="512563"/>
           </a:xfrm>
           <a:prstGeom prst="straightConnector1">
             <a:avLst/>
@@ -4290,8 +4306,8 @@
         </p:nvCxnSpPr>
         <p:spPr>
           <a:xfrm flipH="1">
-            <a:off x="3056851" y="5023080"/>
-            <a:ext cx="831374" cy="436826"/>
+            <a:off x="3442068" y="5515238"/>
+            <a:ext cx="975517" cy="512563"/>
           </a:xfrm>
           <a:prstGeom prst="straightConnector1">
             <a:avLst/>
@@ -4334,8 +4350,8 @@
         </p:nvSpPr>
         <p:spPr>
           <a:xfrm>
-            <a:off x="2199631" y="5840218"/>
-            <a:ext cx="1675112" cy="261610"/>
+            <a:off x="2436223" y="6474051"/>
+            <a:ext cx="1965542" cy="290977"/>
           </a:xfrm>
           <a:prstGeom prst="rect">
             <a:avLst/>
@@ -4349,13 +4365,13 @@
           <a:p>
             <a:pPr algn="ctr"/>
             <a:r>
-              <a:rPr lang="en-US" sz="1100" dirty="0">
+              <a:rPr lang="en-US" sz="1291" dirty="0">
                 <a:latin typeface="Arial" panose="020B0604020202020204" pitchFamily="34" charset="0"/>
                 <a:cs typeface="Arial" panose="020B0604020202020204" pitchFamily="34" charset="0"/>
               </a:rPr>
               <a:t>Detected Datasets</a:t>
             </a:r>
-            <a:endParaRPr lang="de-DE" sz="1100" dirty="0">
+            <a:endParaRPr lang="de-DE" sz="1291" dirty="0">
               <a:latin typeface="Arial" panose="020B0604020202020204" pitchFamily="34" charset="0"/>
               <a:cs typeface="Arial" panose="020B0604020202020204" pitchFamily="34" charset="0"/>
             </a:endParaRPr>
@@ -4376,8 +4392,8 @@
         </p:nvSpPr>
         <p:spPr>
           <a:xfrm>
-            <a:off x="3460666" y="2756973"/>
-            <a:ext cx="847452" cy="351647"/>
+            <a:off x="4060675" y="2856235"/>
+            <a:ext cx="994383" cy="412615"/>
           </a:xfrm>
           <a:prstGeom prst="roundRect">
             <a:avLst/>
@@ -4435,7 +4451,7 @@
           <a:p>
             <a:pPr algn="ctr"/>
             <a:r>
-              <a:rPr lang="en-US" sz="1200" dirty="0">
+              <a:rPr lang="en-US" sz="1408" dirty="0">
                 <a:solidFill>
                   <a:schemeClr val="tx1"/>
                 </a:solidFill>
@@ -4444,7 +4460,7 @@
               </a:rPr>
               <a:t>1583</a:t>
             </a:r>
-            <a:endParaRPr lang="de-DE" sz="1200" dirty="0">
+            <a:endParaRPr lang="de-DE" sz="1408" dirty="0">
               <a:solidFill>
                 <a:schemeClr val="tx1"/>
               </a:solidFill>
@@ -4468,8 +4484,8 @@
         </p:nvSpPr>
         <p:spPr>
           <a:xfrm>
-            <a:off x="4308118" y="2739829"/>
-            <a:ext cx="1665950" cy="430887"/>
+            <a:off x="5055058" y="2836118"/>
+            <a:ext cx="1954792" cy="489621"/>
           </a:xfrm>
           <a:prstGeom prst="rect">
             <a:avLst/>
@@ -4482,13 +4498,13 @@
           <a:lstStyle/>
           <a:p>
             <a:r>
-              <a:rPr lang="en-US" sz="1100" dirty="0">
+              <a:rPr lang="en-US" sz="1291" dirty="0">
                 <a:latin typeface="Arial" panose="020B0604020202020204" pitchFamily="34" charset="0"/>
                 <a:cs typeface="Arial" panose="020B0604020202020204" pitchFamily="34" charset="0"/>
               </a:rPr>
               <a:t>Charité Papers with Shared Datasets</a:t>
             </a:r>
-            <a:endParaRPr lang="de-DE" sz="1100" dirty="0">
+            <a:endParaRPr lang="de-DE" sz="1291" dirty="0">
               <a:latin typeface="Arial" panose="020B0604020202020204" pitchFamily="34" charset="0"/>
               <a:cs typeface="Arial" panose="020B0604020202020204" pitchFamily="34" charset="0"/>
             </a:endParaRPr>
@@ -4509,8 +4525,8 @@
         </p:nvSpPr>
         <p:spPr>
           <a:xfrm>
-            <a:off x="2110235" y="1836272"/>
-            <a:ext cx="1880740" cy="351647"/>
+            <a:off x="1726516" y="835071"/>
+            <a:ext cx="3384956" cy="412615"/>
           </a:xfrm>
           <a:prstGeom prst="roundRect">
             <a:avLst/>
@@ -4568,16 +4584,16 @@
           <a:p>
             <a:pPr algn="ctr"/>
             <a:r>
-              <a:rPr lang="en-US" sz="1200" dirty="0">
+              <a:rPr lang="en-US" sz="1408" dirty="0">
                 <a:solidFill>
                   <a:schemeClr val="tx1"/>
                 </a:solidFill>
                 <a:latin typeface="Arial" panose="020B0604020202020204" pitchFamily="34" charset="0"/>
                 <a:cs typeface="Arial" panose="020B0604020202020204" pitchFamily="34" charset="0"/>
               </a:rPr>
-              <a:t>15748 Charité Papers</a:t>
-            </a:r>
-            <a:endParaRPr lang="de-DE" sz="1200" dirty="0">
+              <a:t>15748 Charité Papers (2020-2023)</a:t>
+            </a:r>
+            <a:endParaRPr lang="de-DE" sz="1408" dirty="0">
               <a:solidFill>
                 <a:schemeClr val="tx1"/>
               </a:solidFill>
@@ -4604,8 +4620,8 @@
         </p:nvCxnSpPr>
         <p:spPr>
           <a:xfrm>
-            <a:off x="2597109" y="4835600"/>
-            <a:ext cx="867373" cy="0"/>
+            <a:off x="2750217" y="5295253"/>
+            <a:ext cx="1314937" cy="0"/>
           </a:xfrm>
           <a:prstGeom prst="straightConnector1">
             <a:avLst/>
@@ -4653,8 +4669,8 @@
         </p:nvCxnSpPr>
         <p:spPr>
           <a:xfrm>
-            <a:off x="2603500" y="6392104"/>
-            <a:ext cx="860999" cy="0"/>
+            <a:off x="2757715" y="7310305"/>
+            <a:ext cx="1307458" cy="0"/>
           </a:xfrm>
           <a:prstGeom prst="straightConnector1">
             <a:avLst/>
@@ -4698,36 +4714,78 @@
         </p:nvSpPr>
         <p:spPr>
           <a:xfrm>
-            <a:off x="2744936" y="4620156"/>
-            <a:ext cx="571718" cy="230832"/>
+            <a:off x="2913819" y="5063018"/>
+            <a:ext cx="1041839" cy="461088"/>
           </a:xfrm>
           <a:prstGeom prst="rect">
             <a:avLst/>
           </a:prstGeom>
-        </p:spPr>
+          <a:ln>
+            <a:noFill/>
+            <a:headEnd type="triangle"/>
+            <a:tailEnd type="triangle"/>
+          </a:ln>
+        </p:spPr>
+        <p:style>
+          <a:lnRef idx="1">
+            <a:schemeClr val="accent1"/>
+          </a:lnRef>
+          <a:fillRef idx="0">
+            <a:schemeClr val="accent1"/>
+          </a:fillRef>
+          <a:effectRef idx="0">
+            <a:schemeClr val="accent1"/>
+          </a:effectRef>
+          <a:fontRef idx="minor">
+            <a:schemeClr val="tx1"/>
+          </a:fontRef>
+        </p:style>
         <p:txBody>
           <a:bodyPr wrap="square">
             <a:spAutoFit/>
           </a:bodyPr>
           <a:lstStyle/>
           <a:p>
-            <a:pPr algn="ctr"/>
-            <a:r>
-              <a:rPr lang="en-US" sz="900" dirty="0">
+            <a:pPr algn="ctr">
+              <a:lnSpc>
+                <a:spcPts val="1500"/>
+              </a:lnSpc>
+            </a:pPr>
+            <a:r>
+              <a:rPr lang="en-US" sz="1100" dirty="0">
                 <a:solidFill>
                   <a:schemeClr val="bg1">
-                    <a:lumMod val="65000"/>
+                    <a:lumMod val="50000"/>
                   </a:schemeClr>
                 </a:solidFill>
                 <a:latin typeface="Arial" panose="020B0604020202020204" pitchFamily="34" charset="0"/>
                 <a:cs typeface="Arial" panose="020B0604020202020204" pitchFamily="34" charset="0"/>
               </a:rPr>
-              <a:t>(62)</a:t>
-            </a:r>
-            <a:endParaRPr lang="de-DE" sz="900" dirty="0">
+              <a:t>62</a:t>
+            </a:r>
+          </a:p>
+          <a:p>
+            <a:pPr algn="ctr">
+              <a:lnSpc>
+                <a:spcPts val="1500"/>
+              </a:lnSpc>
+            </a:pPr>
+            <a:r>
+              <a:rPr lang="en-US" sz="1100" dirty="0">
+                <a:solidFill>
+                  <a:schemeClr val="bg1">
+                    <a:lumMod val="50000"/>
+                  </a:schemeClr>
+                </a:solidFill>
+                <a:latin typeface="Arial" panose="020B0604020202020204" pitchFamily="34" charset="0"/>
+                <a:cs typeface="Arial" panose="020B0604020202020204" pitchFamily="34" charset="0"/>
+              </a:rPr>
+              <a:t>Overlapping</a:t>
+            </a:r>
+            <a:endParaRPr lang="de-DE" sz="1100" dirty="0">
               <a:solidFill>
                 <a:schemeClr val="bg1">
-                  <a:lumMod val="65000"/>
+                  <a:lumMod val="50000"/>
                 </a:schemeClr>
               </a:solidFill>
               <a:latin typeface="Arial" panose="020B0604020202020204" pitchFamily="34" charset="0"/>
@@ -4750,8 +4808,8 @@
         </p:nvSpPr>
         <p:spPr>
           <a:xfrm>
-            <a:off x="2751328" y="6190122"/>
-            <a:ext cx="571718" cy="230832"/>
+            <a:off x="2906455" y="7084130"/>
+            <a:ext cx="1033011" cy="461088"/>
           </a:xfrm>
           <a:prstGeom prst="rect">
             <a:avLst/>
@@ -4763,23 +4821,46 @@
           </a:bodyPr>
           <a:lstStyle/>
           <a:p>
-            <a:pPr algn="ctr"/>
-            <a:r>
-              <a:rPr lang="en-US" sz="900" dirty="0">
+            <a:pPr algn="ctr">
+              <a:lnSpc>
+                <a:spcPts val="1500"/>
+              </a:lnSpc>
+            </a:pPr>
+            <a:r>
+              <a:rPr lang="en-US" sz="1100" dirty="0">
                 <a:solidFill>
                   <a:schemeClr val="bg1">
-                    <a:lumMod val="65000"/>
+                    <a:lumMod val="50000"/>
                   </a:schemeClr>
                 </a:solidFill>
                 <a:latin typeface="Arial" panose="020B0604020202020204" pitchFamily="34" charset="0"/>
                 <a:cs typeface="Arial" panose="020B0604020202020204" pitchFamily="34" charset="0"/>
               </a:rPr>
-              <a:t>(325)</a:t>
-            </a:r>
-            <a:endParaRPr lang="de-DE" sz="900" dirty="0">
+              <a:t>325</a:t>
+            </a:r>
+          </a:p>
+          <a:p>
+            <a:pPr algn="ctr">
+              <a:lnSpc>
+                <a:spcPts val="1500"/>
+              </a:lnSpc>
+            </a:pPr>
+            <a:r>
+              <a:rPr lang="en-US" sz="1100" dirty="0">
+                <a:solidFill>
+                  <a:schemeClr val="bg1">
+                    <a:lumMod val="50000"/>
+                  </a:schemeClr>
+                </a:solidFill>
+                <a:latin typeface="Arial" panose="020B0604020202020204" pitchFamily="34" charset="0"/>
+                <a:cs typeface="Arial" panose="020B0604020202020204" pitchFamily="34" charset="0"/>
+              </a:rPr>
+              <a:t>Overlapping</a:t>
+            </a:r>
+            <a:endParaRPr lang="de-DE" sz="1100" dirty="0">
               <a:solidFill>
                 <a:schemeClr val="bg1">
-                  <a:lumMod val="65000"/>
+                  <a:lumMod val="50000"/>
                 </a:schemeClr>
               </a:solidFill>
               <a:latin typeface="Arial" panose="020B0604020202020204" pitchFamily="34" charset="0"/>
@@ -4788,6 +4869,317 @@
           </a:p>
         </p:txBody>
       </p:sp>
+      <p:cxnSp>
+        <p:nvCxnSpPr>
+          <p:cNvPr id="32" name="Straight Arrow Connector 31">
+            <a:extLst>
+              <a:ext uri="{FF2B5EF4-FFF2-40B4-BE49-F238E27FC236}">
+                <a16:creationId xmlns:a16="http://schemas.microsoft.com/office/drawing/2014/main" id="{210F5922-3CDA-4585-8326-9CB45756D445}"/>
+              </a:ext>
+            </a:extLst>
+          </p:cNvPr>
+          <p:cNvCxnSpPr>
+            <a:cxnSpLocks/>
+            <a:stCxn id="2" idx="2"/>
+            <a:endCxn id="89" idx="0"/>
+          </p:cNvCxnSpPr>
+          <p:nvPr/>
+        </p:nvCxnSpPr>
+        <p:spPr>
+          <a:xfrm>
+            <a:off x="4557867" y="2531004"/>
+            <a:ext cx="0" cy="325231"/>
+          </a:xfrm>
+          <a:prstGeom prst="straightConnector1">
+            <a:avLst/>
+          </a:prstGeom>
+          <a:ln>
+            <a:solidFill>
+              <a:schemeClr val="bg1">
+                <a:lumMod val="65000"/>
+              </a:schemeClr>
+            </a:solidFill>
+            <a:tailEnd type="triangle"/>
+          </a:ln>
+        </p:spPr>
+        <p:style>
+          <a:lnRef idx="1">
+            <a:schemeClr val="accent1"/>
+          </a:lnRef>
+          <a:fillRef idx="0">
+            <a:schemeClr val="accent1"/>
+          </a:fillRef>
+          <a:effectRef idx="0">
+            <a:schemeClr val="accent1"/>
+          </a:effectRef>
+          <a:fontRef idx="minor">
+            <a:schemeClr val="tx1"/>
+          </a:fontRef>
+        </p:style>
+      </p:cxnSp>
+      <p:sp>
+        <p:nvSpPr>
+          <p:cNvPr id="2" name="Rectangle 1">
+            <a:extLst>
+              <a:ext uri="{FF2B5EF4-FFF2-40B4-BE49-F238E27FC236}">
+                <a16:creationId xmlns:a16="http://schemas.microsoft.com/office/drawing/2014/main" id="{86A5693A-EED4-4551-9CD6-0153B32A6EF7}"/>
+              </a:ext>
+            </a:extLst>
+          </p:cNvPr>
+          <p:cNvSpPr/>
+          <p:nvPr/>
+        </p:nvSpPr>
+        <p:spPr>
+          <a:xfrm>
+            <a:off x="3709045" y="2007784"/>
+            <a:ext cx="1697644" cy="523220"/>
+          </a:xfrm>
+          <a:prstGeom prst="rect">
+            <a:avLst/>
+          </a:prstGeom>
+        </p:spPr>
+        <p:txBody>
+          <a:bodyPr wrap="none">
+            <a:spAutoFit/>
+          </a:bodyPr>
+          <a:lstStyle/>
+          <a:p>
+            <a:pPr algn="ctr"/>
+            <a:r>
+              <a:rPr lang="de-DE" sz="1400" dirty="0">
+                <a:solidFill>
+                  <a:schemeClr val="accent5">
+                    <a:lumMod val="50000"/>
+                  </a:schemeClr>
+                </a:solidFill>
+                <a:latin typeface="Arial" panose="020B0604020202020204" pitchFamily="34" charset="0"/>
+                <a:cs typeface="Arial" panose="020B0604020202020204" pitchFamily="34" charset="0"/>
+              </a:rPr>
+              <a:t>ODDPub</a:t>
+            </a:r>
+            <a:r>
+              <a:rPr lang="de-DE" sz="1400" dirty="0">
+                <a:solidFill>
+                  <a:schemeClr val="accent5">
+                    <a:lumMod val="50000"/>
+                  </a:schemeClr>
+                </a:solidFill>
+                <a:latin typeface="Arial" panose="020B0604020202020204" pitchFamily="34" charset="0"/>
+              </a:rPr>
+              <a:t> and</a:t>
+            </a:r>
+          </a:p>
+          <a:p>
+            <a:pPr algn="ctr"/>
+            <a:r>
+              <a:rPr lang="de-DE" sz="1400" dirty="0">
+                <a:solidFill>
+                  <a:schemeClr val="accent5">
+                    <a:lumMod val="50000"/>
+                  </a:schemeClr>
+                </a:solidFill>
+                <a:latin typeface="Arial" panose="020B0604020202020204" pitchFamily="34" charset="0"/>
+              </a:rPr>
+              <a:t>Manual Verification</a:t>
+            </a:r>
+            <a:endParaRPr lang="de-DE" sz="1400" dirty="0">
+              <a:solidFill>
+                <a:schemeClr val="accent5">
+                  <a:lumMod val="50000"/>
+                </a:schemeClr>
+              </a:solidFill>
+            </a:endParaRPr>
+          </a:p>
+        </p:txBody>
+      </p:sp>
+      <p:cxnSp>
+        <p:nvCxnSpPr>
+          <p:cNvPr id="10" name="Straight Connector 9">
+            <a:extLst>
+              <a:ext uri="{FF2B5EF4-FFF2-40B4-BE49-F238E27FC236}">
+                <a16:creationId xmlns:a16="http://schemas.microsoft.com/office/drawing/2014/main" id="{B38E50F4-3EB6-4472-AB36-428E5FC342AB}"/>
+              </a:ext>
+            </a:extLst>
+          </p:cNvPr>
+          <p:cNvCxnSpPr>
+            <a:cxnSpLocks/>
+          </p:cNvCxnSpPr>
+          <p:nvPr/>
+        </p:nvCxnSpPr>
+        <p:spPr>
+          <a:xfrm flipH="1" flipV="1">
+            <a:off x="4557866" y="1405801"/>
+            <a:ext cx="2239" cy="646868"/>
+          </a:xfrm>
+          <a:prstGeom prst="line">
+            <a:avLst/>
+          </a:prstGeom>
+          <a:ln>
+            <a:solidFill>
+              <a:schemeClr val="bg1">
+                <a:lumMod val="65000"/>
+              </a:schemeClr>
+            </a:solidFill>
+          </a:ln>
+        </p:spPr>
+        <p:style>
+          <a:lnRef idx="1">
+            <a:schemeClr val="accent1"/>
+          </a:lnRef>
+          <a:fillRef idx="0">
+            <a:schemeClr val="accent1"/>
+          </a:fillRef>
+          <a:effectRef idx="0">
+            <a:schemeClr val="accent1"/>
+          </a:effectRef>
+          <a:fontRef idx="minor">
+            <a:schemeClr val="tx1"/>
+          </a:fontRef>
+        </p:style>
+      </p:cxnSp>
+      <p:cxnSp>
+        <p:nvCxnSpPr>
+          <p:cNvPr id="45" name="Straight Arrow Connector 44">
+            <a:extLst>
+              <a:ext uri="{FF2B5EF4-FFF2-40B4-BE49-F238E27FC236}">
+                <a16:creationId xmlns:a16="http://schemas.microsoft.com/office/drawing/2014/main" id="{BF7B5AA1-6411-4DB4-BA6B-6917164AE427}"/>
+              </a:ext>
+            </a:extLst>
+          </p:cNvPr>
+          <p:cNvCxnSpPr>
+            <a:cxnSpLocks/>
+            <a:stCxn id="46" idx="2"/>
+            <a:endCxn id="37" idx="0"/>
+          </p:cNvCxnSpPr>
+          <p:nvPr/>
+        </p:nvCxnSpPr>
+        <p:spPr>
+          <a:xfrm>
+            <a:off x="2271910" y="2405232"/>
+            <a:ext cx="1" cy="2683713"/>
+          </a:xfrm>
+          <a:prstGeom prst="straightConnector1">
+            <a:avLst/>
+          </a:prstGeom>
+          <a:ln>
+            <a:solidFill>
+              <a:schemeClr val="bg1">
+                <a:lumMod val="65000"/>
+              </a:schemeClr>
+            </a:solidFill>
+            <a:tailEnd type="triangle"/>
+          </a:ln>
+        </p:spPr>
+        <p:style>
+          <a:lnRef idx="1">
+            <a:schemeClr val="accent1"/>
+          </a:lnRef>
+          <a:fillRef idx="0">
+            <a:schemeClr val="accent1"/>
+          </a:fillRef>
+          <a:effectRef idx="0">
+            <a:schemeClr val="accent1"/>
+          </a:effectRef>
+          <a:fontRef idx="minor">
+            <a:schemeClr val="tx1"/>
+          </a:fontRef>
+        </p:style>
+      </p:cxnSp>
+      <p:sp>
+        <p:nvSpPr>
+          <p:cNvPr id="46" name="Rectangle 45">
+            <a:extLst>
+              <a:ext uri="{FF2B5EF4-FFF2-40B4-BE49-F238E27FC236}">
+                <a16:creationId xmlns:a16="http://schemas.microsoft.com/office/drawing/2014/main" id="{E436A577-EB67-4219-929E-242465663E95}"/>
+              </a:ext>
+            </a:extLst>
+          </p:cNvPr>
+          <p:cNvSpPr/>
+          <p:nvPr/>
+        </p:nvSpPr>
+        <p:spPr>
+          <a:xfrm>
+            <a:off x="1830923" y="2097455"/>
+            <a:ext cx="881973" cy="307777"/>
+          </a:xfrm>
+          <a:prstGeom prst="rect">
+            <a:avLst/>
+          </a:prstGeom>
+        </p:spPr>
+        <p:txBody>
+          <a:bodyPr wrap="none">
+            <a:spAutoFit/>
+          </a:bodyPr>
+          <a:lstStyle/>
+          <a:p>
+            <a:pPr algn="ctr"/>
+            <a:r>
+              <a:rPr lang="de-DE" sz="1400" dirty="0">
+                <a:solidFill>
+                  <a:schemeClr val="accent5">
+                    <a:lumMod val="50000"/>
+                  </a:schemeClr>
+                </a:solidFill>
+                <a:latin typeface="Arial" panose="020B0604020202020204" pitchFamily="34" charset="0"/>
+                <a:cs typeface="Arial" panose="020B0604020202020204" pitchFamily="34" charset="0"/>
+              </a:rPr>
+              <a:t>DataStet</a:t>
+            </a:r>
+            <a:endParaRPr lang="de-DE" sz="1400" dirty="0">
+              <a:solidFill>
+                <a:schemeClr val="accent5">
+                  <a:lumMod val="50000"/>
+                </a:schemeClr>
+              </a:solidFill>
+            </a:endParaRPr>
+          </a:p>
+        </p:txBody>
+      </p:sp>
+      <p:cxnSp>
+        <p:nvCxnSpPr>
+          <p:cNvPr id="47" name="Straight Connector 46">
+            <a:extLst>
+              <a:ext uri="{FF2B5EF4-FFF2-40B4-BE49-F238E27FC236}">
+                <a16:creationId xmlns:a16="http://schemas.microsoft.com/office/drawing/2014/main" id="{86F92F92-9331-477A-8B37-F8DE7AC5719E}"/>
+              </a:ext>
+            </a:extLst>
+          </p:cNvPr>
+          <p:cNvCxnSpPr>
+            <a:cxnSpLocks/>
+          </p:cNvCxnSpPr>
+          <p:nvPr/>
+        </p:nvCxnSpPr>
+        <p:spPr>
+          <a:xfrm flipH="1" flipV="1">
+            <a:off x="2273693" y="1405802"/>
+            <a:ext cx="1" cy="691653"/>
+          </a:xfrm>
+          <a:prstGeom prst="line">
+            <a:avLst/>
+          </a:prstGeom>
+          <a:ln>
+            <a:solidFill>
+              <a:schemeClr val="bg1">
+                <a:lumMod val="65000"/>
+              </a:schemeClr>
+            </a:solidFill>
+          </a:ln>
+        </p:spPr>
+        <p:style>
+          <a:lnRef idx="1">
+            <a:schemeClr val="accent1"/>
+          </a:lnRef>
+          <a:fillRef idx="0">
+            <a:schemeClr val="accent1"/>
+          </a:fillRef>
+          <a:effectRef idx="0">
+            <a:schemeClr val="accent1"/>
+          </a:effectRef>
+          <a:fontRef idx="minor">
+            <a:schemeClr val="tx1"/>
+          </a:fontRef>
+        </p:style>
+      </p:cxnSp>
     </p:spTree>
     <p:extLst>
       <p:ext uri="{BB962C8B-B14F-4D97-AF65-F5344CB8AC3E}">
@@ -4832,8 +5224,8 @@
         </p:nvSpPr>
         <p:spPr>
           <a:xfrm>
-            <a:off x="4311933" y="3699924"/>
-            <a:ext cx="1557989" cy="430887"/>
+            <a:off x="5059535" y="3284493"/>
+            <a:ext cx="1828113" cy="480581"/>
           </a:xfrm>
           <a:prstGeom prst="rect">
             <a:avLst/>
@@ -4846,7 +5238,7 @@
           <a:lstStyle/>
           <a:p>
             <a:r>
-              <a:rPr lang="en-US" sz="1100" dirty="0">
+              <a:rPr lang="en-US" sz="1291" dirty="0">
                 <a:latin typeface="Arial" panose="020B0604020202020204" pitchFamily="34" charset="0"/>
                 <a:cs typeface="Arial" panose="020B0604020202020204" pitchFamily="34" charset="0"/>
               </a:rPr>
@@ -4855,7 +5247,7 @@
           </a:p>
           <a:p>
             <a:r>
-              <a:rPr lang="de-DE" sz="1050" dirty="0">
+              <a:rPr lang="de-DE" sz="1232" dirty="0">
                 <a:solidFill>
                   <a:schemeClr val="bg1">
                     <a:lumMod val="50000"/>
@@ -4883,8 +5275,8 @@
         </p:nvSpPr>
         <p:spPr>
           <a:xfrm>
-            <a:off x="3464482" y="3739545"/>
-            <a:ext cx="847452" cy="351647"/>
+            <a:off x="4065153" y="3330985"/>
+            <a:ext cx="994383" cy="412615"/>
           </a:xfrm>
           <a:prstGeom prst="roundRect">
             <a:avLst/>
@@ -4939,7 +5331,7 @@
           <a:p>
             <a:pPr algn="ctr"/>
             <a:r>
-              <a:rPr lang="en-US" sz="1200">
+              <a:rPr lang="en-US" sz="1408">
                 <a:solidFill>
                   <a:schemeClr val="tx1"/>
                 </a:solidFill>
@@ -4948,7 +5340,7 @@
               </a:rPr>
               <a:t>1765</a:t>
             </a:r>
-            <a:endParaRPr lang="de-DE" sz="1200" dirty="0">
+            <a:endParaRPr lang="de-DE" sz="1408" dirty="0">
               <a:solidFill>
                 <a:schemeClr val="tx1"/>
               </a:solidFill>
@@ -4972,8 +5364,8 @@
         </p:nvSpPr>
         <p:spPr>
           <a:xfrm>
-            <a:off x="3464482" y="4659776"/>
-            <a:ext cx="847452" cy="351647"/>
+            <a:off x="4065153" y="4410766"/>
+            <a:ext cx="994383" cy="412615"/>
           </a:xfrm>
           <a:prstGeom prst="roundRect">
             <a:avLst/>
@@ -5028,7 +5420,7 @@
           <a:p>
             <a:pPr algn="ctr"/>
             <a:r>
-              <a:rPr lang="en-US" sz="1200" dirty="0">
+              <a:rPr lang="en-US" sz="1408" dirty="0">
                 <a:solidFill>
                   <a:schemeClr val="tx1"/>
                 </a:solidFill>
@@ -5037,7 +5429,7 @@
               </a:rPr>
               <a:t>?</a:t>
             </a:r>
-            <a:endParaRPr lang="de-DE" sz="1200" dirty="0">
+            <a:endParaRPr lang="de-DE" sz="1408" dirty="0">
               <a:solidFill>
                 <a:schemeClr val="tx1"/>
               </a:solidFill>
@@ -5065,8 +5457,8 @@
         </p:nvCxnSpPr>
         <p:spPr>
           <a:xfrm>
-            <a:off x="3888208" y="4091192"/>
-            <a:ext cx="0" cy="568585"/>
+            <a:off x="4562344" y="3743600"/>
+            <a:ext cx="0" cy="667166"/>
           </a:xfrm>
           <a:prstGeom prst="straightConnector1">
             <a:avLst/>
@@ -5109,8 +5501,8 @@
         </p:nvSpPr>
         <p:spPr>
           <a:xfrm>
-            <a:off x="4304303" y="4704794"/>
-            <a:ext cx="1558000" cy="261610"/>
+            <a:off x="5050582" y="4463588"/>
+            <a:ext cx="1828125" cy="290977"/>
           </a:xfrm>
           <a:prstGeom prst="rect">
             <a:avLst/>
@@ -5123,13 +5515,13 @@
           <a:lstStyle/>
           <a:p>
             <a:r>
-              <a:rPr lang="en-US" sz="1100" dirty="0">
+              <a:rPr lang="en-US" sz="1291" dirty="0">
                 <a:latin typeface="Arial" panose="020B0604020202020204" pitchFamily="34" charset="0"/>
                 <a:cs typeface="Arial" panose="020B0604020202020204" pitchFamily="34" charset="0"/>
               </a:rPr>
               <a:t>Estimated Citations</a:t>
             </a:r>
-            <a:endParaRPr lang="de-DE" sz="1100" dirty="0">
+            <a:endParaRPr lang="de-DE" sz="1291" dirty="0">
               <a:latin typeface="Arial" panose="020B0604020202020204" pitchFamily="34" charset="0"/>
               <a:cs typeface="Arial" panose="020B0604020202020204" pitchFamily="34" charset="0"/>
             </a:endParaRPr>
@@ -5150,8 +5542,8 @@
         </p:nvSpPr>
         <p:spPr>
           <a:xfrm>
-            <a:off x="3464482" y="2805223"/>
-            <a:ext cx="847452" cy="351647"/>
+            <a:off x="4065153" y="2234670"/>
+            <a:ext cx="994383" cy="412615"/>
           </a:xfrm>
           <a:prstGeom prst="roundRect">
             <a:avLst/>
@@ -5206,7 +5598,7 @@
           <a:p>
             <a:pPr algn="ctr"/>
             <a:r>
-              <a:rPr lang="en-US" sz="1200" dirty="0">
+              <a:rPr lang="en-US" sz="1408" dirty="0">
                 <a:solidFill>
                   <a:schemeClr val="tx1"/>
                 </a:solidFill>
@@ -5215,7 +5607,7 @@
               </a:rPr>
               <a:t>34</a:t>
             </a:r>
-            <a:endParaRPr lang="de-DE" sz="1200" dirty="0">
+            <a:endParaRPr lang="de-DE" sz="1408" dirty="0">
               <a:solidFill>
                 <a:schemeClr val="tx1"/>
               </a:solidFill>
@@ -5243,8 +5635,8 @@
         </p:nvCxnSpPr>
         <p:spPr>
           <a:xfrm>
-            <a:off x="3888208" y="3156870"/>
-            <a:ext cx="0" cy="582675"/>
+            <a:off x="4562344" y="2647285"/>
+            <a:ext cx="0" cy="683699"/>
           </a:xfrm>
           <a:prstGeom prst="straightConnector1">
             <a:avLst/>
@@ -5287,8 +5679,8 @@
         </p:nvSpPr>
         <p:spPr>
           <a:xfrm>
-            <a:off x="4308118" y="2842546"/>
-            <a:ext cx="1372571" cy="261610"/>
+            <a:off x="5055059" y="2278464"/>
+            <a:ext cx="1610547" cy="290977"/>
           </a:xfrm>
           <a:prstGeom prst="rect">
             <a:avLst/>
@@ -5301,13 +5693,13 @@
           <a:lstStyle/>
           <a:p>
             <a:r>
-              <a:rPr lang="en-US" sz="1100" dirty="0">
+              <a:rPr lang="en-US" sz="1291" dirty="0">
                 <a:latin typeface="Arial" panose="020B0604020202020204" pitchFamily="34" charset="0"/>
                 <a:cs typeface="Arial" panose="020B0604020202020204" pitchFamily="34" charset="0"/>
               </a:rPr>
               <a:t>Charité Datasets</a:t>
             </a:r>
-            <a:endParaRPr lang="de-DE" sz="1100" dirty="0">
+            <a:endParaRPr lang="de-DE" sz="1291" dirty="0">
               <a:latin typeface="Arial" panose="020B0604020202020204" pitchFamily="34" charset="0"/>
               <a:cs typeface="Arial" panose="020B0604020202020204" pitchFamily="34" charset="0"/>
             </a:endParaRPr>
@@ -5328,8 +5720,8 @@
         </p:nvSpPr>
         <p:spPr>
           <a:xfrm>
-            <a:off x="3460666" y="1868520"/>
-            <a:ext cx="847452" cy="351647"/>
+            <a:off x="4060675" y="1135562"/>
+            <a:ext cx="994383" cy="412615"/>
           </a:xfrm>
           <a:prstGeom prst="roundRect">
             <a:avLst/>
@@ -5384,7 +5776,7 @@
           <a:p>
             <a:pPr algn="ctr"/>
             <a:r>
-              <a:rPr lang="en-US" sz="1200" dirty="0">
+              <a:rPr lang="en-US" sz="1408" dirty="0">
                 <a:solidFill>
                   <a:schemeClr val="tx1"/>
                 </a:solidFill>
@@ -5393,7 +5785,7 @@
               </a:rPr>
               <a:t>28</a:t>
             </a:r>
-            <a:endParaRPr lang="de-DE" sz="1200" dirty="0">
+            <a:endParaRPr lang="de-DE" sz="1408" dirty="0">
               <a:solidFill>
                 <a:schemeClr val="tx1"/>
               </a:solidFill>
@@ -5421,8 +5813,8 @@
         </p:nvCxnSpPr>
         <p:spPr>
           <a:xfrm>
-            <a:off x="3884392" y="2220167"/>
-            <a:ext cx="3816" cy="585056"/>
+            <a:off x="4557867" y="1548176"/>
+            <a:ext cx="4478" cy="686493"/>
           </a:xfrm>
           <a:prstGeom prst="straightConnector1">
             <a:avLst/>
@@ -5465,8 +5857,8 @@
         </p:nvSpPr>
         <p:spPr>
           <a:xfrm>
-            <a:off x="4304302" y="1905843"/>
-            <a:ext cx="1558000" cy="261610"/>
+            <a:off x="5050581" y="1179356"/>
+            <a:ext cx="1828125" cy="290977"/>
           </a:xfrm>
           <a:prstGeom prst="rect">
             <a:avLst/>
@@ -5479,13 +5871,13 @@
           <a:lstStyle/>
           <a:p>
             <a:r>
-              <a:rPr lang="en-US" sz="1100" dirty="0">
+              <a:rPr lang="en-US" sz="1291" dirty="0">
                 <a:latin typeface="Arial" panose="020B0604020202020204" pitchFamily="34" charset="0"/>
                 <a:cs typeface="Arial" panose="020B0604020202020204" pitchFamily="34" charset="0"/>
               </a:rPr>
               <a:t>Charité Data Articles</a:t>
             </a:r>
-            <a:endParaRPr lang="de-DE" sz="1100" dirty="0">
+            <a:endParaRPr lang="de-DE" sz="1291" dirty="0">
               <a:latin typeface="Arial" panose="020B0604020202020204" pitchFamily="34" charset="0"/>
               <a:cs typeface="Arial" panose="020B0604020202020204" pitchFamily="34" charset="0"/>
             </a:endParaRPr>
@@ -5496,6 +5888,86 @@
     <p:extLst>
       <p:ext uri="{BB962C8B-B14F-4D97-AF65-F5344CB8AC3E}">
         <p14:creationId xmlns:p14="http://schemas.microsoft.com/office/powerpoint/2010/main" val="225445080"/>
+      </p:ext>
+    </p:extLst>
+  </p:cSld>
+  <p:clrMapOvr>
+    <a:masterClrMapping/>
+  </p:clrMapOvr>
+</p:sld>
+</file>
+
+<file path=ppt/slides/slide3.xml><?xml version="1.0" encoding="utf-8"?>
+<p:sld xmlns:a="http://schemas.openxmlformats.org/drawingml/2006/main" xmlns:r="http://schemas.openxmlformats.org/officeDocument/2006/relationships" xmlns:p="http://schemas.openxmlformats.org/presentationml/2006/main">
+  <p:cSld>
+    <p:spTree>
+      <p:nvGrpSpPr>
+        <p:cNvPr id="1" name=""/>
+        <p:cNvGrpSpPr/>
+        <p:nvPr/>
+      </p:nvGrpSpPr>
+      <p:grpSpPr>
+        <a:xfrm>
+          <a:off x="0" y="0"/>
+          <a:ext cx="0" cy="0"/>
+          <a:chOff x="0" y="0"/>
+          <a:chExt cx="0" cy="0"/>
+        </a:xfrm>
+      </p:grpSpPr>
+      <p:sp>
+        <p:nvSpPr>
+          <p:cNvPr id="2" name="Title 1">
+            <a:extLst>
+              <a:ext uri="{FF2B5EF4-FFF2-40B4-BE49-F238E27FC236}">
+                <a16:creationId xmlns:a16="http://schemas.microsoft.com/office/drawing/2014/main" id="{BF53E300-3FD7-4319-9640-2C4886D462FD}"/>
+              </a:ext>
+            </a:extLst>
+          </p:cNvPr>
+          <p:cNvSpPr>
+            <a:spLocks noGrp="1"/>
+          </p:cNvSpPr>
+          <p:nvPr>
+            <p:ph type="title"/>
+          </p:nvPr>
+        </p:nvSpPr>
+        <p:spPr/>
+        <p:txBody>
+          <a:bodyPr/>
+          <a:lstStyle/>
+          <a:p>
+            <a:endParaRPr lang="de-DE"/>
+          </a:p>
+        </p:txBody>
+      </p:sp>
+      <p:sp>
+        <p:nvSpPr>
+          <p:cNvPr id="3" name="Content Placeholder 2">
+            <a:extLst>
+              <a:ext uri="{FF2B5EF4-FFF2-40B4-BE49-F238E27FC236}">
+                <a16:creationId xmlns:a16="http://schemas.microsoft.com/office/drawing/2014/main" id="{34B3A751-5B87-4E9F-8BB0-8F64161D3A4C}"/>
+              </a:ext>
+            </a:extLst>
+          </p:cNvPr>
+          <p:cNvSpPr>
+            <a:spLocks noGrp="1"/>
+          </p:cNvSpPr>
+          <p:nvPr>
+            <p:ph idx="1"/>
+          </p:nvPr>
+        </p:nvSpPr>
+        <p:spPr/>
+        <p:txBody>
+          <a:bodyPr/>
+          <a:lstStyle/>
+          <a:p>
+            <a:endParaRPr lang="de-DE"/>
+          </a:p>
+        </p:txBody>
+      </p:sp>
+    </p:spTree>
+    <p:extLst>
+      <p:ext uri="{BB962C8B-B14F-4D97-AF65-F5344CB8AC3E}">
+        <p14:creationId xmlns:p14="http://schemas.microsoft.com/office/powerpoint/2010/main" val="3543156593"/>
       </p:ext>
     </p:extLst>
   </p:cSld>

--- a/plots_png/pptx/plots_png.pptx
+++ b/plots_png/pptx/plots_png.pptx
@@ -7,7 +7,6 @@
   <p:sldIdLst>
     <p:sldId id="260" r:id="rId2"/>
     <p:sldId id="256" r:id="rId3"/>
-    <p:sldId id="261" r:id="rId4"/>
   </p:sldIdLst>
   <p:sldSz cx="8047038" cy="12192000"/>
   <p:notesSz cx="6858000" cy="9144000"/>
@@ -256,7 +255,7 @@
           <a:p>
             <a:fld id="{83D14EEA-DE26-4810-8E05-A65F0010FADE}" type="datetimeFigureOut">
               <a:rPr lang="de-DE" smtClean="0"/>
-              <a:t>23.10.2025</a:t>
+              <a:t>28.10.2025</a:t>
             </a:fld>
             <a:endParaRPr lang="de-DE"/>
           </a:p>
@@ -426,7 +425,7 @@
           <a:p>
             <a:fld id="{83D14EEA-DE26-4810-8E05-A65F0010FADE}" type="datetimeFigureOut">
               <a:rPr lang="de-DE" smtClean="0"/>
-              <a:t>23.10.2025</a:t>
+              <a:t>28.10.2025</a:t>
             </a:fld>
             <a:endParaRPr lang="de-DE"/>
           </a:p>
@@ -606,7 +605,7 @@
           <a:p>
             <a:fld id="{83D14EEA-DE26-4810-8E05-A65F0010FADE}" type="datetimeFigureOut">
               <a:rPr lang="de-DE" smtClean="0"/>
-              <a:t>23.10.2025</a:t>
+              <a:t>28.10.2025</a:t>
             </a:fld>
             <a:endParaRPr lang="de-DE"/>
           </a:p>
@@ -776,7 +775,7 @@
           <a:p>
             <a:fld id="{83D14EEA-DE26-4810-8E05-A65F0010FADE}" type="datetimeFigureOut">
               <a:rPr lang="de-DE" smtClean="0"/>
-              <a:t>23.10.2025</a:t>
+              <a:t>28.10.2025</a:t>
             </a:fld>
             <a:endParaRPr lang="de-DE"/>
           </a:p>
@@ -1020,7 +1019,7 @@
           <a:p>
             <a:fld id="{83D14EEA-DE26-4810-8E05-A65F0010FADE}" type="datetimeFigureOut">
               <a:rPr lang="de-DE" smtClean="0"/>
-              <a:t>23.10.2025</a:t>
+              <a:t>28.10.2025</a:t>
             </a:fld>
             <a:endParaRPr lang="de-DE"/>
           </a:p>
@@ -1252,7 +1251,7 @@
           <a:p>
             <a:fld id="{83D14EEA-DE26-4810-8E05-A65F0010FADE}" type="datetimeFigureOut">
               <a:rPr lang="de-DE" smtClean="0"/>
-              <a:t>23.10.2025</a:t>
+              <a:t>28.10.2025</a:t>
             </a:fld>
             <a:endParaRPr lang="de-DE"/>
           </a:p>
@@ -1619,7 +1618,7 @@
           <a:p>
             <a:fld id="{83D14EEA-DE26-4810-8E05-A65F0010FADE}" type="datetimeFigureOut">
               <a:rPr lang="de-DE" smtClean="0"/>
-              <a:t>23.10.2025</a:t>
+              <a:t>28.10.2025</a:t>
             </a:fld>
             <a:endParaRPr lang="de-DE"/>
           </a:p>
@@ -1737,7 +1736,7 @@
           <a:p>
             <a:fld id="{83D14EEA-DE26-4810-8E05-A65F0010FADE}" type="datetimeFigureOut">
               <a:rPr lang="de-DE" smtClean="0"/>
-              <a:t>23.10.2025</a:t>
+              <a:t>28.10.2025</a:t>
             </a:fld>
             <a:endParaRPr lang="de-DE"/>
           </a:p>
@@ -1832,7 +1831,7 @@
           <a:p>
             <a:fld id="{83D14EEA-DE26-4810-8E05-A65F0010FADE}" type="datetimeFigureOut">
               <a:rPr lang="de-DE" smtClean="0"/>
-              <a:t>23.10.2025</a:t>
+              <a:t>28.10.2025</a:t>
             </a:fld>
             <a:endParaRPr lang="de-DE"/>
           </a:p>
@@ -2109,7 +2108,7 @@
           <a:p>
             <a:fld id="{83D14EEA-DE26-4810-8E05-A65F0010FADE}" type="datetimeFigureOut">
               <a:rPr lang="de-DE" smtClean="0"/>
-              <a:t>23.10.2025</a:t>
+              <a:t>28.10.2025</a:t>
             </a:fld>
             <a:endParaRPr lang="de-DE"/>
           </a:p>
@@ -2366,7 +2365,7 @@
           <a:p>
             <a:fld id="{83D14EEA-DE26-4810-8E05-A65F0010FADE}" type="datetimeFigureOut">
               <a:rPr lang="de-DE" smtClean="0"/>
-              <a:t>23.10.2025</a:t>
+              <a:t>28.10.2025</a:t>
             </a:fld>
             <a:endParaRPr lang="de-DE"/>
           </a:p>
@@ -2579,7 +2578,7 @@
           <a:p>
             <a:fld id="{83D14EEA-DE26-4810-8E05-A65F0010FADE}" type="datetimeFigureOut">
               <a:rPr lang="de-DE" smtClean="0"/>
-              <a:t>23.10.2025</a:t>
+              <a:t>28.10.2025</a:t>
             </a:fld>
             <a:endParaRPr lang="de-DE"/>
           </a:p>
@@ -5427,7 +5426,7 @@
                 <a:latin typeface="Arial" panose="020B0604020202020204" pitchFamily="34" charset="0"/>
                 <a:cs typeface="Arial" panose="020B0604020202020204" pitchFamily="34" charset="0"/>
               </a:rPr>
-              <a:t>?</a:t>
+              <a:t>852</a:t>
             </a:r>
             <a:endParaRPr lang="de-DE" sz="1408" dirty="0">
               <a:solidFill>
@@ -5888,86 +5887,6 @@
     <p:extLst>
       <p:ext uri="{BB962C8B-B14F-4D97-AF65-F5344CB8AC3E}">
         <p14:creationId xmlns:p14="http://schemas.microsoft.com/office/powerpoint/2010/main" val="225445080"/>
-      </p:ext>
-    </p:extLst>
-  </p:cSld>
-  <p:clrMapOvr>
-    <a:masterClrMapping/>
-  </p:clrMapOvr>
-</p:sld>
-</file>
-
-<file path=ppt/slides/slide3.xml><?xml version="1.0" encoding="utf-8"?>
-<p:sld xmlns:a="http://schemas.openxmlformats.org/drawingml/2006/main" xmlns:r="http://schemas.openxmlformats.org/officeDocument/2006/relationships" xmlns:p="http://schemas.openxmlformats.org/presentationml/2006/main">
-  <p:cSld>
-    <p:spTree>
-      <p:nvGrpSpPr>
-        <p:cNvPr id="1" name=""/>
-        <p:cNvGrpSpPr/>
-        <p:nvPr/>
-      </p:nvGrpSpPr>
-      <p:grpSpPr>
-        <a:xfrm>
-          <a:off x="0" y="0"/>
-          <a:ext cx="0" cy="0"/>
-          <a:chOff x="0" y="0"/>
-          <a:chExt cx="0" cy="0"/>
-        </a:xfrm>
-      </p:grpSpPr>
-      <p:sp>
-        <p:nvSpPr>
-          <p:cNvPr id="2" name="Title 1">
-            <a:extLst>
-              <a:ext uri="{FF2B5EF4-FFF2-40B4-BE49-F238E27FC236}">
-                <a16:creationId xmlns:a16="http://schemas.microsoft.com/office/drawing/2014/main" id="{BF53E300-3FD7-4319-9640-2C4886D462FD}"/>
-              </a:ext>
-            </a:extLst>
-          </p:cNvPr>
-          <p:cNvSpPr>
-            <a:spLocks noGrp="1"/>
-          </p:cNvSpPr>
-          <p:nvPr>
-            <p:ph type="title"/>
-          </p:nvPr>
-        </p:nvSpPr>
-        <p:spPr/>
-        <p:txBody>
-          <a:bodyPr/>
-          <a:lstStyle/>
-          <a:p>
-            <a:endParaRPr lang="de-DE"/>
-          </a:p>
-        </p:txBody>
-      </p:sp>
-      <p:sp>
-        <p:nvSpPr>
-          <p:cNvPr id="3" name="Content Placeholder 2">
-            <a:extLst>
-              <a:ext uri="{FF2B5EF4-FFF2-40B4-BE49-F238E27FC236}">
-                <a16:creationId xmlns:a16="http://schemas.microsoft.com/office/drawing/2014/main" id="{34B3A751-5B87-4E9F-8BB0-8F64161D3A4C}"/>
-              </a:ext>
-            </a:extLst>
-          </p:cNvPr>
-          <p:cNvSpPr>
-            <a:spLocks noGrp="1"/>
-          </p:cNvSpPr>
-          <p:nvPr>
-            <p:ph idx="1"/>
-          </p:nvPr>
-        </p:nvSpPr>
-        <p:spPr/>
-        <p:txBody>
-          <a:bodyPr/>
-          <a:lstStyle/>
-          <a:p>
-            <a:endParaRPr lang="de-DE"/>
-          </a:p>
-        </p:txBody>
-      </p:sp>
-    </p:spTree>
-    <p:extLst>
-      <p:ext uri="{BB962C8B-B14F-4D97-AF65-F5344CB8AC3E}">
-        <p14:creationId xmlns:p14="http://schemas.microsoft.com/office/powerpoint/2010/main" val="3543156593"/>
       </p:ext>
     </p:extLst>
   </p:cSld>

--- a/plots_png/pptx/plots_png.pptx
+++ b/plots_png/pptx/plots_png.pptx
@@ -255,7 +255,7 @@
           <a:p>
             <a:fld id="{83D14EEA-DE26-4810-8E05-A65F0010FADE}" type="datetimeFigureOut">
               <a:rPr lang="de-DE" smtClean="0"/>
-              <a:t>28.10.2025</a:t>
+              <a:t>12.12.2025</a:t>
             </a:fld>
             <a:endParaRPr lang="de-DE"/>
           </a:p>
@@ -425,7 +425,7 @@
           <a:p>
             <a:fld id="{83D14EEA-DE26-4810-8E05-A65F0010FADE}" type="datetimeFigureOut">
               <a:rPr lang="de-DE" smtClean="0"/>
-              <a:t>28.10.2025</a:t>
+              <a:t>12.12.2025</a:t>
             </a:fld>
             <a:endParaRPr lang="de-DE"/>
           </a:p>
@@ -605,7 +605,7 @@
           <a:p>
             <a:fld id="{83D14EEA-DE26-4810-8E05-A65F0010FADE}" type="datetimeFigureOut">
               <a:rPr lang="de-DE" smtClean="0"/>
-              <a:t>28.10.2025</a:t>
+              <a:t>12.12.2025</a:t>
             </a:fld>
             <a:endParaRPr lang="de-DE"/>
           </a:p>
@@ -775,7 +775,7 @@
           <a:p>
             <a:fld id="{83D14EEA-DE26-4810-8E05-A65F0010FADE}" type="datetimeFigureOut">
               <a:rPr lang="de-DE" smtClean="0"/>
-              <a:t>28.10.2025</a:t>
+              <a:t>12.12.2025</a:t>
             </a:fld>
             <a:endParaRPr lang="de-DE"/>
           </a:p>
@@ -1019,7 +1019,7 @@
           <a:p>
             <a:fld id="{83D14EEA-DE26-4810-8E05-A65F0010FADE}" type="datetimeFigureOut">
               <a:rPr lang="de-DE" smtClean="0"/>
-              <a:t>28.10.2025</a:t>
+              <a:t>12.12.2025</a:t>
             </a:fld>
             <a:endParaRPr lang="de-DE"/>
           </a:p>
@@ -1251,7 +1251,7 @@
           <a:p>
             <a:fld id="{83D14EEA-DE26-4810-8E05-A65F0010FADE}" type="datetimeFigureOut">
               <a:rPr lang="de-DE" smtClean="0"/>
-              <a:t>28.10.2025</a:t>
+              <a:t>12.12.2025</a:t>
             </a:fld>
             <a:endParaRPr lang="de-DE"/>
           </a:p>
@@ -1618,7 +1618,7 @@
           <a:p>
             <a:fld id="{83D14EEA-DE26-4810-8E05-A65F0010FADE}" type="datetimeFigureOut">
               <a:rPr lang="de-DE" smtClean="0"/>
-              <a:t>28.10.2025</a:t>
+              <a:t>12.12.2025</a:t>
             </a:fld>
             <a:endParaRPr lang="de-DE"/>
           </a:p>
@@ -1736,7 +1736,7 @@
           <a:p>
             <a:fld id="{83D14EEA-DE26-4810-8E05-A65F0010FADE}" type="datetimeFigureOut">
               <a:rPr lang="de-DE" smtClean="0"/>
-              <a:t>28.10.2025</a:t>
+              <a:t>12.12.2025</a:t>
             </a:fld>
             <a:endParaRPr lang="de-DE"/>
           </a:p>
@@ -1831,7 +1831,7 @@
           <a:p>
             <a:fld id="{83D14EEA-DE26-4810-8E05-A65F0010FADE}" type="datetimeFigureOut">
               <a:rPr lang="de-DE" smtClean="0"/>
-              <a:t>28.10.2025</a:t>
+              <a:t>12.12.2025</a:t>
             </a:fld>
             <a:endParaRPr lang="de-DE"/>
           </a:p>
@@ -2108,7 +2108,7 @@
           <a:p>
             <a:fld id="{83D14EEA-DE26-4810-8E05-A65F0010FADE}" type="datetimeFigureOut">
               <a:rPr lang="de-DE" smtClean="0"/>
-              <a:t>28.10.2025</a:t>
+              <a:t>12.12.2025</a:t>
             </a:fld>
             <a:endParaRPr lang="de-DE"/>
           </a:p>
@@ -2365,7 +2365,7 @@
           <a:p>
             <a:fld id="{83D14EEA-DE26-4810-8E05-A65F0010FADE}" type="datetimeFigureOut">
               <a:rPr lang="de-DE" smtClean="0"/>
-              <a:t>28.10.2025</a:t>
+              <a:t>12.12.2025</a:t>
             </a:fld>
             <a:endParaRPr lang="de-DE"/>
           </a:p>
@@ -2578,7 +2578,7 @@
           <a:p>
             <a:fld id="{83D14EEA-DE26-4810-8E05-A65F0010FADE}" type="datetimeFigureOut">
               <a:rPr lang="de-DE" smtClean="0"/>
-              <a:t>28.10.2025</a:t>
+              <a:t>12.12.2025</a:t>
             </a:fld>
             <a:endParaRPr lang="de-DE"/>
           </a:p>
@@ -4368,7 +4368,7 @@
                 <a:latin typeface="Arial" panose="020B0604020202020204" pitchFamily="34" charset="0"/>
                 <a:cs typeface="Arial" panose="020B0604020202020204" pitchFamily="34" charset="0"/>
               </a:rPr>
-              <a:t>Detected Datasets</a:t>
+              <a:t>Mentioned Datasets</a:t>
             </a:r>
             <a:endParaRPr lang="de-DE" sz="1291" dirty="0">
               <a:latin typeface="Arial" panose="020B0604020202020204" pitchFamily="34" charset="0"/>

--- a/plots_png/pptx/plots_png.pptx
+++ b/plots_png/pptx/plots_png.pptx
@@ -255,7 +255,7 @@
           <a:p>
             <a:fld id="{83D14EEA-DE26-4810-8E05-A65F0010FADE}" type="datetimeFigureOut">
               <a:rPr lang="de-DE" smtClean="0"/>
-              <a:t>12.12.2025</a:t>
+              <a:t>19.12.2025</a:t>
             </a:fld>
             <a:endParaRPr lang="de-DE"/>
           </a:p>
@@ -425,7 +425,7 @@
           <a:p>
             <a:fld id="{83D14EEA-DE26-4810-8E05-A65F0010FADE}" type="datetimeFigureOut">
               <a:rPr lang="de-DE" smtClean="0"/>
-              <a:t>12.12.2025</a:t>
+              <a:t>19.12.2025</a:t>
             </a:fld>
             <a:endParaRPr lang="de-DE"/>
           </a:p>
@@ -605,7 +605,7 @@
           <a:p>
             <a:fld id="{83D14EEA-DE26-4810-8E05-A65F0010FADE}" type="datetimeFigureOut">
               <a:rPr lang="de-DE" smtClean="0"/>
-              <a:t>12.12.2025</a:t>
+              <a:t>19.12.2025</a:t>
             </a:fld>
             <a:endParaRPr lang="de-DE"/>
           </a:p>
@@ -775,7 +775,7 @@
           <a:p>
             <a:fld id="{83D14EEA-DE26-4810-8E05-A65F0010FADE}" type="datetimeFigureOut">
               <a:rPr lang="de-DE" smtClean="0"/>
-              <a:t>12.12.2025</a:t>
+              <a:t>19.12.2025</a:t>
             </a:fld>
             <a:endParaRPr lang="de-DE"/>
           </a:p>
@@ -1019,7 +1019,7 @@
           <a:p>
             <a:fld id="{83D14EEA-DE26-4810-8E05-A65F0010FADE}" type="datetimeFigureOut">
               <a:rPr lang="de-DE" smtClean="0"/>
-              <a:t>12.12.2025</a:t>
+              <a:t>19.12.2025</a:t>
             </a:fld>
             <a:endParaRPr lang="de-DE"/>
           </a:p>
@@ -1251,7 +1251,7 @@
           <a:p>
             <a:fld id="{83D14EEA-DE26-4810-8E05-A65F0010FADE}" type="datetimeFigureOut">
               <a:rPr lang="de-DE" smtClean="0"/>
-              <a:t>12.12.2025</a:t>
+              <a:t>19.12.2025</a:t>
             </a:fld>
             <a:endParaRPr lang="de-DE"/>
           </a:p>
@@ -1618,7 +1618,7 @@
           <a:p>
             <a:fld id="{83D14EEA-DE26-4810-8E05-A65F0010FADE}" type="datetimeFigureOut">
               <a:rPr lang="de-DE" smtClean="0"/>
-              <a:t>12.12.2025</a:t>
+              <a:t>19.12.2025</a:t>
             </a:fld>
             <a:endParaRPr lang="de-DE"/>
           </a:p>
@@ -1736,7 +1736,7 @@
           <a:p>
             <a:fld id="{83D14EEA-DE26-4810-8E05-A65F0010FADE}" type="datetimeFigureOut">
               <a:rPr lang="de-DE" smtClean="0"/>
-              <a:t>12.12.2025</a:t>
+              <a:t>19.12.2025</a:t>
             </a:fld>
             <a:endParaRPr lang="de-DE"/>
           </a:p>
@@ -1831,7 +1831,7 @@
           <a:p>
             <a:fld id="{83D14EEA-DE26-4810-8E05-A65F0010FADE}" type="datetimeFigureOut">
               <a:rPr lang="de-DE" smtClean="0"/>
-              <a:t>12.12.2025</a:t>
+              <a:t>19.12.2025</a:t>
             </a:fld>
             <a:endParaRPr lang="de-DE"/>
           </a:p>
@@ -2108,7 +2108,7 @@
           <a:p>
             <a:fld id="{83D14EEA-DE26-4810-8E05-A65F0010FADE}" type="datetimeFigureOut">
               <a:rPr lang="de-DE" smtClean="0"/>
-              <a:t>12.12.2025</a:t>
+              <a:t>19.12.2025</a:t>
             </a:fld>
             <a:endParaRPr lang="de-DE"/>
           </a:p>
@@ -2365,7 +2365,7 @@
           <a:p>
             <a:fld id="{83D14EEA-DE26-4810-8E05-A65F0010FADE}" type="datetimeFigureOut">
               <a:rPr lang="de-DE" smtClean="0"/>
-              <a:t>12.12.2025</a:t>
+              <a:t>19.12.2025</a:t>
             </a:fld>
             <a:endParaRPr lang="de-DE"/>
           </a:p>
@@ -2578,7 +2578,7 @@
           <a:p>
             <a:fld id="{83D14EEA-DE26-4810-8E05-A65F0010FADE}" type="datetimeFigureOut">
               <a:rPr lang="de-DE" smtClean="0"/>
-              <a:t>12.12.2025</a:t>
+              <a:t>19.12.2025</a:t>
             </a:fld>
             <a:endParaRPr lang="de-DE"/>
           </a:p>
@@ -3063,7 +3063,7 @@
                 <a:latin typeface="Arial" panose="020B0604020202020204" pitchFamily="34" charset="0"/>
                 <a:cs typeface="Arial" panose="020B0604020202020204" pitchFamily="34" charset="0"/>
               </a:rPr>
-              <a:t>2385</a:t>
+              <a:t>2,385</a:t>
             </a:r>
             <a:endParaRPr lang="de-DE" sz="1408" dirty="0">
               <a:solidFill>
@@ -3247,7 +3247,7 @@
                 <a:latin typeface="Arial" panose="020B0604020202020204" pitchFamily="34" charset="0"/>
                 <a:cs typeface="Arial" panose="020B0604020202020204" pitchFamily="34" charset="0"/>
               </a:rPr>
-              <a:t>1032</a:t>
+              <a:t>1,032</a:t>
             </a:r>
             <a:endParaRPr lang="de-DE" sz="1408" dirty="0">
               <a:solidFill>
@@ -3762,7 +3762,7 @@
                 <a:latin typeface="Arial" panose="020B0604020202020204" pitchFamily="34" charset="0"/>
                 <a:cs typeface="Arial" panose="020B0604020202020204" pitchFamily="34" charset="0"/>
               </a:rPr>
-              <a:t>1497</a:t>
+              <a:t>1,497</a:t>
             </a:r>
             <a:endParaRPr lang="de-DE" sz="1408" dirty="0">
               <a:solidFill>
@@ -4101,7 +4101,7 @@
                 <a:latin typeface="Arial" panose="020B0604020202020204" pitchFamily="34" charset="0"/>
                 <a:cs typeface="Arial" panose="020B0604020202020204" pitchFamily="34" charset="0"/>
               </a:rPr>
-              <a:t>Reused by 1390 Papers</a:t>
+              <a:t>Reused by 1,390 Papers</a:t>
             </a:r>
           </a:p>
         </p:txBody>
@@ -4457,7 +4457,7 @@
                 <a:latin typeface="Arial" panose="020B0604020202020204" pitchFamily="34" charset="0"/>
                 <a:cs typeface="Arial" panose="020B0604020202020204" pitchFamily="34" charset="0"/>
               </a:rPr>
-              <a:t>1583</a:t>
+              <a:t>1,583</a:t>
             </a:r>
             <a:endParaRPr lang="de-DE" sz="1408" dirty="0">
               <a:solidFill>
@@ -4590,7 +4590,7 @@
                 <a:latin typeface="Arial" panose="020B0604020202020204" pitchFamily="34" charset="0"/>
                 <a:cs typeface="Arial" panose="020B0604020202020204" pitchFamily="34" charset="0"/>
               </a:rPr>
-              <a:t>15748 Charité Papers (2020-2023)</a:t>
+              <a:t>15,748 Charité Papers (2020-2023)</a:t>
             </a:r>
             <a:endParaRPr lang="de-DE" sz="1408" dirty="0">
               <a:solidFill>
@@ -5223,8 +5223,8 @@
         </p:nvSpPr>
         <p:spPr>
           <a:xfrm>
-            <a:off x="5059535" y="3284493"/>
-            <a:ext cx="1828113" cy="480581"/>
+            <a:off x="5059536" y="3299728"/>
+            <a:ext cx="2655711" cy="480581"/>
           </a:xfrm>
           <a:prstGeom prst="rect">
             <a:avLst/>
@@ -5241,7 +5241,7 @@
                 <a:latin typeface="Arial" panose="020B0604020202020204" pitchFamily="34" charset="0"/>
                 <a:cs typeface="Arial" panose="020B0604020202020204" pitchFamily="34" charset="0"/>
               </a:rPr>
-              <a:t>Confirmed Citations</a:t>
+              <a:t>Confirmed Indirect Data Citations</a:t>
             </a:r>
           </a:p>
           <a:p>
@@ -5255,7 +5255,7 @@
                 <a:latin typeface="Arial" panose="020B0604020202020204" pitchFamily="34" charset="0"/>
                 <a:cs typeface="Arial" panose="020B0604020202020204" pitchFamily="34" charset="0"/>
               </a:rPr>
-              <a:t>(113 Reusing Papers)</a:t>
+              <a:t>(1,722 Citations Overall)</a:t>
             </a:r>
           </a:p>
         </p:txBody>
@@ -5330,14 +5330,14 @@
           <a:p>
             <a:pPr algn="ctr"/>
             <a:r>
-              <a:rPr lang="en-US" sz="1408">
+              <a:rPr lang="en-US" sz="1408" dirty="0">
                 <a:solidFill>
                   <a:schemeClr val="tx1"/>
                 </a:solidFill>
                 <a:latin typeface="Arial" panose="020B0604020202020204" pitchFamily="34" charset="0"/>
                 <a:cs typeface="Arial" panose="020B0604020202020204" pitchFamily="34" charset="0"/>
               </a:rPr>
-              <a:t>1765</a:t>
+              <a:t>113</a:t>
             </a:r>
             <a:endParaRPr lang="de-DE" sz="1408" dirty="0">
               <a:solidFill>
@@ -5426,7 +5426,7 @@
                 <a:latin typeface="Arial" panose="020B0604020202020204" pitchFamily="34" charset="0"/>
                 <a:cs typeface="Arial" panose="020B0604020202020204" pitchFamily="34" charset="0"/>
               </a:rPr>
-              <a:t>852</a:t>
+              <a:t>846</a:t>
             </a:r>
             <a:endParaRPr lang="de-DE" sz="1408" dirty="0">
               <a:solidFill>
@@ -5604,7 +5604,7 @@
                 <a:latin typeface="Arial" panose="020B0604020202020204" pitchFamily="34" charset="0"/>
                 <a:cs typeface="Arial" panose="020B0604020202020204" pitchFamily="34" charset="0"/>
               </a:rPr>
-              <a:t>34</a:t>
+              <a:t>35</a:t>
             </a:r>
             <a:endParaRPr lang="de-DE" sz="1408" dirty="0">
               <a:solidFill>
@@ -5782,7 +5782,7 @@
                 <a:latin typeface="Arial" panose="020B0604020202020204" pitchFamily="34" charset="0"/>
                 <a:cs typeface="Arial" panose="020B0604020202020204" pitchFamily="34" charset="0"/>
               </a:rPr>
-              <a:t>28</a:t>
+              <a:t>21</a:t>
             </a:r>
             <a:endParaRPr lang="de-DE" sz="1408" dirty="0">
               <a:solidFill>
